--- a/sem_1_tools/presentations/Семинар_1_tools.pptx
+++ b/sem_1_tools/presentations/Семинар_1_tools.pptx
@@ -8,16 +8,19 @@
     <p:sldId id="256" r:id="rId2"/>
     <p:sldId id="257" r:id="rId3"/>
     <p:sldId id="258" r:id="rId4"/>
-    <p:sldId id="259" r:id="rId5"/>
-    <p:sldId id="267" r:id="rId6"/>
-    <p:sldId id="266" r:id="rId7"/>
-    <p:sldId id="265" r:id="rId8"/>
-    <p:sldId id="264" r:id="rId9"/>
-    <p:sldId id="260" r:id="rId10"/>
-    <p:sldId id="268" r:id="rId11"/>
-    <p:sldId id="261" r:id="rId12"/>
-    <p:sldId id="262" r:id="rId13"/>
-    <p:sldId id="263" r:id="rId14"/>
+    <p:sldId id="269" r:id="rId5"/>
+    <p:sldId id="259" r:id="rId6"/>
+    <p:sldId id="267" r:id="rId7"/>
+    <p:sldId id="266" r:id="rId8"/>
+    <p:sldId id="265" r:id="rId9"/>
+    <p:sldId id="270" r:id="rId10"/>
+    <p:sldId id="264" r:id="rId11"/>
+    <p:sldId id="260" r:id="rId12"/>
+    <p:sldId id="268" r:id="rId13"/>
+    <p:sldId id="271" r:id="rId14"/>
+    <p:sldId id="261" r:id="rId15"/>
+    <p:sldId id="262" r:id="rId16"/>
+    <p:sldId id="263" r:id="rId17"/>
   </p:sldIdLst>
   <p:sldSz cx="20104100" cy="11309350"/>
   <p:notesSz cx="20104100" cy="11309350"/>
@@ -274,7 +277,7 @@
           <a:p>
             <a:fld id="{1D8BD707-D9CF-40AE-B4C6-C98DA3205C09}" type="datetimeFigureOut">
               <a:rPr lang="en-US"/>
-              <a:t>9/13/2024</a:t>
+              <a:t>9/9/2025</a:t>
             </a:fld>
             <a:endParaRPr lang="en-US"/>
           </a:p>
@@ -449,7 +452,7 @@
           <a:p>
             <a:fld id="{1D8BD707-D9CF-40AE-B4C6-C98DA3205C09}" type="datetimeFigureOut">
               <a:rPr lang="en-US"/>
-              <a:t>9/13/2024</a:t>
+              <a:t>9/9/2025</a:t>
             </a:fld>
             <a:endParaRPr lang="en-US"/>
           </a:p>
@@ -663,7 +666,7 @@
           <a:p>
             <a:fld id="{1D8BD707-D9CF-40AE-B4C6-C98DA3205C09}" type="datetimeFigureOut">
               <a:rPr lang="en-US"/>
-              <a:t>9/13/2024</a:t>
+              <a:t>9/9/2025</a:t>
             </a:fld>
             <a:endParaRPr lang="en-US"/>
           </a:p>
@@ -811,7 +814,7 @@
           <a:p>
             <a:fld id="{1D8BD707-D9CF-40AE-B4C6-C98DA3205C09}" type="datetimeFigureOut">
               <a:rPr lang="en-US"/>
-              <a:t>9/13/2024</a:t>
+              <a:t>9/9/2025</a:t>
             </a:fld>
             <a:endParaRPr lang="en-US"/>
           </a:p>
@@ -930,7 +933,7 @@
           <a:p>
             <a:fld id="{1D8BD707-D9CF-40AE-B4C6-C98DA3205C09}" type="datetimeFigureOut">
               <a:rPr lang="en-US"/>
-              <a:t>9/13/2024</a:t>
+              <a:t>9/9/2025</a:t>
             </a:fld>
             <a:endParaRPr lang="en-US"/>
           </a:p>
@@ -1153,7 +1156,7 @@
           <a:p>
             <a:fld id="{1D8BD707-D9CF-40AE-B4C6-C98DA3205C09}" type="datetimeFigureOut">
               <a:rPr lang="en-US"/>
-              <a:t>9/13/2024</a:t>
+              <a:t>9/9/2025</a:t>
             </a:fld>
             <a:endParaRPr lang="en-US"/>
           </a:p>
@@ -1372,28 +1375,6 @@
           <a:chExt cx="0" cy="0"/>
         </a:xfrm>
       </p:grpSpPr>
-      <p:pic>
-        <p:nvPicPr>
-          <p:cNvPr id="2" name="object 2"/>
-          <p:cNvPicPr/>
-          <p:nvPr/>
-        </p:nvPicPr>
-        <p:blipFill>
-          <a:blip r:embed="rId2" cstate="print"/>
-          <a:stretch>
-            <a:fillRect/>
-          </a:stretch>
-        </p:blipFill>
-        <p:spPr>
-          <a:xfrm>
-            <a:off x="7205411" y="2225675"/>
-            <a:ext cx="5693278" cy="1368207"/>
-          </a:xfrm>
-          <a:prstGeom prst="rect">
-            <a:avLst/>
-          </a:prstGeom>
-        </p:spPr>
-      </p:pic>
       <p:sp>
         <p:nvSpPr>
           <p:cNvPr id="3" name="object 3"/>
@@ -1483,6 +1464,41 @@
           </a:p>
         </p:txBody>
       </p:sp>
+      <p:sp>
+        <p:nvSpPr>
+          <p:cNvPr id="4" name="TextBox 3">
+            <a:extLst>
+              <a:ext uri="{FF2B5EF4-FFF2-40B4-BE49-F238E27FC236}">
+                <a16:creationId xmlns:a16="http://schemas.microsoft.com/office/drawing/2014/main" id="{D9C8E777-7E38-4E09-B133-8A0460F98E7E}"/>
+              </a:ext>
+            </a:extLst>
+          </p:cNvPr>
+          <p:cNvSpPr txBox="1"/>
+          <p:nvPr/>
+        </p:nvSpPr>
+        <p:spPr>
+          <a:xfrm>
+            <a:off x="8467089" y="2301875"/>
+            <a:ext cx="3169919" cy="1569660"/>
+          </a:xfrm>
+          <a:prstGeom prst="rect">
+            <a:avLst/>
+          </a:prstGeom>
+          <a:noFill/>
+        </p:spPr>
+        <p:txBody>
+          <a:bodyPr wrap="square" rtlCol="0">
+            <a:spAutoFit/>
+          </a:bodyPr>
+          <a:lstStyle/>
+          <a:p>
+            <a:r>
+              <a:rPr lang="ru-RU" sz="9600" b="1" dirty="0"/>
+              <a:t>АКОС</a:t>
+            </a:r>
+          </a:p>
+        </p:txBody>
+      </p:sp>
     </p:spTree>
   </p:cSld>
   <p:clrMapOvr>
@@ -1492,6 +1508,398 @@
 </file>
 
 <file path=ppt/slides/slide10.xml><?xml version="1.0" encoding="utf-8"?>
+<p:sld xmlns:a="http://schemas.openxmlformats.org/drawingml/2006/main" xmlns:r="http://schemas.openxmlformats.org/officeDocument/2006/relationships" xmlns:p="http://schemas.openxmlformats.org/presentationml/2006/main">
+  <p:cSld>
+    <p:spTree>
+      <p:nvGrpSpPr>
+        <p:cNvPr id="1" name=""/>
+        <p:cNvGrpSpPr/>
+        <p:nvPr/>
+      </p:nvGrpSpPr>
+      <p:grpSpPr>
+        <a:xfrm>
+          <a:off x="0" y="0"/>
+          <a:ext cx="0" cy="0"/>
+          <a:chOff x="0" y="0"/>
+          <a:chExt cx="0" cy="0"/>
+        </a:xfrm>
+      </p:grpSpPr>
+      <p:sp>
+        <p:nvSpPr>
+          <p:cNvPr id="2" name="Title 1">
+            <a:extLst>
+              <a:ext uri="{FF2B5EF4-FFF2-40B4-BE49-F238E27FC236}">
+                <a16:creationId xmlns:a16="http://schemas.microsoft.com/office/drawing/2014/main" id="{70C1309F-C22A-410F-8027-7C78B81B564D}"/>
+              </a:ext>
+            </a:extLst>
+          </p:cNvPr>
+          <p:cNvSpPr>
+            <a:spLocks noGrp="1"/>
+          </p:cNvSpPr>
+          <p:nvPr>
+            <p:ph type="title"/>
+          </p:nvPr>
+        </p:nvSpPr>
+        <p:spPr/>
+        <p:txBody>
+          <a:bodyPr/>
+          <a:lstStyle/>
+          <a:p>
+            <a:r>
+              <a:rPr lang="en-US" dirty="0"/>
+              <a:t>Sources</a:t>
+            </a:r>
+            <a:endParaRPr lang="ru-RU" dirty="0"/>
+          </a:p>
+        </p:txBody>
+      </p:sp>
+      <p:sp>
+        <p:nvSpPr>
+          <p:cNvPr id="3" name="Text Placeholder 2">
+            <a:extLst>
+              <a:ext uri="{FF2B5EF4-FFF2-40B4-BE49-F238E27FC236}">
+                <a16:creationId xmlns:a16="http://schemas.microsoft.com/office/drawing/2014/main" id="{92F45A87-1838-486E-843B-B74B47A71AC4}"/>
+              </a:ext>
+            </a:extLst>
+          </p:cNvPr>
+          <p:cNvSpPr>
+            <a:spLocks noGrp="1"/>
+          </p:cNvSpPr>
+          <p:nvPr>
+            <p:ph type="body" idx="1"/>
+          </p:nvPr>
+        </p:nvSpPr>
+        <p:spPr>
+          <a:xfrm>
+            <a:off x="1076272" y="3513916"/>
+            <a:ext cx="17951555" cy="2708434"/>
+          </a:xfrm>
+        </p:spPr>
+        <p:txBody>
+          <a:bodyPr/>
+          <a:lstStyle/>
+          <a:p>
+            <a:r>
+              <a:rPr lang="en-US" sz="4400" b="0" i="0" u="none" strike="noStrike" baseline="0" dirty="0">
+                <a:latin typeface="Arial" panose="020B0604020202020204" pitchFamily="34" charset="0"/>
+                <a:cs typeface="Arial" panose="020B0604020202020204" pitchFamily="34" charset="0"/>
+                <a:hlinkClick r:id="rId2"/>
+              </a:rPr>
+              <a:t>GDB cheat sheet </a:t>
+            </a:r>
+            <a:endParaRPr lang="en-US" sz="4400" b="0" i="0" u="none" strike="noStrike" baseline="0" dirty="0">
+              <a:latin typeface="Arial" panose="020B0604020202020204" pitchFamily="34" charset="0"/>
+              <a:cs typeface="Arial" panose="020B0604020202020204" pitchFamily="34" charset="0"/>
+            </a:endParaRPr>
+          </a:p>
+          <a:p>
+            <a:r>
+              <a:rPr lang="en-US" sz="4400" b="0" i="0" u="none" strike="noStrike" baseline="0" dirty="0">
+                <a:latin typeface="Arial" panose="020B0604020202020204" pitchFamily="34" charset="0"/>
+                <a:cs typeface="Arial" panose="020B0604020202020204" pitchFamily="34" charset="0"/>
+                <a:hlinkClick r:id="rId3"/>
+              </a:rPr>
+              <a:t>One more </a:t>
+            </a:r>
+            <a:endParaRPr lang="en-US" sz="4400" b="0" i="0" u="none" strike="noStrike" baseline="0" dirty="0">
+              <a:latin typeface="Arial" panose="020B0604020202020204" pitchFamily="34" charset="0"/>
+              <a:cs typeface="Arial" panose="020B0604020202020204" pitchFamily="34" charset="0"/>
+            </a:endParaRPr>
+          </a:p>
+          <a:p>
+            <a:r>
+              <a:rPr lang="ru-RU" sz="4400" dirty="0">
+                <a:latin typeface="Arial" panose="020B0604020202020204" pitchFamily="34" charset="0"/>
+                <a:cs typeface="Arial" panose="020B0604020202020204" pitchFamily="34" charset="0"/>
+                <a:hlinkClick r:id="rId4"/>
+              </a:rPr>
+              <a:t>Занятная статья на </a:t>
+            </a:r>
+            <a:r>
+              <a:rPr lang="ru-RU" sz="4400" dirty="0" err="1">
+                <a:latin typeface="Arial" panose="020B0604020202020204" pitchFamily="34" charset="0"/>
+                <a:cs typeface="Arial" panose="020B0604020202020204" pitchFamily="34" charset="0"/>
+                <a:hlinkClick r:id="rId4"/>
+              </a:rPr>
+              <a:t>Хабре</a:t>
+            </a:r>
+            <a:endParaRPr lang="ru-RU" sz="4400" dirty="0">
+              <a:latin typeface="Arial" panose="020B0604020202020204" pitchFamily="34" charset="0"/>
+              <a:cs typeface="Arial" panose="020B0604020202020204" pitchFamily="34" charset="0"/>
+            </a:endParaRPr>
+          </a:p>
+          <a:p>
+            <a:r>
+              <a:rPr lang="en-US" sz="4400" dirty="0">
+                <a:latin typeface="Arial" panose="020B0604020202020204" pitchFamily="34" charset="0"/>
+                <a:cs typeface="Arial" panose="020B0604020202020204" pitchFamily="34" charset="0"/>
+                <a:hlinkClick r:id="rId5"/>
+              </a:rPr>
+              <a:t>TUI documentation</a:t>
+            </a:r>
+            <a:endParaRPr lang="ru-RU" sz="4400" dirty="0">
+              <a:latin typeface="Arial" panose="020B0604020202020204" pitchFamily="34" charset="0"/>
+              <a:cs typeface="Arial" panose="020B0604020202020204" pitchFamily="34" charset="0"/>
+            </a:endParaRPr>
+          </a:p>
+        </p:txBody>
+      </p:sp>
+    </p:spTree>
+    <p:extLst>
+      <p:ext uri="{BB962C8B-B14F-4D97-AF65-F5344CB8AC3E}">
+        <p14:creationId xmlns:p14="http://schemas.microsoft.com/office/powerpoint/2010/main" val="2888397059"/>
+      </p:ext>
+    </p:extLst>
+  </p:cSld>
+  <p:clrMapOvr>
+    <a:masterClrMapping/>
+  </p:clrMapOvr>
+</p:sld>
+</file>
+
+<file path=ppt/slides/slide11.xml><?xml version="1.0" encoding="utf-8"?>
+<p:sld xmlns:a="http://schemas.openxmlformats.org/drawingml/2006/main" xmlns:r="http://schemas.openxmlformats.org/officeDocument/2006/relationships" xmlns:p="http://schemas.openxmlformats.org/presentationml/2006/main" showMasterSp="0">
+  <p:cSld>
+    <p:spTree>
+      <p:nvGrpSpPr>
+        <p:cNvPr id="1" name=""/>
+        <p:cNvGrpSpPr/>
+        <p:nvPr/>
+      </p:nvGrpSpPr>
+      <p:grpSpPr>
+        <a:xfrm>
+          <a:off x="0" y="0"/>
+          <a:ext cx="0" cy="0"/>
+          <a:chOff x="0" y="0"/>
+          <a:chExt cx="0" cy="0"/>
+        </a:xfrm>
+      </p:grpSpPr>
+      <p:sp>
+        <p:nvSpPr>
+          <p:cNvPr id="2" name="object 2"/>
+          <p:cNvSpPr txBox="1">
+            <a:spLocks noGrp="1"/>
+          </p:cNvSpPr>
+          <p:nvPr>
+            <p:ph type="title"/>
+          </p:nvPr>
+        </p:nvSpPr>
+        <p:spPr>
+          <a:xfrm>
+            <a:off x="8130558" y="832090"/>
+            <a:ext cx="4436092" cy="1077859"/>
+          </a:xfrm>
+          <a:prstGeom prst="rect">
+            <a:avLst/>
+          </a:prstGeom>
+        </p:spPr>
+        <p:txBody>
+          <a:bodyPr vert="horz" wrap="square" lIns="0" tIns="15875" rIns="0" bIns="0" rtlCol="0">
+            <a:spAutoFit/>
+          </a:bodyPr>
+          <a:lstStyle/>
+          <a:p>
+            <a:pPr marL="12700">
+              <a:lnSpc>
+                <a:spcPct val="100000"/>
+              </a:lnSpc>
+              <a:spcBef>
+                <a:spcPts val="125"/>
+              </a:spcBef>
+            </a:pPr>
+            <a:r>
+              <a:rPr lang="en-US" spc="-185" dirty="0"/>
+              <a:t>S</a:t>
+            </a:r>
+            <a:r>
+              <a:rPr spc="-185" dirty="0"/>
+              <a:t>anitizers</a:t>
+            </a:r>
+          </a:p>
+        </p:txBody>
+      </p:sp>
+      <p:sp>
+        <p:nvSpPr>
+          <p:cNvPr id="3" name="object 3"/>
+          <p:cNvSpPr txBox="1"/>
+          <p:nvPr/>
+        </p:nvSpPr>
+        <p:spPr>
+          <a:xfrm>
+            <a:off x="1289050" y="3153349"/>
+            <a:ext cx="10210800" cy="5002652"/>
+          </a:xfrm>
+          <a:prstGeom prst="rect">
+            <a:avLst/>
+          </a:prstGeom>
+        </p:spPr>
+        <p:txBody>
+          <a:bodyPr vert="horz" wrap="square" lIns="0" tIns="331470" rIns="0" bIns="0" rtlCol="0">
+            <a:spAutoFit/>
+          </a:bodyPr>
+          <a:lstStyle/>
+          <a:p>
+            <a:pPr marL="473075" indent="-461009">
+              <a:lnSpc>
+                <a:spcPct val="100000"/>
+              </a:lnSpc>
+              <a:spcBef>
+                <a:spcPts val="2610"/>
+              </a:spcBef>
+              <a:buChar char="•"/>
+              <a:tabLst>
+                <a:tab pos="473075" algn="l"/>
+                <a:tab pos="473709" algn="l"/>
+              </a:tabLst>
+            </a:pPr>
+            <a:r>
+              <a:rPr sz="4400" spc="105" dirty="0">
+                <a:latin typeface="Arial" panose="020B0604020202020204" pitchFamily="34" charset="0"/>
+                <a:cs typeface="Arial" panose="020B0604020202020204" pitchFamily="34" charset="0"/>
+              </a:rPr>
+              <a:t>-fsanitize=…</a:t>
+            </a:r>
+            <a:endParaRPr sz="4400" dirty="0">
+              <a:latin typeface="Arial" panose="020B0604020202020204" pitchFamily="34" charset="0"/>
+              <a:cs typeface="Arial" panose="020B0604020202020204" pitchFamily="34" charset="0"/>
+            </a:endParaRPr>
+          </a:p>
+          <a:p>
+            <a:pPr marL="934085" lvl="1" indent="-461645">
+              <a:lnSpc>
+                <a:spcPct val="100000"/>
+              </a:lnSpc>
+              <a:spcBef>
+                <a:spcPts val="2520"/>
+              </a:spcBef>
+              <a:buChar char="•"/>
+              <a:tabLst>
+                <a:tab pos="933450" algn="l"/>
+                <a:tab pos="934719" algn="l"/>
+              </a:tabLst>
+            </a:pPr>
+            <a:r>
+              <a:rPr lang="en-US" sz="4400" spc="75" dirty="0">
+                <a:latin typeface="Arial" panose="020B0604020202020204" pitchFamily="34" charset="0"/>
+                <a:cs typeface="Arial" panose="020B0604020202020204" pitchFamily="34" charset="0"/>
+              </a:rPr>
+              <a:t>a</a:t>
+            </a:r>
+            <a:r>
+              <a:rPr sz="4400" spc="75" dirty="0">
+                <a:latin typeface="Arial" panose="020B0604020202020204" pitchFamily="34" charset="0"/>
+                <a:cs typeface="Arial" panose="020B0604020202020204" pitchFamily="34" charset="0"/>
+              </a:rPr>
+              <a:t>ddress</a:t>
+            </a:r>
+            <a:endParaRPr sz="4400" dirty="0">
+              <a:latin typeface="Arial" panose="020B0604020202020204" pitchFamily="34" charset="0"/>
+              <a:cs typeface="Arial" panose="020B0604020202020204" pitchFamily="34" charset="0"/>
+            </a:endParaRPr>
+          </a:p>
+          <a:p>
+            <a:pPr marL="934085" lvl="1" indent="-461645">
+              <a:lnSpc>
+                <a:spcPct val="100000"/>
+              </a:lnSpc>
+              <a:spcBef>
+                <a:spcPts val="2515"/>
+              </a:spcBef>
+              <a:buChar char="•"/>
+              <a:tabLst>
+                <a:tab pos="933450" algn="l"/>
+                <a:tab pos="934719" algn="l"/>
+              </a:tabLst>
+            </a:pPr>
+            <a:r>
+              <a:rPr sz="4400" spc="160" dirty="0">
+                <a:latin typeface="Arial" panose="020B0604020202020204" pitchFamily="34" charset="0"/>
+                <a:cs typeface="Arial" panose="020B0604020202020204" pitchFamily="34" charset="0"/>
+              </a:rPr>
+              <a:t>unde</a:t>
+            </a:r>
+            <a:r>
+              <a:rPr sz="4400" spc="-10" dirty="0">
+                <a:latin typeface="Arial" panose="020B0604020202020204" pitchFamily="34" charset="0"/>
+                <a:cs typeface="Arial" panose="020B0604020202020204" pitchFamily="34" charset="0"/>
+              </a:rPr>
+              <a:t>f</a:t>
+            </a:r>
+            <a:r>
+              <a:rPr sz="4400" spc="150" dirty="0">
+                <a:latin typeface="Arial" panose="020B0604020202020204" pitchFamily="34" charset="0"/>
+                <a:cs typeface="Arial" panose="020B0604020202020204" pitchFamily="34" charset="0"/>
+              </a:rPr>
+              <a:t>ined</a:t>
+            </a:r>
+            <a:endParaRPr sz="4400" dirty="0">
+              <a:latin typeface="Arial" panose="020B0604020202020204" pitchFamily="34" charset="0"/>
+              <a:cs typeface="Arial" panose="020B0604020202020204" pitchFamily="34" charset="0"/>
+            </a:endParaRPr>
+          </a:p>
+          <a:p>
+            <a:pPr marL="934085" lvl="1" indent="-461645">
+              <a:lnSpc>
+                <a:spcPct val="100000"/>
+              </a:lnSpc>
+              <a:spcBef>
+                <a:spcPts val="2515"/>
+              </a:spcBef>
+              <a:buChar char="•"/>
+              <a:tabLst>
+                <a:tab pos="933450" algn="l"/>
+                <a:tab pos="934719" algn="l"/>
+              </a:tabLst>
+            </a:pPr>
+            <a:r>
+              <a:rPr sz="4400" spc="45" dirty="0">
+                <a:latin typeface="Arial" panose="020B0604020202020204" pitchFamily="34" charset="0"/>
+                <a:cs typeface="Arial" panose="020B0604020202020204" pitchFamily="34" charset="0"/>
+              </a:rPr>
+              <a:t>leak</a:t>
+            </a:r>
+            <a:endParaRPr sz="4400" dirty="0">
+              <a:latin typeface="Arial" panose="020B0604020202020204" pitchFamily="34" charset="0"/>
+              <a:cs typeface="Arial" panose="020B0604020202020204" pitchFamily="34" charset="0"/>
+            </a:endParaRPr>
+          </a:p>
+          <a:p>
+            <a:pPr marL="934085" lvl="1" indent="-461645">
+              <a:lnSpc>
+                <a:spcPct val="100000"/>
+              </a:lnSpc>
+              <a:spcBef>
+                <a:spcPts val="2515"/>
+              </a:spcBef>
+              <a:buChar char="•"/>
+              <a:tabLst>
+                <a:tab pos="933450" algn="l"/>
+                <a:tab pos="934719" algn="l"/>
+              </a:tabLst>
+            </a:pPr>
+            <a:r>
+              <a:rPr sz="4400" spc="145" dirty="0">
+                <a:latin typeface="Arial" panose="020B0604020202020204" pitchFamily="34" charset="0"/>
+                <a:cs typeface="Arial" panose="020B0604020202020204" pitchFamily="34" charset="0"/>
+              </a:rPr>
+              <a:t>thread</a:t>
+            </a:r>
+            <a:endParaRPr sz="4400" dirty="0">
+              <a:latin typeface="Arial" panose="020B0604020202020204" pitchFamily="34" charset="0"/>
+              <a:cs typeface="Arial" panose="020B0604020202020204" pitchFamily="34" charset="0"/>
+            </a:endParaRPr>
+          </a:p>
+        </p:txBody>
+      </p:sp>
+    </p:spTree>
+  </p:cSld>
+  <p:clrMapOvr>
+    <a:masterClrMapping/>
+  </p:clrMapOvr>
+</p:sld>
+</file>
+
+<file path=ppt/slides/slide12.xml><?xml version="1.0" encoding="utf-8"?>
 <p:sld xmlns:a="http://schemas.openxmlformats.org/drawingml/2006/main" xmlns:r="http://schemas.openxmlformats.org/officeDocument/2006/relationships" xmlns:p="http://schemas.openxmlformats.org/presentationml/2006/main">
   <p:cSld>
     <p:spTree>
@@ -1561,7 +1969,7 @@
         <p:spPr>
           <a:xfrm>
             <a:off x="1076272" y="3666316"/>
-            <a:ext cx="17951555" cy="2954655"/>
+            <a:ext cx="17951555" cy="2215991"/>
           </a:xfrm>
         </p:spPr>
         <p:txBody>
@@ -1602,33 +2010,6 @@
               </a:rPr>
               <a:t>• stack </a:t>
             </a:r>
-          </a:p>
-          <a:p>
-            <a:r>
-              <a:rPr lang="en-US" sz="4800" b="0" i="0" u="none" strike="noStrike" baseline="0" dirty="0">
-                <a:solidFill>
-                  <a:srgbClr val="000000"/>
-                </a:solidFill>
-                <a:latin typeface="Arial" panose="020B0604020202020204" pitchFamily="34" charset="0"/>
-                <a:cs typeface="Arial" panose="020B0604020202020204" pitchFamily="34" charset="0"/>
-              </a:rPr>
-              <a:t>• For more information, read </a:t>
-            </a:r>
-            <a:r>
-              <a:rPr lang="en-US" sz="4800" dirty="0">
-                <a:solidFill>
-                  <a:srgbClr val="0361C1"/>
-                </a:solidFill>
-                <a:latin typeface="Arial" panose="020B0604020202020204" pitchFamily="34" charset="0"/>
-                <a:cs typeface="Arial" panose="020B0604020202020204" pitchFamily="34" charset="0"/>
-                <a:hlinkClick r:id="rId2"/>
-              </a:rPr>
-              <a:t>GitHub</a:t>
-            </a:r>
-            <a:endParaRPr lang="ru-RU" sz="4800" dirty="0">
-              <a:latin typeface="Arial" panose="020B0604020202020204" pitchFamily="34" charset="0"/>
-              <a:cs typeface="Arial" panose="020B0604020202020204" pitchFamily="34" charset="0"/>
-            </a:endParaRPr>
           </a:p>
         </p:txBody>
       </p:sp>
@@ -1647,7 +2028,7 @@
           <p:nvPr/>
         </p:nvPicPr>
         <p:blipFill>
-          <a:blip r:embed="rId3"/>
+          <a:blip r:embed="rId2"/>
           <a:stretch>
             <a:fillRect/>
           </a:stretch>
@@ -1677,7 +2058,7 @@
           <p:nvPr/>
         </p:nvPicPr>
         <p:blipFill>
-          <a:blip r:embed="rId4"/>
+          <a:blip r:embed="rId3"/>
           <a:stretch>
             <a:fillRect/>
           </a:stretch>
@@ -1705,7 +2086,129 @@
 </p:sld>
 </file>
 
-<file path=ppt/slides/slide11.xml><?xml version="1.0" encoding="utf-8"?>
+<file path=ppt/slides/slide13.xml><?xml version="1.0" encoding="utf-8"?>
+<p:sld xmlns:a="http://schemas.openxmlformats.org/drawingml/2006/main" xmlns:r="http://schemas.openxmlformats.org/officeDocument/2006/relationships" xmlns:p="http://schemas.openxmlformats.org/presentationml/2006/main">
+  <p:cSld>
+    <p:spTree>
+      <p:nvGrpSpPr>
+        <p:cNvPr id="1" name=""/>
+        <p:cNvGrpSpPr/>
+        <p:nvPr/>
+      </p:nvGrpSpPr>
+      <p:grpSpPr>
+        <a:xfrm>
+          <a:off x="0" y="0"/>
+          <a:ext cx="0" cy="0"/>
+          <a:chOff x="0" y="0"/>
+          <a:chExt cx="0" cy="0"/>
+        </a:xfrm>
+      </p:grpSpPr>
+      <p:sp>
+        <p:nvSpPr>
+          <p:cNvPr id="2" name="Title 1">
+            <a:extLst>
+              <a:ext uri="{FF2B5EF4-FFF2-40B4-BE49-F238E27FC236}">
+                <a16:creationId xmlns:a16="http://schemas.microsoft.com/office/drawing/2014/main" id="{3C1B787C-080D-416A-AC29-3FBEEEDB63EF}"/>
+              </a:ext>
+            </a:extLst>
+          </p:cNvPr>
+          <p:cNvSpPr>
+            <a:spLocks noGrp="1"/>
+          </p:cNvSpPr>
+          <p:nvPr>
+            <p:ph type="title"/>
+          </p:nvPr>
+        </p:nvSpPr>
+        <p:spPr/>
+        <p:txBody>
+          <a:bodyPr/>
+          <a:lstStyle/>
+          <a:p>
+            <a:r>
+              <a:rPr lang="en-US" dirty="0"/>
+              <a:t>Sources:</a:t>
+            </a:r>
+            <a:endParaRPr lang="ru-RU" dirty="0"/>
+          </a:p>
+        </p:txBody>
+      </p:sp>
+      <p:sp>
+        <p:nvSpPr>
+          <p:cNvPr id="3" name="Text Placeholder 2">
+            <a:extLst>
+              <a:ext uri="{FF2B5EF4-FFF2-40B4-BE49-F238E27FC236}">
+                <a16:creationId xmlns:a16="http://schemas.microsoft.com/office/drawing/2014/main" id="{B5DF8646-53E9-4324-A82C-F5132111D4FC}"/>
+              </a:ext>
+            </a:extLst>
+          </p:cNvPr>
+          <p:cNvSpPr>
+            <a:spLocks noGrp="1"/>
+          </p:cNvSpPr>
+          <p:nvPr>
+            <p:ph type="body" idx="1"/>
+          </p:nvPr>
+        </p:nvSpPr>
+        <p:spPr>
+          <a:xfrm>
+            <a:off x="1076272" y="3513916"/>
+            <a:ext cx="17951555" cy="2708434"/>
+          </a:xfrm>
+        </p:spPr>
+        <p:txBody>
+          <a:bodyPr/>
+          <a:lstStyle/>
+          <a:p>
+            <a:r>
+              <a:rPr lang="en-US" sz="4400" dirty="0">
+                <a:hlinkClick r:id="rId2"/>
+              </a:rPr>
+              <a:t>Address sanitizer</a:t>
+            </a:r>
+            <a:endParaRPr lang="en-US" sz="4400" dirty="0"/>
+          </a:p>
+          <a:p>
+            <a:r>
+              <a:rPr lang="en-US" sz="4400" dirty="0">
+                <a:hlinkClick r:id="rId3"/>
+              </a:rPr>
+              <a:t>Address sanitizer algorithm</a:t>
+            </a:r>
+            <a:endParaRPr lang="en-US" sz="4400" dirty="0"/>
+          </a:p>
+          <a:p>
+            <a:r>
+              <a:rPr lang="en-US" sz="4400" dirty="0">
+                <a:hlinkClick r:id="rId4"/>
+              </a:rPr>
+              <a:t>Presentation/Slides/Paper</a:t>
+            </a:r>
+            <a:endParaRPr lang="en-US" sz="4400" dirty="0"/>
+          </a:p>
+          <a:p>
+            <a:r>
+              <a:rPr lang="en-US" sz="4400" dirty="0">
+                <a:hlinkClick r:id="rId5"/>
+              </a:rPr>
+              <a:t>Stack use after return</a:t>
+            </a:r>
+            <a:endParaRPr lang="ru-RU" sz="4400" dirty="0"/>
+          </a:p>
+        </p:txBody>
+      </p:sp>
+    </p:spTree>
+    <p:extLst>
+      <p:ext uri="{BB962C8B-B14F-4D97-AF65-F5344CB8AC3E}">
+        <p14:creationId xmlns:p14="http://schemas.microsoft.com/office/powerpoint/2010/main" val="2620964544"/>
+      </p:ext>
+    </p:extLst>
+  </p:cSld>
+  <p:clrMapOvr>
+    <a:masterClrMapping/>
+  </p:clrMapOvr>
+</p:sld>
+</file>
+
+<file path=ppt/slides/slide14.xml><?xml version="1.0" encoding="utf-8"?>
 <p:sld xmlns:a="http://schemas.openxmlformats.org/drawingml/2006/main" xmlns:r="http://schemas.openxmlformats.org/officeDocument/2006/relationships" xmlns:p="http://schemas.openxmlformats.org/presentationml/2006/main" showMasterSp="0">
   <p:cSld>
     <p:spTree>
@@ -2229,11 +2732,18 @@
               </a:spcBef>
             </a:pPr>
             <a:r>
+              <a:rPr lang="en-US" sz="4000" spc="-45" dirty="0">
+                <a:latin typeface="Arial" panose="020B0604020202020204" pitchFamily="34" charset="0"/>
+                <a:cs typeface="Arial" panose="020B0604020202020204" pitchFamily="34" charset="0"/>
+              </a:rPr>
+              <a:t>e.g</a:t>
+            </a:r>
+            <a:r>
               <a:rPr sz="4000" spc="-45" dirty="0">
                 <a:latin typeface="Arial" panose="020B0604020202020204" pitchFamily="34" charset="0"/>
                 <a:cs typeface="Arial" panose="020B0604020202020204" pitchFamily="34" charset="0"/>
               </a:rPr>
-              <a:t>z.B.</a:t>
+              <a:t>.</a:t>
             </a:r>
             <a:r>
               <a:rPr sz="4000" spc="-20" dirty="0">
@@ -3014,7 +3524,7 @@
 </p:sld>
 </file>
 
-<file path=ppt/slides/slide12.xml><?xml version="1.0" encoding="utf-8"?>
+<file path=ppt/slides/slide15.xml><?xml version="1.0" encoding="utf-8"?>
 <p:sld xmlns:a="http://schemas.openxmlformats.org/drawingml/2006/main" xmlns:r="http://schemas.openxmlformats.org/officeDocument/2006/relationships" xmlns:p="http://schemas.openxmlformats.org/presentationml/2006/main" showMasterSp="0">
   <p:cSld>
     <p:spTree>
@@ -4031,7 +4541,7 @@
 </p:sld>
 </file>
 
-<file path=ppt/slides/slide13.xml><?xml version="1.0" encoding="utf-8"?>
+<file path=ppt/slides/slide16.xml><?xml version="1.0" encoding="utf-8"?>
 <p:sld xmlns:a="http://schemas.openxmlformats.org/drawingml/2006/main" xmlns:r="http://schemas.openxmlformats.org/officeDocument/2006/relationships" xmlns:p="http://schemas.openxmlformats.org/presentationml/2006/main" showMasterSp="0">
   <p:cSld>
     <p:spTree>
@@ -4236,6 +4746,35 @@
               </a:rPr>
               <a:t>E</a:t>
             </a:r>
+            <a:r>
+              <a:rPr lang="en-US" sz="3950" b="1" spc="-80" dirty="0">
+                <a:latin typeface="Arial" panose="020B0604020202020204" pitchFamily="34" charset="0"/>
+                <a:cs typeface="Arial" panose="020B0604020202020204" pitchFamily="34" charset="0"/>
+              </a:rPr>
+              <a:t>    </a:t>
+            </a:r>
+            <a:r>
+              <a:rPr lang="ru-RU" sz="3950" spc="-80" dirty="0">
+                <a:latin typeface="Arial" panose="020B0604020202020204" pitchFamily="34" charset="0"/>
+                <a:cs typeface="Arial" panose="020B0604020202020204" pitchFamily="34" charset="0"/>
+              </a:rPr>
+              <a:t>- про вывод препроцессора</a:t>
+            </a:r>
+            <a:r>
+              <a:rPr lang="en-US" sz="3950" spc="-80" dirty="0">
+                <a:latin typeface="Arial" panose="020B0604020202020204" pitchFamily="34" charset="0"/>
+                <a:cs typeface="Arial" panose="020B0604020202020204" pitchFamily="34" charset="0"/>
+              </a:rPr>
+              <a:t> </a:t>
+            </a:r>
+            <a:r>
+              <a:rPr lang="ru-RU" sz="3950" spc="-80" dirty="0">
+                <a:latin typeface="Arial" panose="020B0604020202020204" pitchFamily="34" charset="0"/>
+                <a:cs typeface="Arial" panose="020B0604020202020204" pitchFamily="34" charset="0"/>
+                <a:hlinkClick r:id="rId2"/>
+              </a:rPr>
+              <a:t>тут</a:t>
+            </a:r>
             <a:endParaRPr sz="3950" dirty="0">
               <a:latin typeface="Arial" panose="020B0604020202020204" pitchFamily="34" charset="0"/>
               <a:cs typeface="Arial" panose="020B0604020202020204" pitchFamily="34" charset="0"/>
@@ -4619,11 +5158,18 @@
               </a:spcBef>
             </a:pPr>
             <a:r>
+              <a:rPr lang="en-US" sz="3950" spc="-50" dirty="0">
+                <a:latin typeface="Arial" panose="020B0604020202020204" pitchFamily="34" charset="0"/>
+                <a:cs typeface="Arial" panose="020B0604020202020204" pitchFamily="34" charset="0"/>
+              </a:rPr>
+              <a:t>e.g</a:t>
+            </a:r>
+            <a:r>
               <a:rPr sz="3950" spc="-50" dirty="0">
                 <a:latin typeface="Arial" panose="020B0604020202020204" pitchFamily="34" charset="0"/>
                 <a:cs typeface="Arial" panose="020B0604020202020204" pitchFamily="34" charset="0"/>
               </a:rPr>
-              <a:t>z.B.</a:t>
+              <a:t>.</a:t>
             </a:r>
             <a:r>
               <a:rPr sz="3950" spc="-5" dirty="0">
@@ -4718,6 +5264,1814 @@
 </file>
 
 <file path=ppt/slides/slide3.xml><?xml version="1.0" encoding="utf-8"?>
+<p:sld xmlns:a="http://schemas.openxmlformats.org/drawingml/2006/main" xmlns:r="http://schemas.openxmlformats.org/officeDocument/2006/relationships" xmlns:p="http://schemas.openxmlformats.org/presentationml/2006/main" showMasterSp="0">
+  <p:cSld>
+    <p:spTree>
+      <p:nvGrpSpPr>
+        <p:cNvPr id="1" name=""/>
+        <p:cNvGrpSpPr/>
+        <p:nvPr/>
+      </p:nvGrpSpPr>
+      <p:grpSpPr>
+        <a:xfrm>
+          <a:off x="0" y="0"/>
+          <a:ext cx="0" cy="0"/>
+          <a:chOff x="0" y="0"/>
+          <a:chExt cx="0" cy="0"/>
+        </a:xfrm>
+      </p:grpSpPr>
+      <p:sp>
+        <p:nvSpPr>
+          <p:cNvPr id="2" name="object 2"/>
+          <p:cNvSpPr txBox="1">
+            <a:spLocks noGrp="1"/>
+          </p:cNvSpPr>
+          <p:nvPr>
+            <p:ph type="title"/>
+          </p:nvPr>
+        </p:nvSpPr>
+        <p:spPr>
+          <a:xfrm>
+            <a:off x="9119870" y="70129"/>
+            <a:ext cx="1864360" cy="1081405"/>
+          </a:xfrm>
+          <a:prstGeom prst="rect">
+            <a:avLst/>
+          </a:prstGeom>
+        </p:spPr>
+        <p:txBody>
+          <a:bodyPr vert="horz" wrap="square" lIns="0" tIns="15875" rIns="0" bIns="0" rtlCol="0">
+            <a:spAutoFit/>
+          </a:bodyPr>
+          <a:lstStyle/>
+          <a:p>
+            <a:pPr marL="12700">
+              <a:lnSpc>
+                <a:spcPct val="100000"/>
+              </a:lnSpc>
+              <a:spcBef>
+                <a:spcPts val="125"/>
+              </a:spcBef>
+            </a:pPr>
+            <a:r>
+              <a:rPr spc="-325" dirty="0"/>
+              <a:t>GDB</a:t>
+            </a:r>
+          </a:p>
+        </p:txBody>
+      </p:sp>
+      <p:sp>
+        <p:nvSpPr>
+          <p:cNvPr id="3" name="object 3"/>
+          <p:cNvSpPr txBox="1"/>
+          <p:nvPr/>
+        </p:nvSpPr>
+        <p:spPr>
+          <a:xfrm>
+            <a:off x="908050" y="1151534"/>
+            <a:ext cx="17581245" cy="10148291"/>
+          </a:xfrm>
+          <a:prstGeom prst="rect">
+            <a:avLst/>
+          </a:prstGeom>
+        </p:spPr>
+        <p:txBody>
+          <a:bodyPr vert="horz" wrap="square" lIns="0" tIns="250825" rIns="0" bIns="0" rtlCol="0">
+            <a:spAutoFit/>
+          </a:bodyPr>
+          <a:lstStyle/>
+          <a:p>
+            <a:pPr marL="362585" indent="-350520">
+              <a:lnSpc>
+                <a:spcPct val="100000"/>
+              </a:lnSpc>
+              <a:spcBef>
+                <a:spcPts val="1975"/>
+              </a:spcBef>
+              <a:buFont typeface="Microsoft Sans Serif"/>
+              <a:buChar char="•"/>
+              <a:tabLst>
+                <a:tab pos="362585" algn="l"/>
+                <a:tab pos="363220" algn="l"/>
+              </a:tabLst>
+            </a:pPr>
+            <a:r>
+              <a:rPr lang="en-US" sz="3600" b="1" spc="75" dirty="0">
+                <a:latin typeface="Arial" panose="020B0604020202020204" pitchFamily="34" charset="0"/>
+                <a:cs typeface="Arial" panose="020B0604020202020204" pitchFamily="34" charset="0"/>
+              </a:rPr>
+              <a:t>g++ -g main.cpp -&gt; </a:t>
+            </a:r>
+            <a:r>
+              <a:rPr lang="en-US" sz="3600" b="1" spc="75" dirty="0" err="1">
+                <a:latin typeface="Arial" panose="020B0604020202020204" pitchFamily="34" charset="0"/>
+                <a:cs typeface="Arial" panose="020B0604020202020204" pitchFamily="34" charset="0"/>
+              </a:rPr>
+              <a:t>gdb</a:t>
+            </a:r>
+            <a:r>
+              <a:rPr lang="en-US" sz="3600" b="1" spc="75" dirty="0">
+                <a:latin typeface="Arial" panose="020B0604020202020204" pitchFamily="34" charset="0"/>
+                <a:cs typeface="Arial" panose="020B0604020202020204" pitchFamily="34" charset="0"/>
+              </a:rPr>
+              <a:t> </a:t>
+            </a:r>
+            <a:r>
+              <a:rPr lang="en-US" sz="3600" b="1" spc="75" dirty="0" err="1">
+                <a:latin typeface="Arial" panose="020B0604020202020204" pitchFamily="34" charset="0"/>
+                <a:cs typeface="Arial" panose="020B0604020202020204" pitchFamily="34" charset="0"/>
+              </a:rPr>
+              <a:t>a.out</a:t>
+            </a:r>
+            <a:r>
+              <a:rPr lang="en-US" sz="3600" b="1" spc="75" dirty="0">
+                <a:latin typeface="Arial" panose="020B0604020202020204" pitchFamily="34" charset="0"/>
+                <a:cs typeface="Arial" panose="020B0604020202020204" pitchFamily="34" charset="0"/>
+              </a:rPr>
+              <a:t> / </a:t>
+            </a:r>
+            <a:r>
+              <a:rPr lang="en-US" sz="3600" b="1" spc="75" dirty="0" err="1">
+                <a:latin typeface="Arial" panose="020B0604020202020204" pitchFamily="34" charset="0"/>
+                <a:cs typeface="Arial" panose="020B0604020202020204" pitchFamily="34" charset="0"/>
+              </a:rPr>
+              <a:t>gdb</a:t>
+            </a:r>
+            <a:r>
+              <a:rPr lang="en-US" sz="3600" b="1" spc="75" dirty="0">
+                <a:latin typeface="Arial" panose="020B0604020202020204" pitchFamily="34" charset="0"/>
+                <a:cs typeface="Arial" panose="020B0604020202020204" pitchFamily="34" charset="0"/>
+              </a:rPr>
+              <a:t> --</a:t>
+            </a:r>
+            <a:r>
+              <a:rPr lang="en-US" sz="3600" b="1" spc="75" dirty="0" err="1">
+                <a:latin typeface="Arial" panose="020B0604020202020204" pitchFamily="34" charset="0"/>
+                <a:cs typeface="Arial" panose="020B0604020202020204" pitchFamily="34" charset="0"/>
+              </a:rPr>
+              <a:t>args</a:t>
+            </a:r>
+            <a:r>
+              <a:rPr lang="en-US" sz="3600" b="1" spc="75" dirty="0">
+                <a:latin typeface="Arial" panose="020B0604020202020204" pitchFamily="34" charset="0"/>
+                <a:cs typeface="Arial" panose="020B0604020202020204" pitchFamily="34" charset="0"/>
+              </a:rPr>
+              <a:t> </a:t>
+            </a:r>
+            <a:r>
+              <a:rPr lang="en-US" sz="3600" b="1" spc="75" dirty="0" err="1">
+                <a:latin typeface="Arial" panose="020B0604020202020204" pitchFamily="34" charset="0"/>
+                <a:cs typeface="Arial" panose="020B0604020202020204" pitchFamily="34" charset="0"/>
+              </a:rPr>
+              <a:t>a.out</a:t>
+            </a:r>
+            <a:r>
+              <a:rPr lang="en-US" sz="3600" b="1" spc="75" dirty="0">
+                <a:latin typeface="Arial" panose="020B0604020202020204" pitchFamily="34" charset="0"/>
+                <a:cs typeface="Arial" panose="020B0604020202020204" pitchFamily="34" charset="0"/>
+              </a:rPr>
+              <a:t> arg1 arg2</a:t>
+            </a:r>
+          </a:p>
+          <a:p>
+            <a:pPr marL="362585" indent="-350520">
+              <a:lnSpc>
+                <a:spcPct val="100000"/>
+              </a:lnSpc>
+              <a:spcBef>
+                <a:spcPts val="1975"/>
+              </a:spcBef>
+              <a:buFont typeface="Microsoft Sans Serif"/>
+              <a:buChar char="•"/>
+              <a:tabLst>
+                <a:tab pos="362585" algn="l"/>
+                <a:tab pos="363220" algn="l"/>
+              </a:tabLst>
+            </a:pPr>
+            <a:r>
+              <a:rPr sz="3600" spc="75" dirty="0" err="1">
+                <a:latin typeface="Arial" panose="020B0604020202020204" pitchFamily="34" charset="0"/>
+                <a:cs typeface="Arial" panose="020B0604020202020204" pitchFamily="34" charset="0"/>
+              </a:rPr>
+              <a:t>База</a:t>
+            </a:r>
+            <a:r>
+              <a:rPr sz="3600" spc="75" dirty="0">
+                <a:latin typeface="Arial" panose="020B0604020202020204" pitchFamily="34" charset="0"/>
+                <a:cs typeface="Arial" panose="020B0604020202020204" pitchFamily="34" charset="0"/>
+              </a:rPr>
+              <a:t>:</a:t>
+            </a:r>
+            <a:endParaRPr sz="3600" dirty="0">
+              <a:latin typeface="Arial" panose="020B0604020202020204" pitchFamily="34" charset="0"/>
+              <a:cs typeface="Arial" panose="020B0604020202020204" pitchFamily="34" charset="0"/>
+            </a:endParaRPr>
+          </a:p>
+          <a:p>
+            <a:pPr marL="822960" lvl="1" indent="-350520">
+              <a:lnSpc>
+                <a:spcPct val="100000"/>
+              </a:lnSpc>
+              <a:spcBef>
+                <a:spcPts val="1875"/>
+              </a:spcBef>
+              <a:buChar char="•"/>
+              <a:tabLst>
+                <a:tab pos="822960" algn="l"/>
+                <a:tab pos="823594" algn="l"/>
+              </a:tabLst>
+            </a:pPr>
+            <a:r>
+              <a:rPr sz="3600" b="1" spc="60" dirty="0">
+                <a:latin typeface="Arial" panose="020B0604020202020204" pitchFamily="34" charset="0"/>
+                <a:cs typeface="Arial" panose="020B0604020202020204" pitchFamily="34" charset="0"/>
+              </a:rPr>
+              <a:t>break(b)</a:t>
+            </a:r>
+            <a:r>
+              <a:rPr sz="3600" b="1" spc="-15" dirty="0">
+                <a:latin typeface="Arial" panose="020B0604020202020204" pitchFamily="34" charset="0"/>
+                <a:cs typeface="Arial" panose="020B0604020202020204" pitchFamily="34" charset="0"/>
+              </a:rPr>
+              <a:t> </a:t>
+            </a:r>
+            <a:r>
+              <a:rPr sz="3600" spc="5" dirty="0">
+                <a:latin typeface="Arial" panose="020B0604020202020204" pitchFamily="34" charset="0"/>
+                <a:cs typeface="Arial" panose="020B0604020202020204" pitchFamily="34" charset="0"/>
+              </a:rPr>
+              <a:t>-</a:t>
+            </a:r>
+            <a:r>
+              <a:rPr sz="3600" spc="-10" dirty="0">
+                <a:latin typeface="Arial" panose="020B0604020202020204" pitchFamily="34" charset="0"/>
+                <a:cs typeface="Arial" panose="020B0604020202020204" pitchFamily="34" charset="0"/>
+              </a:rPr>
+              <a:t> </a:t>
+            </a:r>
+            <a:r>
+              <a:rPr sz="3600" spc="114" dirty="0">
+                <a:latin typeface="Arial" panose="020B0604020202020204" pitchFamily="34" charset="0"/>
+                <a:cs typeface="Arial" panose="020B0604020202020204" pitchFamily="34" charset="0"/>
+              </a:rPr>
+              <a:t>breakpoint</a:t>
+            </a:r>
+            <a:endParaRPr sz="3600" dirty="0">
+              <a:latin typeface="Arial" panose="020B0604020202020204" pitchFamily="34" charset="0"/>
+              <a:cs typeface="Arial" panose="020B0604020202020204" pitchFamily="34" charset="0"/>
+            </a:endParaRPr>
+          </a:p>
+          <a:p>
+            <a:pPr marL="822960" lvl="1" indent="-350520">
+              <a:lnSpc>
+                <a:spcPct val="100000"/>
+              </a:lnSpc>
+              <a:spcBef>
+                <a:spcPts val="1875"/>
+              </a:spcBef>
+              <a:buChar char="•"/>
+              <a:tabLst>
+                <a:tab pos="822960" algn="l"/>
+                <a:tab pos="823594" algn="l"/>
+              </a:tabLst>
+            </a:pPr>
+            <a:r>
+              <a:rPr sz="3600" b="1" spc="40" dirty="0">
+                <a:latin typeface="Arial" panose="020B0604020202020204" pitchFamily="34" charset="0"/>
+                <a:cs typeface="Arial" panose="020B0604020202020204" pitchFamily="34" charset="0"/>
+              </a:rPr>
+              <a:t>step(s)</a:t>
+            </a:r>
+            <a:r>
+              <a:rPr sz="3600" b="1" dirty="0">
+                <a:latin typeface="Arial" panose="020B0604020202020204" pitchFamily="34" charset="0"/>
+                <a:cs typeface="Arial" panose="020B0604020202020204" pitchFamily="34" charset="0"/>
+              </a:rPr>
+              <a:t> </a:t>
+            </a:r>
+            <a:r>
+              <a:rPr sz="3600" b="1" spc="375" dirty="0">
+                <a:latin typeface="Arial" panose="020B0604020202020204" pitchFamily="34" charset="0"/>
+                <a:cs typeface="Arial" panose="020B0604020202020204" pitchFamily="34" charset="0"/>
+              </a:rPr>
+              <a:t>/</a:t>
+            </a:r>
+            <a:r>
+              <a:rPr sz="3600" b="1" spc="5" dirty="0">
+                <a:latin typeface="Arial" panose="020B0604020202020204" pitchFamily="34" charset="0"/>
+                <a:cs typeface="Arial" panose="020B0604020202020204" pitchFamily="34" charset="0"/>
+              </a:rPr>
+              <a:t> </a:t>
+            </a:r>
+            <a:r>
+              <a:rPr sz="3600" b="1" spc="70" dirty="0">
+                <a:latin typeface="Arial" panose="020B0604020202020204" pitchFamily="34" charset="0"/>
+                <a:cs typeface="Arial" panose="020B0604020202020204" pitchFamily="34" charset="0"/>
+              </a:rPr>
+              <a:t>next(n)</a:t>
+            </a:r>
+            <a:r>
+              <a:rPr sz="3600" b="1" spc="5" dirty="0">
+                <a:latin typeface="Arial" panose="020B0604020202020204" pitchFamily="34" charset="0"/>
+                <a:cs typeface="Arial" panose="020B0604020202020204" pitchFamily="34" charset="0"/>
+              </a:rPr>
+              <a:t> </a:t>
+            </a:r>
+            <a:r>
+              <a:rPr sz="3600" spc="5" dirty="0">
+                <a:latin typeface="Arial" panose="020B0604020202020204" pitchFamily="34" charset="0"/>
+                <a:cs typeface="Arial" panose="020B0604020202020204" pitchFamily="34" charset="0"/>
+              </a:rPr>
+              <a:t>-</a:t>
+            </a:r>
+            <a:r>
+              <a:rPr sz="3600" dirty="0">
+                <a:latin typeface="Arial" panose="020B0604020202020204" pitchFamily="34" charset="0"/>
+                <a:cs typeface="Arial" panose="020B0604020202020204" pitchFamily="34" charset="0"/>
+              </a:rPr>
+              <a:t> </a:t>
+            </a:r>
+            <a:r>
+              <a:rPr sz="3600" spc="-65" dirty="0">
+                <a:latin typeface="Arial" panose="020B0604020202020204" pitchFamily="34" charset="0"/>
+                <a:cs typeface="Arial" panose="020B0604020202020204" pitchFamily="34" charset="0"/>
+              </a:rPr>
+              <a:t>следующая</a:t>
+            </a:r>
+            <a:r>
+              <a:rPr sz="3600" spc="-150" dirty="0">
+                <a:latin typeface="Arial" panose="020B0604020202020204" pitchFamily="34" charset="0"/>
+                <a:cs typeface="Arial" panose="020B0604020202020204" pitchFamily="34" charset="0"/>
+              </a:rPr>
+              <a:t> </a:t>
+            </a:r>
+            <a:r>
+              <a:rPr sz="3600" spc="-60" dirty="0">
+                <a:latin typeface="Arial" panose="020B0604020202020204" pitchFamily="34" charset="0"/>
+                <a:cs typeface="Arial" panose="020B0604020202020204" pitchFamily="34" charset="0"/>
+              </a:rPr>
+              <a:t>строка</a:t>
+            </a:r>
+            <a:r>
+              <a:rPr sz="3600" spc="-150" dirty="0">
+                <a:latin typeface="Arial" panose="020B0604020202020204" pitchFamily="34" charset="0"/>
+                <a:cs typeface="Arial" panose="020B0604020202020204" pitchFamily="34" charset="0"/>
+              </a:rPr>
+              <a:t> </a:t>
+            </a:r>
+            <a:r>
+              <a:rPr sz="3600" spc="-35" dirty="0">
+                <a:latin typeface="Arial" panose="020B0604020202020204" pitchFamily="34" charset="0"/>
+                <a:cs typeface="Arial" panose="020B0604020202020204" pitchFamily="34" charset="0"/>
+              </a:rPr>
+              <a:t>с</a:t>
+            </a:r>
+            <a:r>
+              <a:rPr sz="3600" spc="-155" dirty="0">
+                <a:latin typeface="Arial" panose="020B0604020202020204" pitchFamily="34" charset="0"/>
+                <a:cs typeface="Arial" panose="020B0604020202020204" pitchFamily="34" charset="0"/>
+              </a:rPr>
+              <a:t> </a:t>
+            </a:r>
+            <a:r>
+              <a:rPr sz="3600" spc="-140" dirty="0">
+                <a:latin typeface="Arial" panose="020B0604020202020204" pitchFamily="34" charset="0"/>
+                <a:cs typeface="Arial" panose="020B0604020202020204" pitchFamily="34" charset="0"/>
+              </a:rPr>
+              <a:t>заходом</a:t>
+            </a:r>
+            <a:r>
+              <a:rPr sz="3600" spc="-150" dirty="0">
+                <a:latin typeface="Arial" panose="020B0604020202020204" pitchFamily="34" charset="0"/>
+                <a:cs typeface="Arial" panose="020B0604020202020204" pitchFamily="34" charset="0"/>
+              </a:rPr>
+              <a:t> </a:t>
+            </a:r>
+            <a:r>
+              <a:rPr sz="3600" spc="375" dirty="0">
+                <a:latin typeface="Arial" panose="020B0604020202020204" pitchFamily="34" charset="0"/>
+                <a:cs typeface="Arial" panose="020B0604020202020204" pitchFamily="34" charset="0"/>
+              </a:rPr>
+              <a:t>/</a:t>
+            </a:r>
+            <a:r>
+              <a:rPr sz="3600" spc="5" dirty="0">
+                <a:latin typeface="Arial" panose="020B0604020202020204" pitchFamily="34" charset="0"/>
+                <a:cs typeface="Arial" panose="020B0604020202020204" pitchFamily="34" charset="0"/>
+              </a:rPr>
+              <a:t> </a:t>
+            </a:r>
+            <a:r>
+              <a:rPr sz="3600" spc="-20" dirty="0">
+                <a:latin typeface="Arial" panose="020B0604020202020204" pitchFamily="34" charset="0"/>
+                <a:cs typeface="Arial" panose="020B0604020202020204" pitchFamily="34" charset="0"/>
+              </a:rPr>
+              <a:t>без</a:t>
+            </a:r>
+            <a:r>
+              <a:rPr sz="3600" spc="-150" dirty="0">
+                <a:latin typeface="Arial" panose="020B0604020202020204" pitchFamily="34" charset="0"/>
+                <a:cs typeface="Arial" panose="020B0604020202020204" pitchFamily="34" charset="0"/>
+              </a:rPr>
+              <a:t> </a:t>
+            </a:r>
+            <a:r>
+              <a:rPr sz="3600" spc="-105" dirty="0">
+                <a:latin typeface="Arial" panose="020B0604020202020204" pitchFamily="34" charset="0"/>
+                <a:cs typeface="Arial" panose="020B0604020202020204" pitchFamily="34" charset="0"/>
+              </a:rPr>
+              <a:t>захода</a:t>
+            </a:r>
+            <a:r>
+              <a:rPr sz="3600" spc="-155" dirty="0">
+                <a:latin typeface="Arial" panose="020B0604020202020204" pitchFamily="34" charset="0"/>
+                <a:cs typeface="Arial" panose="020B0604020202020204" pitchFamily="34" charset="0"/>
+              </a:rPr>
+              <a:t> </a:t>
+            </a:r>
+            <a:r>
+              <a:rPr sz="3600" spc="70" dirty="0">
+                <a:latin typeface="Arial" panose="020B0604020202020204" pitchFamily="34" charset="0"/>
+                <a:cs typeface="Arial" panose="020B0604020202020204" pitchFamily="34" charset="0"/>
+              </a:rPr>
+              <a:t>в</a:t>
+            </a:r>
+            <a:r>
+              <a:rPr sz="3600" spc="-150" dirty="0">
+                <a:latin typeface="Arial" panose="020B0604020202020204" pitchFamily="34" charset="0"/>
+                <a:cs typeface="Arial" panose="020B0604020202020204" pitchFamily="34" charset="0"/>
+              </a:rPr>
+              <a:t> </a:t>
+            </a:r>
+            <a:r>
+              <a:rPr sz="3600" spc="-100" dirty="0">
+                <a:latin typeface="Arial" panose="020B0604020202020204" pitchFamily="34" charset="0"/>
+                <a:cs typeface="Arial" panose="020B0604020202020204" pitchFamily="34" charset="0"/>
+              </a:rPr>
+              <a:t>функцию</a:t>
+            </a:r>
+            <a:endParaRPr sz="3600" dirty="0">
+              <a:latin typeface="Arial" panose="020B0604020202020204" pitchFamily="34" charset="0"/>
+              <a:cs typeface="Arial" panose="020B0604020202020204" pitchFamily="34" charset="0"/>
+            </a:endParaRPr>
+          </a:p>
+          <a:p>
+            <a:pPr marL="822960" lvl="1" indent="-350520">
+              <a:lnSpc>
+                <a:spcPct val="100000"/>
+              </a:lnSpc>
+              <a:spcBef>
+                <a:spcPts val="1889"/>
+              </a:spcBef>
+              <a:buChar char="•"/>
+              <a:tabLst>
+                <a:tab pos="822960" algn="l"/>
+                <a:tab pos="823594" algn="l"/>
+              </a:tabLst>
+            </a:pPr>
+            <a:r>
+              <a:rPr sz="3600" b="1" spc="45" dirty="0">
+                <a:latin typeface="Arial" panose="020B0604020202020204" pitchFamily="34" charset="0"/>
+                <a:cs typeface="Arial" panose="020B0604020202020204" pitchFamily="34" charset="0"/>
+              </a:rPr>
+              <a:t>stepi(si)</a:t>
+            </a:r>
+            <a:r>
+              <a:rPr sz="3600" b="1" spc="5" dirty="0">
+                <a:latin typeface="Arial" panose="020B0604020202020204" pitchFamily="34" charset="0"/>
+                <a:cs typeface="Arial" panose="020B0604020202020204" pitchFamily="34" charset="0"/>
+              </a:rPr>
+              <a:t> </a:t>
+            </a:r>
+            <a:r>
+              <a:rPr sz="3600" b="1" spc="375" dirty="0">
+                <a:latin typeface="Arial" panose="020B0604020202020204" pitchFamily="34" charset="0"/>
+                <a:cs typeface="Arial" panose="020B0604020202020204" pitchFamily="34" charset="0"/>
+              </a:rPr>
+              <a:t>/</a:t>
+            </a:r>
+            <a:r>
+              <a:rPr sz="3600" b="1" spc="10" dirty="0">
+                <a:latin typeface="Arial" panose="020B0604020202020204" pitchFamily="34" charset="0"/>
+                <a:cs typeface="Arial" panose="020B0604020202020204" pitchFamily="34" charset="0"/>
+              </a:rPr>
+              <a:t> </a:t>
+            </a:r>
+            <a:r>
+              <a:rPr sz="3600" b="1" spc="75" dirty="0">
+                <a:latin typeface="Arial" panose="020B0604020202020204" pitchFamily="34" charset="0"/>
+                <a:cs typeface="Arial" panose="020B0604020202020204" pitchFamily="34" charset="0"/>
+              </a:rPr>
+              <a:t>nexti(ni)</a:t>
+            </a:r>
+            <a:r>
+              <a:rPr sz="3600" b="1" spc="10" dirty="0">
+                <a:latin typeface="Arial" panose="020B0604020202020204" pitchFamily="34" charset="0"/>
+                <a:cs typeface="Arial" panose="020B0604020202020204" pitchFamily="34" charset="0"/>
+              </a:rPr>
+              <a:t> </a:t>
+            </a:r>
+            <a:r>
+              <a:rPr sz="3600" spc="5" dirty="0">
+                <a:latin typeface="Arial" panose="020B0604020202020204" pitchFamily="34" charset="0"/>
+                <a:cs typeface="Arial" panose="020B0604020202020204" pitchFamily="34" charset="0"/>
+              </a:rPr>
+              <a:t>- </a:t>
+            </a:r>
+            <a:r>
+              <a:rPr sz="3600" spc="-65" dirty="0">
+                <a:latin typeface="Arial" panose="020B0604020202020204" pitchFamily="34" charset="0"/>
+                <a:cs typeface="Arial" panose="020B0604020202020204" pitchFamily="34" charset="0"/>
+              </a:rPr>
+              <a:t>следующая</a:t>
+            </a:r>
+            <a:r>
+              <a:rPr sz="3600" spc="-145" dirty="0">
+                <a:latin typeface="Arial" panose="020B0604020202020204" pitchFamily="34" charset="0"/>
+                <a:cs typeface="Arial" panose="020B0604020202020204" pitchFamily="34" charset="0"/>
+              </a:rPr>
+              <a:t> </a:t>
+            </a:r>
+            <a:r>
+              <a:rPr sz="3600" spc="-55" dirty="0">
+                <a:latin typeface="Arial" panose="020B0604020202020204" pitchFamily="34" charset="0"/>
+                <a:cs typeface="Arial" panose="020B0604020202020204" pitchFamily="34" charset="0"/>
+              </a:rPr>
+              <a:t>ассемблерная</a:t>
+            </a:r>
+            <a:r>
+              <a:rPr sz="3600" spc="-145" dirty="0">
+                <a:latin typeface="Arial" panose="020B0604020202020204" pitchFamily="34" charset="0"/>
+                <a:cs typeface="Arial" panose="020B0604020202020204" pitchFamily="34" charset="0"/>
+              </a:rPr>
+              <a:t> </a:t>
+            </a:r>
+            <a:r>
+              <a:rPr sz="3600" spc="-90" dirty="0">
+                <a:latin typeface="Arial" panose="020B0604020202020204" pitchFamily="34" charset="0"/>
+                <a:cs typeface="Arial" panose="020B0604020202020204" pitchFamily="34" charset="0"/>
+              </a:rPr>
+              <a:t>инструкция</a:t>
+            </a:r>
+            <a:r>
+              <a:rPr sz="3600" spc="-150" dirty="0">
+                <a:latin typeface="Arial" panose="020B0604020202020204" pitchFamily="34" charset="0"/>
+                <a:cs typeface="Arial" panose="020B0604020202020204" pitchFamily="34" charset="0"/>
+              </a:rPr>
+              <a:t> </a:t>
+            </a:r>
+            <a:r>
+              <a:rPr sz="3600" spc="-35" dirty="0">
+                <a:latin typeface="Arial" panose="020B0604020202020204" pitchFamily="34" charset="0"/>
+                <a:cs typeface="Arial" panose="020B0604020202020204" pitchFamily="34" charset="0"/>
+              </a:rPr>
+              <a:t>с</a:t>
+            </a:r>
+            <a:r>
+              <a:rPr sz="3600" spc="-145" dirty="0">
+                <a:latin typeface="Arial" panose="020B0604020202020204" pitchFamily="34" charset="0"/>
+                <a:cs typeface="Arial" panose="020B0604020202020204" pitchFamily="34" charset="0"/>
+              </a:rPr>
+              <a:t> </a:t>
+            </a:r>
+            <a:r>
+              <a:rPr sz="3600" spc="-140" dirty="0">
+                <a:latin typeface="Arial" panose="020B0604020202020204" pitchFamily="34" charset="0"/>
+                <a:cs typeface="Arial" panose="020B0604020202020204" pitchFamily="34" charset="0"/>
+              </a:rPr>
+              <a:t>заходом</a:t>
+            </a:r>
+            <a:r>
+              <a:rPr sz="3600" spc="-145" dirty="0">
+                <a:latin typeface="Arial" panose="020B0604020202020204" pitchFamily="34" charset="0"/>
+                <a:cs typeface="Arial" panose="020B0604020202020204" pitchFamily="34" charset="0"/>
+              </a:rPr>
+              <a:t> </a:t>
+            </a:r>
+            <a:r>
+              <a:rPr sz="3600" spc="375" dirty="0">
+                <a:latin typeface="Arial" panose="020B0604020202020204" pitchFamily="34" charset="0"/>
+                <a:cs typeface="Arial" panose="020B0604020202020204" pitchFamily="34" charset="0"/>
+              </a:rPr>
+              <a:t>/</a:t>
+            </a:r>
+            <a:r>
+              <a:rPr sz="3600" spc="5" dirty="0">
+                <a:latin typeface="Arial" panose="020B0604020202020204" pitchFamily="34" charset="0"/>
+                <a:cs typeface="Arial" panose="020B0604020202020204" pitchFamily="34" charset="0"/>
+              </a:rPr>
+              <a:t> </a:t>
+            </a:r>
+            <a:r>
+              <a:rPr sz="3600" spc="-20" dirty="0">
+                <a:latin typeface="Arial" panose="020B0604020202020204" pitchFamily="34" charset="0"/>
+                <a:cs typeface="Arial" panose="020B0604020202020204" pitchFamily="34" charset="0"/>
+              </a:rPr>
+              <a:t>без</a:t>
+            </a:r>
+            <a:r>
+              <a:rPr sz="3600" spc="-145" dirty="0">
+                <a:latin typeface="Arial" panose="020B0604020202020204" pitchFamily="34" charset="0"/>
+                <a:cs typeface="Arial" panose="020B0604020202020204" pitchFamily="34" charset="0"/>
+              </a:rPr>
+              <a:t> </a:t>
+            </a:r>
+            <a:r>
+              <a:rPr sz="3600" spc="-105" dirty="0">
+                <a:latin typeface="Arial" panose="020B0604020202020204" pitchFamily="34" charset="0"/>
+                <a:cs typeface="Arial" panose="020B0604020202020204" pitchFamily="34" charset="0"/>
+              </a:rPr>
+              <a:t>захода</a:t>
+            </a:r>
+            <a:r>
+              <a:rPr sz="3600" spc="-145" dirty="0">
+                <a:latin typeface="Arial" panose="020B0604020202020204" pitchFamily="34" charset="0"/>
+                <a:cs typeface="Arial" panose="020B0604020202020204" pitchFamily="34" charset="0"/>
+              </a:rPr>
+              <a:t> </a:t>
+            </a:r>
+            <a:r>
+              <a:rPr sz="3600" spc="70" dirty="0">
+                <a:latin typeface="Arial" panose="020B0604020202020204" pitchFamily="34" charset="0"/>
+                <a:cs typeface="Arial" panose="020B0604020202020204" pitchFamily="34" charset="0"/>
+              </a:rPr>
+              <a:t>в</a:t>
+            </a:r>
+            <a:r>
+              <a:rPr sz="3600" spc="-150" dirty="0">
+                <a:latin typeface="Arial" panose="020B0604020202020204" pitchFamily="34" charset="0"/>
+                <a:cs typeface="Arial" panose="020B0604020202020204" pitchFamily="34" charset="0"/>
+              </a:rPr>
+              <a:t> </a:t>
+            </a:r>
+            <a:r>
+              <a:rPr sz="3600" spc="-100" dirty="0">
+                <a:latin typeface="Arial" panose="020B0604020202020204" pitchFamily="34" charset="0"/>
+                <a:cs typeface="Arial" panose="020B0604020202020204" pitchFamily="34" charset="0"/>
+              </a:rPr>
+              <a:t>функцию</a:t>
+            </a:r>
+            <a:endParaRPr sz="3600" dirty="0">
+              <a:latin typeface="Arial" panose="020B0604020202020204" pitchFamily="34" charset="0"/>
+              <a:cs typeface="Arial" panose="020B0604020202020204" pitchFamily="34" charset="0"/>
+            </a:endParaRPr>
+          </a:p>
+          <a:p>
+            <a:pPr marL="822960" lvl="1" indent="-350520">
+              <a:lnSpc>
+                <a:spcPct val="100000"/>
+              </a:lnSpc>
+              <a:spcBef>
+                <a:spcPts val="1895"/>
+              </a:spcBef>
+              <a:buChar char="•"/>
+              <a:tabLst>
+                <a:tab pos="822960" algn="l"/>
+                <a:tab pos="823594" algn="l"/>
+              </a:tabLst>
+            </a:pPr>
+            <a:r>
+              <a:rPr sz="3600" b="1" spc="75" dirty="0">
+                <a:latin typeface="Arial" panose="020B0604020202020204" pitchFamily="34" charset="0"/>
+                <a:cs typeface="Arial" panose="020B0604020202020204" pitchFamily="34" charset="0"/>
+              </a:rPr>
+              <a:t>run(r) </a:t>
+            </a:r>
+            <a:r>
+              <a:rPr sz="3600" spc="5" dirty="0">
+                <a:latin typeface="Arial" panose="020B0604020202020204" pitchFamily="34" charset="0"/>
+                <a:cs typeface="Arial" panose="020B0604020202020204" pitchFamily="34" charset="0"/>
+              </a:rPr>
+              <a:t>- </a:t>
+            </a:r>
+            <a:r>
+              <a:rPr sz="3600" spc="35" dirty="0">
+                <a:latin typeface="Arial" panose="020B0604020202020204" pitchFamily="34" charset="0"/>
+                <a:cs typeface="Arial" panose="020B0604020202020204" pitchFamily="34" charset="0"/>
+              </a:rPr>
+              <a:t>за</a:t>
+            </a:r>
+            <a:r>
+              <a:rPr sz="3600" spc="-210" dirty="0">
+                <a:latin typeface="Arial" panose="020B0604020202020204" pitchFamily="34" charset="0"/>
+                <a:cs typeface="Arial" panose="020B0604020202020204" pitchFamily="34" charset="0"/>
+              </a:rPr>
+              <a:t>п</a:t>
+            </a:r>
+            <a:r>
+              <a:rPr sz="3600" spc="-55" dirty="0">
+                <a:latin typeface="Arial" panose="020B0604020202020204" pitchFamily="34" charset="0"/>
+                <a:cs typeface="Arial" panose="020B0604020202020204" pitchFamily="34" charset="0"/>
+              </a:rPr>
+              <a:t>усти</a:t>
+            </a:r>
+            <a:r>
+              <a:rPr sz="3600" dirty="0">
+                <a:latin typeface="Arial" panose="020B0604020202020204" pitchFamily="34" charset="0"/>
+                <a:cs typeface="Arial" panose="020B0604020202020204" pitchFamily="34" charset="0"/>
+              </a:rPr>
+              <a:t>ть</a:t>
+            </a:r>
+            <a:r>
+              <a:rPr sz="3600" spc="-155" dirty="0">
+                <a:latin typeface="Arial" panose="020B0604020202020204" pitchFamily="34" charset="0"/>
+                <a:cs typeface="Arial" panose="020B0604020202020204" pitchFamily="34" charset="0"/>
+              </a:rPr>
+              <a:t> </a:t>
+            </a:r>
+            <a:r>
+              <a:rPr sz="3600" spc="-125" dirty="0">
+                <a:latin typeface="Arial" panose="020B0604020202020204" pitchFamily="34" charset="0"/>
+                <a:cs typeface="Arial" panose="020B0604020202020204" pitchFamily="34" charset="0"/>
+              </a:rPr>
+              <a:t>и</a:t>
+            </a:r>
+            <a:r>
+              <a:rPr sz="3600" spc="-120" dirty="0">
+                <a:latin typeface="Arial" panose="020B0604020202020204" pitchFamily="34" charset="0"/>
+                <a:cs typeface="Arial" panose="020B0604020202020204" pitchFamily="34" charset="0"/>
+              </a:rPr>
+              <a:t>сп</a:t>
+            </a:r>
+            <a:r>
+              <a:rPr sz="3600" spc="-170" dirty="0">
+                <a:latin typeface="Arial" panose="020B0604020202020204" pitchFamily="34" charset="0"/>
+                <a:cs typeface="Arial" panose="020B0604020202020204" pitchFamily="34" charset="0"/>
+              </a:rPr>
+              <a:t>о</a:t>
+            </a:r>
+            <a:r>
+              <a:rPr sz="3600" spc="-45" dirty="0">
+                <a:latin typeface="Arial" panose="020B0604020202020204" pitchFamily="34" charset="0"/>
+                <a:cs typeface="Arial" panose="020B0604020202020204" pitchFamily="34" charset="0"/>
+              </a:rPr>
+              <a:t>л</a:t>
+            </a:r>
+            <a:r>
+              <a:rPr sz="3600" spc="-210" dirty="0">
+                <a:latin typeface="Arial" panose="020B0604020202020204" pitchFamily="34" charset="0"/>
+                <a:cs typeface="Arial" panose="020B0604020202020204" pitchFamily="34" charset="0"/>
+              </a:rPr>
+              <a:t>н</a:t>
+            </a:r>
+            <a:r>
+              <a:rPr sz="3600" dirty="0">
+                <a:latin typeface="Arial" panose="020B0604020202020204" pitchFamily="34" charset="0"/>
+                <a:cs typeface="Arial" panose="020B0604020202020204" pitchFamily="34" charset="0"/>
+              </a:rPr>
+              <a:t>е</a:t>
+            </a:r>
+            <a:r>
+              <a:rPr sz="3600" spc="-210" dirty="0">
+                <a:latin typeface="Arial" panose="020B0604020202020204" pitchFamily="34" charset="0"/>
+                <a:cs typeface="Arial" panose="020B0604020202020204" pitchFamily="34" charset="0"/>
+              </a:rPr>
+              <a:t>н</a:t>
+            </a:r>
+            <a:r>
+              <a:rPr sz="3600" spc="-125" dirty="0">
+                <a:latin typeface="Arial" panose="020B0604020202020204" pitchFamily="34" charset="0"/>
+                <a:cs typeface="Arial" panose="020B0604020202020204" pitchFamily="34" charset="0"/>
+              </a:rPr>
+              <a:t>и</a:t>
+            </a:r>
+            <a:r>
+              <a:rPr sz="3600" dirty="0">
+                <a:latin typeface="Arial" panose="020B0604020202020204" pitchFamily="34" charset="0"/>
+                <a:cs typeface="Arial" panose="020B0604020202020204" pitchFamily="34" charset="0"/>
+              </a:rPr>
+              <a:t>е</a:t>
+            </a:r>
+            <a:r>
+              <a:rPr sz="3600" spc="-155" dirty="0">
+                <a:latin typeface="Arial" panose="020B0604020202020204" pitchFamily="34" charset="0"/>
+                <a:cs typeface="Arial" panose="020B0604020202020204" pitchFamily="34" charset="0"/>
+              </a:rPr>
+              <a:t> </a:t>
+            </a:r>
+            <a:r>
+              <a:rPr sz="3600" spc="-210" dirty="0">
+                <a:latin typeface="Arial" panose="020B0604020202020204" pitchFamily="34" charset="0"/>
+                <a:cs typeface="Arial" panose="020B0604020202020204" pitchFamily="34" charset="0"/>
+              </a:rPr>
+              <a:t>п</a:t>
+            </a:r>
+            <a:r>
+              <a:rPr sz="3600" spc="-220" dirty="0">
+                <a:latin typeface="Arial" panose="020B0604020202020204" pitchFamily="34" charset="0"/>
+                <a:cs typeface="Arial" panose="020B0604020202020204" pitchFamily="34" charset="0"/>
+              </a:rPr>
+              <a:t>р</a:t>
+            </a:r>
+            <a:r>
+              <a:rPr sz="3600" spc="-170" dirty="0">
+                <a:latin typeface="Arial" panose="020B0604020202020204" pitchFamily="34" charset="0"/>
+                <a:cs typeface="Arial" panose="020B0604020202020204" pitchFamily="34" charset="0"/>
+              </a:rPr>
+              <a:t>о</a:t>
+            </a:r>
+            <a:r>
+              <a:rPr sz="3600" spc="-280" dirty="0">
+                <a:latin typeface="Arial" panose="020B0604020202020204" pitchFamily="34" charset="0"/>
+                <a:cs typeface="Arial" panose="020B0604020202020204" pitchFamily="34" charset="0"/>
+              </a:rPr>
+              <a:t>г</a:t>
+            </a:r>
+            <a:r>
+              <a:rPr sz="3600" spc="-220" dirty="0">
+                <a:latin typeface="Arial" panose="020B0604020202020204" pitchFamily="34" charset="0"/>
+                <a:cs typeface="Arial" panose="020B0604020202020204" pitchFamily="34" charset="0"/>
+              </a:rPr>
+              <a:t>р</a:t>
+            </a:r>
+            <a:r>
+              <a:rPr sz="3600" spc="15" dirty="0">
+                <a:latin typeface="Arial" panose="020B0604020202020204" pitchFamily="34" charset="0"/>
+                <a:cs typeface="Arial" panose="020B0604020202020204" pitchFamily="34" charset="0"/>
+              </a:rPr>
+              <a:t>а</a:t>
+            </a:r>
+            <a:r>
+              <a:rPr sz="3600" spc="-120" dirty="0">
+                <a:latin typeface="Arial" panose="020B0604020202020204" pitchFamily="34" charset="0"/>
+                <a:cs typeface="Arial" panose="020B0604020202020204" pitchFamily="34" charset="0"/>
+              </a:rPr>
+              <a:t>ммы</a:t>
+            </a:r>
+            <a:r>
+              <a:rPr sz="3600" spc="-155" dirty="0">
+                <a:latin typeface="Arial" panose="020B0604020202020204" pitchFamily="34" charset="0"/>
+                <a:cs typeface="Arial" panose="020B0604020202020204" pitchFamily="34" charset="0"/>
+              </a:rPr>
+              <a:t> </a:t>
+            </a:r>
+            <a:r>
+              <a:rPr sz="3600" spc="-35" dirty="0">
+                <a:latin typeface="Arial" panose="020B0604020202020204" pitchFamily="34" charset="0"/>
+                <a:cs typeface="Arial" panose="020B0604020202020204" pitchFamily="34" charset="0"/>
+              </a:rPr>
+              <a:t>с</a:t>
+            </a:r>
+            <a:r>
+              <a:rPr sz="3600" spc="-155" dirty="0">
+                <a:latin typeface="Arial" panose="020B0604020202020204" pitchFamily="34" charset="0"/>
+                <a:cs typeface="Arial" panose="020B0604020202020204" pitchFamily="34" charset="0"/>
+              </a:rPr>
+              <a:t> </a:t>
+            </a:r>
+            <a:r>
+              <a:rPr sz="3600" spc="-25" dirty="0">
+                <a:latin typeface="Arial" panose="020B0604020202020204" pitchFamily="34" charset="0"/>
+                <a:cs typeface="Arial" panose="020B0604020202020204" pitchFamily="34" charset="0"/>
+              </a:rPr>
+              <a:t>начала</a:t>
+            </a:r>
+            <a:endParaRPr sz="3600" dirty="0">
+              <a:latin typeface="Arial" panose="020B0604020202020204" pitchFamily="34" charset="0"/>
+              <a:cs typeface="Arial" panose="020B0604020202020204" pitchFamily="34" charset="0"/>
+            </a:endParaRPr>
+          </a:p>
+          <a:p>
+            <a:pPr marL="822960" lvl="1" indent="-350520">
+              <a:lnSpc>
+                <a:spcPct val="100000"/>
+              </a:lnSpc>
+              <a:spcBef>
+                <a:spcPts val="1889"/>
+              </a:spcBef>
+              <a:buChar char="•"/>
+              <a:tabLst>
+                <a:tab pos="822960" algn="l"/>
+                <a:tab pos="823594" algn="l"/>
+              </a:tabLst>
+            </a:pPr>
+            <a:r>
+              <a:rPr sz="3600" b="1" spc="110" dirty="0">
+                <a:latin typeface="Arial" panose="020B0604020202020204" pitchFamily="34" charset="0"/>
+                <a:cs typeface="Arial" panose="020B0604020202020204" pitchFamily="34" charset="0"/>
+              </a:rPr>
+              <a:t>continue(c)</a:t>
+            </a:r>
+            <a:r>
+              <a:rPr sz="3600" b="1" spc="10" dirty="0">
+                <a:latin typeface="Arial" panose="020B0604020202020204" pitchFamily="34" charset="0"/>
+                <a:cs typeface="Arial" panose="020B0604020202020204" pitchFamily="34" charset="0"/>
+              </a:rPr>
+              <a:t> </a:t>
+            </a:r>
+            <a:r>
+              <a:rPr sz="3600" spc="5" dirty="0">
+                <a:latin typeface="Arial" panose="020B0604020202020204" pitchFamily="34" charset="0"/>
+                <a:cs typeface="Arial" panose="020B0604020202020204" pitchFamily="34" charset="0"/>
+              </a:rPr>
+              <a:t>-</a:t>
+            </a:r>
+            <a:r>
+              <a:rPr sz="3600" spc="10" dirty="0">
+                <a:latin typeface="Arial" panose="020B0604020202020204" pitchFamily="34" charset="0"/>
+                <a:cs typeface="Arial" panose="020B0604020202020204" pitchFamily="34" charset="0"/>
+              </a:rPr>
+              <a:t> </a:t>
+            </a:r>
+            <a:r>
+              <a:rPr sz="3600" spc="-100" dirty="0">
+                <a:latin typeface="Arial" panose="020B0604020202020204" pitchFamily="34" charset="0"/>
+                <a:cs typeface="Arial" panose="020B0604020202020204" pitchFamily="34" charset="0"/>
+              </a:rPr>
+              <a:t>продолжить</a:t>
+            </a:r>
+            <a:r>
+              <a:rPr sz="3600" spc="-145" dirty="0">
+                <a:latin typeface="Arial" panose="020B0604020202020204" pitchFamily="34" charset="0"/>
+                <a:cs typeface="Arial" panose="020B0604020202020204" pitchFamily="34" charset="0"/>
+              </a:rPr>
+              <a:t> </a:t>
+            </a:r>
+            <a:r>
+              <a:rPr sz="3600" spc="-114" dirty="0">
+                <a:latin typeface="Arial" panose="020B0604020202020204" pitchFamily="34" charset="0"/>
+                <a:cs typeface="Arial" panose="020B0604020202020204" pitchFamily="34" charset="0"/>
+              </a:rPr>
+              <a:t>исполнение</a:t>
+            </a:r>
+            <a:r>
+              <a:rPr sz="3600" spc="-140" dirty="0">
+                <a:latin typeface="Arial" panose="020B0604020202020204" pitchFamily="34" charset="0"/>
+                <a:cs typeface="Arial" panose="020B0604020202020204" pitchFamily="34" charset="0"/>
+              </a:rPr>
+              <a:t> </a:t>
+            </a:r>
+            <a:r>
+              <a:rPr sz="3600" spc="-135" dirty="0">
+                <a:latin typeface="Arial" panose="020B0604020202020204" pitchFamily="34" charset="0"/>
+                <a:cs typeface="Arial" panose="020B0604020202020204" pitchFamily="34" charset="0"/>
+              </a:rPr>
+              <a:t>(до</a:t>
+            </a:r>
+            <a:r>
+              <a:rPr sz="3600" spc="-145" dirty="0">
+                <a:latin typeface="Arial" panose="020B0604020202020204" pitchFamily="34" charset="0"/>
+                <a:cs typeface="Arial" panose="020B0604020202020204" pitchFamily="34" charset="0"/>
+              </a:rPr>
+              <a:t> </a:t>
+            </a:r>
+            <a:r>
+              <a:rPr sz="3600" spc="-125" dirty="0">
+                <a:latin typeface="Arial" panose="020B0604020202020204" pitchFamily="34" charset="0"/>
+                <a:cs typeface="Arial" panose="020B0604020202020204" pitchFamily="34" charset="0"/>
+              </a:rPr>
+              <a:t>конца</a:t>
+            </a:r>
+            <a:r>
+              <a:rPr sz="3600" spc="-145" dirty="0">
+                <a:latin typeface="Arial" panose="020B0604020202020204" pitchFamily="34" charset="0"/>
+                <a:cs typeface="Arial" panose="020B0604020202020204" pitchFamily="34" charset="0"/>
+              </a:rPr>
+              <a:t> </a:t>
+            </a:r>
+            <a:r>
+              <a:rPr sz="3600" spc="-95" dirty="0">
+                <a:latin typeface="Arial" panose="020B0604020202020204" pitchFamily="34" charset="0"/>
+                <a:cs typeface="Arial" panose="020B0604020202020204" pitchFamily="34" charset="0"/>
+              </a:rPr>
+              <a:t>или</a:t>
+            </a:r>
+            <a:r>
+              <a:rPr sz="3600" spc="-145" dirty="0">
+                <a:latin typeface="Arial" panose="020B0604020202020204" pitchFamily="34" charset="0"/>
+                <a:cs typeface="Arial" panose="020B0604020202020204" pitchFamily="34" charset="0"/>
+              </a:rPr>
+              <a:t> </a:t>
+            </a:r>
+            <a:r>
+              <a:rPr sz="3600" spc="-120" dirty="0">
+                <a:latin typeface="Arial" panose="020B0604020202020204" pitchFamily="34" charset="0"/>
+                <a:cs typeface="Arial" panose="020B0604020202020204" pitchFamily="34" charset="0"/>
+              </a:rPr>
+              <a:t>следующего</a:t>
+            </a:r>
+            <a:r>
+              <a:rPr sz="3600" spc="-140" dirty="0">
+                <a:latin typeface="Arial" panose="020B0604020202020204" pitchFamily="34" charset="0"/>
+                <a:cs typeface="Arial" panose="020B0604020202020204" pitchFamily="34" charset="0"/>
+              </a:rPr>
+              <a:t> </a:t>
+            </a:r>
+            <a:r>
+              <a:rPr sz="3600" spc="100" dirty="0">
+                <a:latin typeface="Arial" panose="020B0604020202020204" pitchFamily="34" charset="0"/>
+                <a:cs typeface="Arial" panose="020B0604020202020204" pitchFamily="34" charset="0"/>
+              </a:rPr>
+              <a:t>breakpoint)</a:t>
+            </a:r>
+            <a:endParaRPr sz="3600" dirty="0">
+              <a:latin typeface="Arial" panose="020B0604020202020204" pitchFamily="34" charset="0"/>
+              <a:cs typeface="Arial" panose="020B0604020202020204" pitchFamily="34" charset="0"/>
+            </a:endParaRPr>
+          </a:p>
+          <a:p>
+            <a:pPr marL="822960" lvl="1" indent="-350520">
+              <a:lnSpc>
+                <a:spcPct val="100000"/>
+              </a:lnSpc>
+              <a:spcBef>
+                <a:spcPts val="1889"/>
+              </a:spcBef>
+              <a:buChar char="•"/>
+              <a:tabLst>
+                <a:tab pos="822960" algn="l"/>
+                <a:tab pos="823594" algn="l"/>
+              </a:tabLst>
+            </a:pPr>
+            <a:r>
+              <a:rPr sz="3600" b="1" spc="160" dirty="0">
+                <a:latin typeface="Arial" panose="020B0604020202020204" pitchFamily="34" charset="0"/>
+                <a:cs typeface="Arial" panose="020B0604020202020204" pitchFamily="34" charset="0"/>
+              </a:rPr>
+              <a:t>quit</a:t>
+            </a:r>
+            <a:r>
+              <a:rPr sz="3600" spc="-20" dirty="0">
+                <a:latin typeface="Arial" panose="020B0604020202020204" pitchFamily="34" charset="0"/>
+                <a:cs typeface="Arial" panose="020B0604020202020204" pitchFamily="34" charset="0"/>
+              </a:rPr>
+              <a:t> </a:t>
+            </a:r>
+            <a:r>
+              <a:rPr sz="3600" spc="5" dirty="0">
+                <a:latin typeface="Arial" panose="020B0604020202020204" pitchFamily="34" charset="0"/>
+                <a:cs typeface="Arial" panose="020B0604020202020204" pitchFamily="34" charset="0"/>
+              </a:rPr>
+              <a:t>-</a:t>
+            </a:r>
+            <a:r>
+              <a:rPr sz="3600" spc="-20" dirty="0">
+                <a:latin typeface="Arial" panose="020B0604020202020204" pitchFamily="34" charset="0"/>
+                <a:cs typeface="Arial" panose="020B0604020202020204" pitchFamily="34" charset="0"/>
+              </a:rPr>
+              <a:t> </a:t>
+            </a:r>
+            <a:r>
+              <a:rPr sz="3600" spc="-35" dirty="0">
+                <a:latin typeface="Arial" panose="020B0604020202020204" pitchFamily="34" charset="0"/>
+                <a:cs typeface="Arial" panose="020B0604020202020204" pitchFamily="34" charset="0"/>
+              </a:rPr>
+              <a:t>выйти</a:t>
+            </a:r>
+            <a:endParaRPr sz="3600" dirty="0">
+              <a:latin typeface="Arial" panose="020B0604020202020204" pitchFamily="34" charset="0"/>
+              <a:cs typeface="Arial" panose="020B0604020202020204" pitchFamily="34" charset="0"/>
+            </a:endParaRPr>
+          </a:p>
+          <a:p>
+            <a:pPr marL="362585" indent="-350520">
+              <a:lnSpc>
+                <a:spcPct val="100000"/>
+              </a:lnSpc>
+              <a:spcBef>
+                <a:spcPts val="1880"/>
+              </a:spcBef>
+              <a:buChar char="•"/>
+              <a:tabLst>
+                <a:tab pos="362585" algn="l"/>
+                <a:tab pos="363220" algn="l"/>
+              </a:tabLst>
+            </a:pPr>
+            <a:r>
+              <a:rPr sz="3600" spc="60" dirty="0">
+                <a:latin typeface="Arial" panose="020B0604020202020204" pitchFamily="34" charset="0"/>
+                <a:cs typeface="Arial" panose="020B0604020202020204" pitchFamily="34" charset="0"/>
+              </a:rPr>
+              <a:t>Layout:</a:t>
+            </a:r>
+            <a:endParaRPr lang="en-US" sz="3600" spc="60" dirty="0">
+              <a:latin typeface="Arial" panose="020B0604020202020204" pitchFamily="34" charset="0"/>
+              <a:cs typeface="Arial" panose="020B0604020202020204" pitchFamily="34" charset="0"/>
+            </a:endParaRPr>
+          </a:p>
+          <a:p>
+            <a:pPr marL="819785" lvl="1" indent="-350520">
+              <a:spcBef>
+                <a:spcPts val="1880"/>
+              </a:spcBef>
+              <a:buChar char="•"/>
+              <a:tabLst>
+                <a:tab pos="362585" algn="l"/>
+                <a:tab pos="363220" algn="l"/>
+              </a:tabLst>
+            </a:pPr>
+            <a:r>
+              <a:rPr lang="en-US" sz="3600" b="1" spc="60" dirty="0">
+                <a:latin typeface="Arial" panose="020B0604020202020204" pitchFamily="34" charset="0"/>
+                <a:cs typeface="Arial" panose="020B0604020202020204" pitchFamily="34" charset="0"/>
+              </a:rPr>
+              <a:t>tui enable/disable (Ctrl + X A) / </a:t>
+            </a:r>
+            <a:r>
+              <a:rPr lang="en-US" sz="3600" b="1" spc="60" dirty="0" err="1">
+                <a:latin typeface="Arial" panose="020B0604020202020204" pitchFamily="34" charset="0"/>
+                <a:cs typeface="Arial" panose="020B0604020202020204" pitchFamily="34" charset="0"/>
+              </a:rPr>
+              <a:t>gdb</a:t>
+            </a:r>
+            <a:r>
+              <a:rPr lang="en-US" sz="3600" b="1" spc="60" dirty="0">
+                <a:latin typeface="Arial" panose="020B0604020202020204" pitchFamily="34" charset="0"/>
+                <a:cs typeface="Arial" panose="020B0604020202020204" pitchFamily="34" charset="0"/>
+              </a:rPr>
+              <a:t> –tui </a:t>
+            </a:r>
+            <a:r>
+              <a:rPr lang="en-US" sz="3600" spc="60" dirty="0">
+                <a:latin typeface="Arial" panose="020B0604020202020204" pitchFamily="34" charset="0"/>
+                <a:cs typeface="Arial" panose="020B0604020202020204" pitchFamily="34" charset="0"/>
+              </a:rPr>
+              <a:t>– </a:t>
+            </a:r>
+            <a:r>
+              <a:rPr lang="ru-RU" sz="3600" spc="60" dirty="0">
+                <a:latin typeface="Arial" panose="020B0604020202020204" pitchFamily="34" charset="0"/>
+                <a:cs typeface="Arial" panose="020B0604020202020204" pitchFamily="34" charset="0"/>
+              </a:rPr>
+              <a:t>запустить </a:t>
+            </a:r>
+            <a:r>
+              <a:rPr lang="en-US" sz="3600" spc="60" dirty="0">
+                <a:latin typeface="Arial" panose="020B0604020202020204" pitchFamily="34" charset="0"/>
+                <a:cs typeface="Arial" panose="020B0604020202020204" pitchFamily="34" charset="0"/>
+              </a:rPr>
+              <a:t>tui (Text User Interface)</a:t>
+            </a:r>
+            <a:endParaRPr sz="3600" dirty="0">
+              <a:latin typeface="Arial" panose="020B0604020202020204" pitchFamily="34" charset="0"/>
+              <a:cs typeface="Arial" panose="020B0604020202020204" pitchFamily="34" charset="0"/>
+            </a:endParaRPr>
+          </a:p>
+          <a:p>
+            <a:pPr marL="822960" lvl="1" indent="-350520">
+              <a:lnSpc>
+                <a:spcPct val="100000"/>
+              </a:lnSpc>
+              <a:spcBef>
+                <a:spcPts val="1875"/>
+              </a:spcBef>
+              <a:buChar char="•"/>
+              <a:tabLst>
+                <a:tab pos="822960" algn="l"/>
+                <a:tab pos="823594" algn="l"/>
+              </a:tabLst>
+            </a:pPr>
+            <a:r>
+              <a:rPr sz="3600" b="1" spc="85" dirty="0">
+                <a:latin typeface="Arial" panose="020B0604020202020204" pitchFamily="34" charset="0"/>
+                <a:cs typeface="Arial" panose="020B0604020202020204" pitchFamily="34" charset="0"/>
+              </a:rPr>
+              <a:t>layout</a:t>
+            </a:r>
+            <a:r>
+              <a:rPr sz="3600" b="1" spc="10" dirty="0">
+                <a:latin typeface="Arial" panose="020B0604020202020204" pitchFamily="34" charset="0"/>
+                <a:cs typeface="Arial" panose="020B0604020202020204" pitchFamily="34" charset="0"/>
+              </a:rPr>
+              <a:t> </a:t>
+            </a:r>
+            <a:r>
+              <a:rPr sz="3600" b="1" spc="95" dirty="0">
+                <a:latin typeface="Arial" panose="020B0604020202020204" pitchFamily="34" charset="0"/>
+                <a:cs typeface="Arial" panose="020B0604020202020204" pitchFamily="34" charset="0"/>
+              </a:rPr>
+              <a:t>next(n)/prev(p)/src/asm/split/regs</a:t>
+            </a:r>
+            <a:r>
+              <a:rPr sz="3600" b="1" spc="15" dirty="0">
+                <a:latin typeface="Arial" panose="020B0604020202020204" pitchFamily="34" charset="0"/>
+                <a:cs typeface="Arial" panose="020B0604020202020204" pitchFamily="34" charset="0"/>
+              </a:rPr>
+              <a:t> </a:t>
+            </a:r>
+            <a:r>
+              <a:rPr sz="3600" spc="5" dirty="0">
+                <a:latin typeface="Arial" panose="020B0604020202020204" pitchFamily="34" charset="0"/>
+                <a:cs typeface="Arial" panose="020B0604020202020204" pitchFamily="34" charset="0"/>
+              </a:rPr>
+              <a:t>-</a:t>
+            </a:r>
+            <a:r>
+              <a:rPr sz="3600" spc="15" dirty="0">
+                <a:latin typeface="Arial" panose="020B0604020202020204" pitchFamily="34" charset="0"/>
+                <a:cs typeface="Arial" panose="020B0604020202020204" pitchFamily="34" charset="0"/>
+              </a:rPr>
+              <a:t> </a:t>
+            </a:r>
+            <a:r>
+              <a:rPr sz="3600" spc="-75" dirty="0">
+                <a:latin typeface="Arial" panose="020B0604020202020204" pitchFamily="34" charset="0"/>
+                <a:cs typeface="Arial" panose="020B0604020202020204" pitchFamily="34" charset="0"/>
+              </a:rPr>
+              <a:t>изменить</a:t>
+            </a:r>
+            <a:r>
+              <a:rPr sz="3600" spc="-140" dirty="0">
+                <a:latin typeface="Arial" panose="020B0604020202020204" pitchFamily="34" charset="0"/>
+                <a:cs typeface="Arial" panose="020B0604020202020204" pitchFamily="34" charset="0"/>
+              </a:rPr>
+              <a:t> </a:t>
+            </a:r>
+            <a:r>
+              <a:rPr sz="3600" spc="85" dirty="0">
+                <a:latin typeface="Arial" panose="020B0604020202020204" pitchFamily="34" charset="0"/>
+                <a:cs typeface="Arial" panose="020B0604020202020204" pitchFamily="34" charset="0"/>
+              </a:rPr>
+              <a:t>layout</a:t>
+            </a:r>
+            <a:endParaRPr sz="3600" dirty="0">
+              <a:latin typeface="Arial" panose="020B0604020202020204" pitchFamily="34" charset="0"/>
+              <a:cs typeface="Arial" panose="020B0604020202020204" pitchFamily="34" charset="0"/>
+            </a:endParaRPr>
+          </a:p>
+          <a:p>
+            <a:pPr marL="822960" lvl="1" indent="-350520">
+              <a:lnSpc>
+                <a:spcPct val="100000"/>
+              </a:lnSpc>
+              <a:spcBef>
+                <a:spcPts val="1889"/>
+              </a:spcBef>
+              <a:buChar char="•"/>
+              <a:tabLst>
+                <a:tab pos="822960" algn="l"/>
+                <a:tab pos="823594" algn="l"/>
+              </a:tabLst>
+            </a:pPr>
+            <a:r>
+              <a:rPr sz="3600" b="1" spc="110" dirty="0">
+                <a:latin typeface="Arial" panose="020B0604020202020204" pitchFamily="34" charset="0"/>
+                <a:cs typeface="Arial" panose="020B0604020202020204" pitchFamily="34" charset="0"/>
+              </a:rPr>
+              <a:t>focus</a:t>
+            </a:r>
+            <a:r>
+              <a:rPr sz="3600" b="1" spc="5" dirty="0">
+                <a:latin typeface="Arial" panose="020B0604020202020204" pitchFamily="34" charset="0"/>
+                <a:cs typeface="Arial" panose="020B0604020202020204" pitchFamily="34" charset="0"/>
+              </a:rPr>
+              <a:t> </a:t>
+            </a:r>
+            <a:r>
+              <a:rPr sz="3600" b="1" spc="95" dirty="0">
+                <a:latin typeface="Arial" panose="020B0604020202020204" pitchFamily="34" charset="0"/>
+                <a:cs typeface="Arial" panose="020B0604020202020204" pitchFamily="34" charset="0"/>
+              </a:rPr>
+              <a:t>next(n)/prev(p)/src/asm/split/regs</a:t>
+            </a:r>
+            <a:r>
+              <a:rPr sz="3600" b="1" spc="10" dirty="0">
+                <a:latin typeface="Arial" panose="020B0604020202020204" pitchFamily="34" charset="0"/>
+                <a:cs typeface="Arial" panose="020B0604020202020204" pitchFamily="34" charset="0"/>
+              </a:rPr>
+              <a:t> </a:t>
+            </a:r>
+            <a:r>
+              <a:rPr sz="3600" spc="5" dirty="0">
+                <a:latin typeface="Arial" panose="020B0604020202020204" pitchFamily="34" charset="0"/>
+                <a:cs typeface="Arial" panose="020B0604020202020204" pitchFamily="34" charset="0"/>
+              </a:rPr>
+              <a:t>- </a:t>
+            </a:r>
+            <a:r>
+              <a:rPr sz="3600" spc="-75" dirty="0">
+                <a:latin typeface="Arial" panose="020B0604020202020204" pitchFamily="34" charset="0"/>
+                <a:cs typeface="Arial" panose="020B0604020202020204" pitchFamily="34" charset="0"/>
+              </a:rPr>
+              <a:t>изменить</a:t>
+            </a:r>
+            <a:r>
+              <a:rPr sz="3600" spc="-145" dirty="0">
+                <a:latin typeface="Arial" panose="020B0604020202020204" pitchFamily="34" charset="0"/>
+                <a:cs typeface="Arial" panose="020B0604020202020204" pitchFamily="34" charset="0"/>
+              </a:rPr>
+              <a:t> </a:t>
+            </a:r>
+            <a:r>
+              <a:rPr sz="3600" spc="-35" dirty="0">
+                <a:latin typeface="Arial" panose="020B0604020202020204" pitchFamily="34" charset="0"/>
+                <a:cs typeface="Arial" panose="020B0604020202020204" pitchFamily="34" charset="0"/>
+              </a:rPr>
+              <a:t>фокус</a:t>
+            </a:r>
+            <a:endParaRPr sz="3600" dirty="0">
+              <a:latin typeface="Arial" panose="020B0604020202020204" pitchFamily="34" charset="0"/>
+              <a:cs typeface="Arial" panose="020B0604020202020204" pitchFamily="34" charset="0"/>
+            </a:endParaRPr>
+          </a:p>
+        </p:txBody>
+      </p:sp>
+    </p:spTree>
+  </p:cSld>
+  <p:clrMapOvr>
+    <a:masterClrMapping/>
+  </p:clrMapOvr>
+</p:sld>
+</file>
+
+<file path=ppt/slides/slide4.xml><?xml version="1.0" encoding="utf-8"?>
+<p:sld xmlns:a="http://schemas.openxmlformats.org/drawingml/2006/main" xmlns:r="http://schemas.openxmlformats.org/officeDocument/2006/relationships" xmlns:p="http://schemas.openxmlformats.org/presentationml/2006/main">
+  <p:cSld>
+    <p:spTree>
+      <p:nvGrpSpPr>
+        <p:cNvPr id="1" name=""/>
+        <p:cNvGrpSpPr/>
+        <p:nvPr/>
+      </p:nvGrpSpPr>
+      <p:grpSpPr>
+        <a:xfrm>
+          <a:off x="0" y="0"/>
+          <a:ext cx="0" cy="0"/>
+          <a:chOff x="0" y="0"/>
+          <a:chExt cx="0" cy="0"/>
+        </a:xfrm>
+      </p:grpSpPr>
+      <p:sp>
+        <p:nvSpPr>
+          <p:cNvPr id="2" name="object 2"/>
+          <p:cNvSpPr txBox="1">
+            <a:spLocks noGrp="1"/>
+          </p:cNvSpPr>
+          <p:nvPr>
+            <p:ph type="title"/>
+          </p:nvPr>
+        </p:nvSpPr>
+        <p:spPr>
+          <a:xfrm>
+            <a:off x="7566660" y="625475"/>
+            <a:ext cx="4970780" cy="1077859"/>
+          </a:xfrm>
+          <a:prstGeom prst="rect">
+            <a:avLst/>
+          </a:prstGeom>
+        </p:spPr>
+        <p:txBody>
+          <a:bodyPr vert="horz" wrap="square" lIns="0" tIns="15875" rIns="0" bIns="0" rtlCol="0">
+            <a:spAutoFit/>
+          </a:bodyPr>
+          <a:lstStyle/>
+          <a:p>
+            <a:pPr marL="12700">
+              <a:lnSpc>
+                <a:spcPct val="100000"/>
+              </a:lnSpc>
+              <a:spcBef>
+                <a:spcPts val="125"/>
+              </a:spcBef>
+            </a:pPr>
+            <a:r>
+              <a:rPr spc="-325" dirty="0"/>
+              <a:t>GDB</a:t>
+            </a:r>
+            <a:r>
+              <a:rPr lang="en-US" spc="-325" dirty="0"/>
+              <a:t> (layout)</a:t>
+            </a:r>
+            <a:endParaRPr spc="-325" dirty="0"/>
+          </a:p>
+        </p:txBody>
+      </p:sp>
+      <p:sp>
+        <p:nvSpPr>
+          <p:cNvPr id="3" name="object 3"/>
+          <p:cNvSpPr txBox="1"/>
+          <p:nvPr/>
+        </p:nvSpPr>
+        <p:spPr>
+          <a:xfrm>
+            <a:off x="755650" y="2149475"/>
+            <a:ext cx="17581245" cy="6390852"/>
+          </a:xfrm>
+          <a:prstGeom prst="rect">
+            <a:avLst/>
+          </a:prstGeom>
+        </p:spPr>
+        <p:txBody>
+          <a:bodyPr vert="horz" wrap="square" lIns="0" tIns="250825" rIns="0" bIns="0" rtlCol="0">
+            <a:spAutoFit/>
+          </a:bodyPr>
+          <a:lstStyle/>
+          <a:p>
+            <a:pPr marL="819785" lvl="1" indent="-350520">
+              <a:spcBef>
+                <a:spcPts val="1880"/>
+              </a:spcBef>
+              <a:buChar char="•"/>
+              <a:tabLst>
+                <a:tab pos="362585" algn="l"/>
+                <a:tab pos="363220" algn="l"/>
+              </a:tabLst>
+            </a:pPr>
+            <a:r>
+              <a:rPr lang="en-US" sz="3600" b="1" spc="60" dirty="0">
+                <a:latin typeface="Arial" panose="020B0604020202020204" pitchFamily="34" charset="0"/>
+                <a:cs typeface="Arial" panose="020B0604020202020204" pitchFamily="34" charset="0"/>
+              </a:rPr>
+              <a:t>tui enable/disable (Ctrl + X A) / </a:t>
+            </a:r>
+            <a:r>
+              <a:rPr lang="en-US" sz="3600" b="1" spc="60" dirty="0" err="1">
+                <a:latin typeface="Arial" panose="020B0604020202020204" pitchFamily="34" charset="0"/>
+                <a:cs typeface="Arial" panose="020B0604020202020204" pitchFamily="34" charset="0"/>
+              </a:rPr>
+              <a:t>gdb</a:t>
+            </a:r>
+            <a:r>
+              <a:rPr lang="en-US" sz="3600" b="1" spc="60" dirty="0">
+                <a:latin typeface="Arial" panose="020B0604020202020204" pitchFamily="34" charset="0"/>
+                <a:cs typeface="Arial" panose="020B0604020202020204" pitchFamily="34" charset="0"/>
+              </a:rPr>
+              <a:t> –tui </a:t>
+            </a:r>
+            <a:r>
+              <a:rPr lang="en-US" sz="3600" spc="60" dirty="0">
+                <a:latin typeface="Arial" panose="020B0604020202020204" pitchFamily="34" charset="0"/>
+                <a:cs typeface="Arial" panose="020B0604020202020204" pitchFamily="34" charset="0"/>
+              </a:rPr>
+              <a:t>– </a:t>
+            </a:r>
+            <a:r>
+              <a:rPr lang="ru-RU" sz="3600" spc="60" dirty="0">
+                <a:latin typeface="Arial" panose="020B0604020202020204" pitchFamily="34" charset="0"/>
+                <a:cs typeface="Arial" panose="020B0604020202020204" pitchFamily="34" charset="0"/>
+              </a:rPr>
+              <a:t>запустить </a:t>
+            </a:r>
+            <a:r>
+              <a:rPr lang="en-US" sz="3600" spc="60" dirty="0">
+                <a:latin typeface="Arial" panose="020B0604020202020204" pitchFamily="34" charset="0"/>
+                <a:cs typeface="Arial" panose="020B0604020202020204" pitchFamily="34" charset="0"/>
+              </a:rPr>
+              <a:t>tui (Text User Interface)</a:t>
+            </a:r>
+            <a:endParaRPr sz="3600" dirty="0">
+              <a:latin typeface="Arial" panose="020B0604020202020204" pitchFamily="34" charset="0"/>
+              <a:cs typeface="Arial" panose="020B0604020202020204" pitchFamily="34" charset="0"/>
+            </a:endParaRPr>
+          </a:p>
+          <a:p>
+            <a:pPr marL="822960" lvl="1" indent="-350520">
+              <a:lnSpc>
+                <a:spcPct val="100000"/>
+              </a:lnSpc>
+              <a:spcBef>
+                <a:spcPts val="1875"/>
+              </a:spcBef>
+              <a:buChar char="•"/>
+              <a:tabLst>
+                <a:tab pos="822960" algn="l"/>
+                <a:tab pos="823594" algn="l"/>
+              </a:tabLst>
+            </a:pPr>
+            <a:r>
+              <a:rPr sz="3600" b="1" spc="85" dirty="0">
+                <a:latin typeface="Arial" panose="020B0604020202020204" pitchFamily="34" charset="0"/>
+                <a:cs typeface="Arial" panose="020B0604020202020204" pitchFamily="34" charset="0"/>
+              </a:rPr>
+              <a:t>layout</a:t>
+            </a:r>
+            <a:r>
+              <a:rPr sz="3600" b="1" spc="10" dirty="0">
+                <a:latin typeface="Arial" panose="020B0604020202020204" pitchFamily="34" charset="0"/>
+                <a:cs typeface="Arial" panose="020B0604020202020204" pitchFamily="34" charset="0"/>
+              </a:rPr>
+              <a:t> </a:t>
+            </a:r>
+            <a:r>
+              <a:rPr sz="3600" b="1" spc="95" dirty="0">
+                <a:latin typeface="Arial" panose="020B0604020202020204" pitchFamily="34" charset="0"/>
+                <a:cs typeface="Arial" panose="020B0604020202020204" pitchFamily="34" charset="0"/>
+              </a:rPr>
+              <a:t>next(n)/prev(p)/src/asm/split/regs</a:t>
+            </a:r>
+            <a:r>
+              <a:rPr sz="3600" b="1" spc="15" dirty="0">
+                <a:latin typeface="Arial" panose="020B0604020202020204" pitchFamily="34" charset="0"/>
+                <a:cs typeface="Arial" panose="020B0604020202020204" pitchFamily="34" charset="0"/>
+              </a:rPr>
+              <a:t> </a:t>
+            </a:r>
+            <a:r>
+              <a:rPr sz="3600" spc="5" dirty="0">
+                <a:latin typeface="Arial" panose="020B0604020202020204" pitchFamily="34" charset="0"/>
+                <a:cs typeface="Arial" panose="020B0604020202020204" pitchFamily="34" charset="0"/>
+              </a:rPr>
+              <a:t>-</a:t>
+            </a:r>
+            <a:r>
+              <a:rPr sz="3600" spc="15" dirty="0">
+                <a:latin typeface="Arial" panose="020B0604020202020204" pitchFamily="34" charset="0"/>
+                <a:cs typeface="Arial" panose="020B0604020202020204" pitchFamily="34" charset="0"/>
+              </a:rPr>
+              <a:t> </a:t>
+            </a:r>
+            <a:r>
+              <a:rPr sz="3600" spc="-75" dirty="0">
+                <a:latin typeface="Arial" panose="020B0604020202020204" pitchFamily="34" charset="0"/>
+                <a:cs typeface="Arial" panose="020B0604020202020204" pitchFamily="34" charset="0"/>
+              </a:rPr>
+              <a:t>изменить</a:t>
+            </a:r>
+            <a:r>
+              <a:rPr sz="3600" spc="-140" dirty="0">
+                <a:latin typeface="Arial" panose="020B0604020202020204" pitchFamily="34" charset="0"/>
+                <a:cs typeface="Arial" panose="020B0604020202020204" pitchFamily="34" charset="0"/>
+              </a:rPr>
+              <a:t> </a:t>
+            </a:r>
+            <a:r>
+              <a:rPr sz="3600" spc="85" dirty="0">
+                <a:latin typeface="Arial" panose="020B0604020202020204" pitchFamily="34" charset="0"/>
+                <a:cs typeface="Arial" panose="020B0604020202020204" pitchFamily="34" charset="0"/>
+              </a:rPr>
+              <a:t>layout</a:t>
+            </a:r>
+            <a:endParaRPr sz="3600" dirty="0">
+              <a:latin typeface="Arial" panose="020B0604020202020204" pitchFamily="34" charset="0"/>
+              <a:cs typeface="Arial" panose="020B0604020202020204" pitchFamily="34" charset="0"/>
+            </a:endParaRPr>
+          </a:p>
+          <a:p>
+            <a:pPr marL="822960" lvl="1" indent="-350520">
+              <a:lnSpc>
+                <a:spcPct val="100000"/>
+              </a:lnSpc>
+              <a:spcBef>
+                <a:spcPts val="1889"/>
+              </a:spcBef>
+              <a:buChar char="•"/>
+              <a:tabLst>
+                <a:tab pos="822960" algn="l"/>
+                <a:tab pos="823594" algn="l"/>
+              </a:tabLst>
+            </a:pPr>
+            <a:r>
+              <a:rPr sz="3600" b="1" spc="110" dirty="0">
+                <a:latin typeface="Arial" panose="020B0604020202020204" pitchFamily="34" charset="0"/>
+                <a:cs typeface="Arial" panose="020B0604020202020204" pitchFamily="34" charset="0"/>
+              </a:rPr>
+              <a:t>focus</a:t>
+            </a:r>
+            <a:r>
+              <a:rPr sz="3600" b="1" spc="5" dirty="0">
+                <a:latin typeface="Arial" panose="020B0604020202020204" pitchFamily="34" charset="0"/>
+                <a:cs typeface="Arial" panose="020B0604020202020204" pitchFamily="34" charset="0"/>
+              </a:rPr>
+              <a:t> </a:t>
+            </a:r>
+            <a:r>
+              <a:rPr sz="3600" b="1" spc="95" dirty="0">
+                <a:latin typeface="Arial" panose="020B0604020202020204" pitchFamily="34" charset="0"/>
+                <a:cs typeface="Arial" panose="020B0604020202020204" pitchFamily="34" charset="0"/>
+              </a:rPr>
+              <a:t>next(n)/prev(p)/src/asm/split/regs</a:t>
+            </a:r>
+            <a:r>
+              <a:rPr sz="3600" b="1" spc="10" dirty="0">
+                <a:latin typeface="Arial" panose="020B0604020202020204" pitchFamily="34" charset="0"/>
+                <a:cs typeface="Arial" panose="020B0604020202020204" pitchFamily="34" charset="0"/>
+              </a:rPr>
+              <a:t> </a:t>
+            </a:r>
+            <a:r>
+              <a:rPr sz="3600" spc="5" dirty="0">
+                <a:latin typeface="Arial" panose="020B0604020202020204" pitchFamily="34" charset="0"/>
+                <a:cs typeface="Arial" panose="020B0604020202020204" pitchFamily="34" charset="0"/>
+              </a:rPr>
+              <a:t>- </a:t>
+            </a:r>
+            <a:r>
+              <a:rPr sz="3600" spc="-75" dirty="0" err="1">
+                <a:latin typeface="Arial" panose="020B0604020202020204" pitchFamily="34" charset="0"/>
+                <a:cs typeface="Arial" panose="020B0604020202020204" pitchFamily="34" charset="0"/>
+              </a:rPr>
+              <a:t>изменить</a:t>
+            </a:r>
+            <a:r>
+              <a:rPr sz="3600" spc="-145" dirty="0">
+                <a:latin typeface="Arial" panose="020B0604020202020204" pitchFamily="34" charset="0"/>
+                <a:cs typeface="Arial" panose="020B0604020202020204" pitchFamily="34" charset="0"/>
+              </a:rPr>
+              <a:t> </a:t>
+            </a:r>
+            <a:r>
+              <a:rPr sz="3600" spc="-35" dirty="0" err="1">
+                <a:latin typeface="Arial" panose="020B0604020202020204" pitchFamily="34" charset="0"/>
+                <a:cs typeface="Arial" panose="020B0604020202020204" pitchFamily="34" charset="0"/>
+              </a:rPr>
+              <a:t>фокус</a:t>
+            </a:r>
+            <a:endParaRPr lang="en-US" sz="3600" spc="-35" dirty="0">
+              <a:latin typeface="Arial" panose="020B0604020202020204" pitchFamily="34" charset="0"/>
+              <a:cs typeface="Arial" panose="020B0604020202020204" pitchFamily="34" charset="0"/>
+            </a:endParaRPr>
+          </a:p>
+          <a:p>
+            <a:pPr marL="822960" lvl="1" indent="-350520">
+              <a:lnSpc>
+                <a:spcPct val="100000"/>
+              </a:lnSpc>
+              <a:spcBef>
+                <a:spcPts val="1889"/>
+              </a:spcBef>
+              <a:buChar char="•"/>
+              <a:tabLst>
+                <a:tab pos="822960" algn="l"/>
+                <a:tab pos="823594" algn="l"/>
+              </a:tabLst>
+            </a:pPr>
+            <a:r>
+              <a:rPr lang="en-US" sz="3600" b="1" spc="-35" dirty="0">
+                <a:latin typeface="Arial" panose="020B0604020202020204" pitchFamily="34" charset="0"/>
+                <a:cs typeface="Arial" panose="020B0604020202020204" pitchFamily="34" charset="0"/>
+              </a:rPr>
+              <a:t>tui reg </a:t>
+            </a:r>
+            <a:r>
+              <a:rPr lang="en-US" sz="3600" b="1" spc="-35" dirty="0" err="1">
+                <a:latin typeface="Arial" panose="020B0604020202020204" pitchFamily="34" charset="0"/>
+                <a:cs typeface="Arial" panose="020B0604020202020204" pitchFamily="34" charset="0"/>
+              </a:rPr>
+              <a:t>sse</a:t>
+            </a:r>
+            <a:r>
+              <a:rPr lang="en-US" sz="3600" b="1" spc="-35" dirty="0">
+                <a:latin typeface="Arial" panose="020B0604020202020204" pitchFamily="34" charset="0"/>
+                <a:cs typeface="Arial" panose="020B0604020202020204" pitchFamily="34" charset="0"/>
+              </a:rPr>
+              <a:t>/float/… </a:t>
+            </a:r>
+            <a:r>
+              <a:rPr lang="en-US" sz="3600" spc="-35" dirty="0">
+                <a:latin typeface="Arial" panose="020B0604020202020204" pitchFamily="34" charset="0"/>
+                <a:cs typeface="Arial" panose="020B0604020202020204" pitchFamily="34" charset="0"/>
+              </a:rPr>
+              <a:t>- </a:t>
+            </a:r>
+            <a:r>
+              <a:rPr lang="ru-RU" sz="3600" spc="-35" dirty="0">
+                <a:latin typeface="Arial" panose="020B0604020202020204" pitchFamily="34" charset="0"/>
+                <a:cs typeface="Arial" panose="020B0604020202020204" pitchFamily="34" charset="0"/>
+              </a:rPr>
+              <a:t>добавить окно с определённым </a:t>
+            </a:r>
+            <a:r>
+              <a:rPr lang="en-US" sz="3600" spc="-35" dirty="0">
+                <a:latin typeface="Arial" panose="020B0604020202020204" pitchFamily="34" charset="0"/>
+                <a:cs typeface="Arial" panose="020B0604020202020204" pitchFamily="34" charset="0"/>
+              </a:rPr>
+              <a:t>layout</a:t>
+            </a:r>
+            <a:endParaRPr lang="ru-RU" sz="3600" spc="-35" dirty="0">
+              <a:latin typeface="Arial" panose="020B0604020202020204" pitchFamily="34" charset="0"/>
+              <a:cs typeface="Arial" panose="020B0604020202020204" pitchFamily="34" charset="0"/>
+            </a:endParaRPr>
+          </a:p>
+          <a:p>
+            <a:pPr marL="822960" lvl="1" indent="-350520">
+              <a:lnSpc>
+                <a:spcPct val="100000"/>
+              </a:lnSpc>
+              <a:spcBef>
+                <a:spcPts val="1889"/>
+              </a:spcBef>
+              <a:buChar char="•"/>
+              <a:tabLst>
+                <a:tab pos="822960" algn="l"/>
+                <a:tab pos="823594" algn="l"/>
+              </a:tabLst>
+            </a:pPr>
+            <a:endParaRPr lang="en-US" sz="3600" spc="-35" dirty="0">
+              <a:latin typeface="Arial" panose="020B0604020202020204" pitchFamily="34" charset="0"/>
+              <a:cs typeface="Arial" panose="020B0604020202020204" pitchFamily="34" charset="0"/>
+            </a:endParaRPr>
+          </a:p>
+          <a:p>
+            <a:pPr marL="822960" lvl="1" indent="-350520">
+              <a:lnSpc>
+                <a:spcPct val="100000"/>
+              </a:lnSpc>
+              <a:spcBef>
+                <a:spcPts val="1889"/>
+              </a:spcBef>
+              <a:buChar char="•"/>
+              <a:tabLst>
+                <a:tab pos="822960" algn="l"/>
+                <a:tab pos="823594" algn="l"/>
+              </a:tabLst>
+            </a:pPr>
+            <a:r>
+              <a:rPr lang="en-US" sz="3600" b="1" spc="-35" dirty="0">
+                <a:latin typeface="Arial" panose="020B0604020202020204" pitchFamily="34" charset="0"/>
+                <a:cs typeface="Arial" panose="020B0604020202020204" pitchFamily="34" charset="0"/>
+              </a:rPr>
+              <a:t>Ctrl + X 2 </a:t>
+            </a:r>
+            <a:r>
+              <a:rPr lang="en-US" sz="3600" spc="-35" dirty="0">
+                <a:latin typeface="Arial" panose="020B0604020202020204" pitchFamily="34" charset="0"/>
+                <a:cs typeface="Arial" panose="020B0604020202020204" pitchFamily="34" charset="0"/>
+              </a:rPr>
+              <a:t>– layout next</a:t>
+            </a:r>
+          </a:p>
+          <a:p>
+            <a:pPr marL="822960" lvl="1" indent="-350520">
+              <a:lnSpc>
+                <a:spcPct val="100000"/>
+              </a:lnSpc>
+              <a:spcBef>
+                <a:spcPts val="1889"/>
+              </a:spcBef>
+              <a:buChar char="•"/>
+              <a:tabLst>
+                <a:tab pos="822960" algn="l"/>
+                <a:tab pos="823594" algn="l"/>
+              </a:tabLst>
+            </a:pPr>
+            <a:r>
+              <a:rPr lang="en-US" sz="3600" b="1" spc="-35" dirty="0">
+                <a:latin typeface="Arial" panose="020B0604020202020204" pitchFamily="34" charset="0"/>
+                <a:cs typeface="Arial" panose="020B0604020202020204" pitchFamily="34" charset="0"/>
+              </a:rPr>
+              <a:t>Ctrl + P / N</a:t>
+            </a:r>
+            <a:r>
+              <a:rPr lang="en-US" sz="3600" spc="-35" dirty="0">
+                <a:latin typeface="Arial" panose="020B0604020202020204" pitchFamily="34" charset="0"/>
+                <a:cs typeface="Arial" panose="020B0604020202020204" pitchFamily="34" charset="0"/>
+              </a:rPr>
+              <a:t> – previous/next command</a:t>
+            </a:r>
+          </a:p>
+          <a:p>
+            <a:pPr marL="822960" lvl="1" indent="-350520">
+              <a:lnSpc>
+                <a:spcPct val="100000"/>
+              </a:lnSpc>
+              <a:spcBef>
+                <a:spcPts val="1889"/>
+              </a:spcBef>
+              <a:buChar char="•"/>
+              <a:tabLst>
+                <a:tab pos="822960" algn="l"/>
+                <a:tab pos="823594" algn="l"/>
+              </a:tabLst>
+            </a:pPr>
+            <a:r>
+              <a:rPr lang="en-US" sz="3600" b="1" dirty="0">
+                <a:latin typeface="Arial" panose="020B0604020202020204" pitchFamily="34" charset="0"/>
+                <a:cs typeface="Arial" panose="020B0604020202020204" pitchFamily="34" charset="0"/>
+              </a:rPr>
+              <a:t>Ctrl + L </a:t>
+            </a:r>
+            <a:r>
+              <a:rPr lang="en-US" sz="3600" dirty="0">
+                <a:latin typeface="Arial" panose="020B0604020202020204" pitchFamily="34" charset="0"/>
+                <a:cs typeface="Arial" panose="020B0604020202020204" pitchFamily="34" charset="0"/>
+              </a:rPr>
+              <a:t>– </a:t>
+            </a:r>
+            <a:r>
+              <a:rPr lang="ru-RU" sz="3600" dirty="0">
+                <a:latin typeface="Arial" panose="020B0604020202020204" pitchFamily="34" charset="0"/>
+                <a:cs typeface="Arial" panose="020B0604020202020204" pitchFamily="34" charset="0"/>
+              </a:rPr>
+              <a:t>перерисовать экран </a:t>
+            </a:r>
+            <a:r>
+              <a:rPr lang="en-US" sz="3600" dirty="0">
+                <a:latin typeface="Arial" panose="020B0604020202020204" pitchFamily="34" charset="0"/>
+                <a:cs typeface="Arial" panose="020B0604020202020204" pitchFamily="34" charset="0"/>
+              </a:rPr>
+              <a:t>GDB</a:t>
+            </a:r>
+            <a:endParaRPr sz="3600" dirty="0">
+              <a:latin typeface="Arial" panose="020B0604020202020204" pitchFamily="34" charset="0"/>
+              <a:cs typeface="Arial" panose="020B0604020202020204" pitchFamily="34" charset="0"/>
+            </a:endParaRPr>
+          </a:p>
+        </p:txBody>
+      </p:sp>
+    </p:spTree>
+    <p:extLst>
+      <p:ext uri="{BB962C8B-B14F-4D97-AF65-F5344CB8AC3E}">
+        <p14:creationId xmlns:p14="http://schemas.microsoft.com/office/powerpoint/2010/main" val="2345239466"/>
+      </p:ext>
+    </p:extLst>
+  </p:cSld>
+  <p:clrMapOvr>
+    <a:masterClrMapping/>
+  </p:clrMapOvr>
+</p:sld>
+</file>
+
+<file path=ppt/slides/slide5.xml><?xml version="1.0" encoding="utf-8"?>
 <p:sld xmlns:a="http://schemas.openxmlformats.org/drawingml/2006/main" xmlns:r="http://schemas.openxmlformats.org/officeDocument/2006/relationships" xmlns:p="http://schemas.openxmlformats.org/presentationml/2006/main" showMasterSp="0">
   <p:cSld>
     <p:spTree>
@@ -4782,1259 +7136,6 @@
         </p:nvSpPr>
         <p:spPr>
           <a:xfrm>
-            <a:off x="908050" y="1539875"/>
-            <a:ext cx="17581245" cy="9350637"/>
-          </a:xfrm>
-          <a:prstGeom prst="rect">
-            <a:avLst/>
-          </a:prstGeom>
-        </p:spPr>
-        <p:txBody>
-          <a:bodyPr vert="horz" wrap="square" lIns="0" tIns="250825" rIns="0" bIns="0" rtlCol="0">
-            <a:spAutoFit/>
-          </a:bodyPr>
-          <a:lstStyle/>
-          <a:p>
-            <a:pPr marL="362585" indent="-350520">
-              <a:lnSpc>
-                <a:spcPct val="100000"/>
-              </a:lnSpc>
-              <a:spcBef>
-                <a:spcPts val="1975"/>
-              </a:spcBef>
-              <a:buFont typeface="Microsoft Sans Serif"/>
-              <a:buChar char="•"/>
-              <a:tabLst>
-                <a:tab pos="362585" algn="l"/>
-                <a:tab pos="363220" algn="l"/>
-              </a:tabLst>
-            </a:pPr>
-            <a:r>
-              <a:rPr lang="en-US" sz="3600" b="1" spc="75" dirty="0">
-                <a:latin typeface="Arial" panose="020B0604020202020204" pitchFamily="34" charset="0"/>
-                <a:cs typeface="Arial" panose="020B0604020202020204" pitchFamily="34" charset="0"/>
-              </a:rPr>
-              <a:t>g++ -g main.cpp -&gt; </a:t>
-            </a:r>
-            <a:r>
-              <a:rPr lang="en-US" sz="3600" b="1" spc="75" dirty="0" err="1">
-                <a:latin typeface="Arial" panose="020B0604020202020204" pitchFamily="34" charset="0"/>
-                <a:cs typeface="Arial" panose="020B0604020202020204" pitchFamily="34" charset="0"/>
-              </a:rPr>
-              <a:t>gdb</a:t>
-            </a:r>
-            <a:r>
-              <a:rPr lang="en-US" sz="3600" b="1" spc="75" dirty="0">
-                <a:latin typeface="Arial" panose="020B0604020202020204" pitchFamily="34" charset="0"/>
-                <a:cs typeface="Arial" panose="020B0604020202020204" pitchFamily="34" charset="0"/>
-              </a:rPr>
-              <a:t> </a:t>
-            </a:r>
-            <a:r>
-              <a:rPr lang="en-US" sz="3600" b="1" spc="75" dirty="0" err="1">
-                <a:latin typeface="Arial" panose="020B0604020202020204" pitchFamily="34" charset="0"/>
-                <a:cs typeface="Arial" panose="020B0604020202020204" pitchFamily="34" charset="0"/>
-              </a:rPr>
-              <a:t>a.out</a:t>
-            </a:r>
-            <a:r>
-              <a:rPr lang="en-US" sz="3600" b="1" spc="75" dirty="0">
-                <a:latin typeface="Arial" panose="020B0604020202020204" pitchFamily="34" charset="0"/>
-                <a:cs typeface="Arial" panose="020B0604020202020204" pitchFamily="34" charset="0"/>
-              </a:rPr>
-              <a:t> / </a:t>
-            </a:r>
-            <a:r>
-              <a:rPr lang="en-US" sz="3600" b="1" spc="75" dirty="0" err="1">
-                <a:latin typeface="Arial" panose="020B0604020202020204" pitchFamily="34" charset="0"/>
-                <a:cs typeface="Arial" panose="020B0604020202020204" pitchFamily="34" charset="0"/>
-              </a:rPr>
-              <a:t>gdb</a:t>
-            </a:r>
-            <a:r>
-              <a:rPr lang="en-US" sz="3600" b="1" spc="75" dirty="0">
-                <a:latin typeface="Arial" panose="020B0604020202020204" pitchFamily="34" charset="0"/>
-                <a:cs typeface="Arial" panose="020B0604020202020204" pitchFamily="34" charset="0"/>
-              </a:rPr>
-              <a:t> --</a:t>
-            </a:r>
-            <a:r>
-              <a:rPr lang="en-US" sz="3600" b="1" spc="75" dirty="0" err="1">
-                <a:latin typeface="Arial" panose="020B0604020202020204" pitchFamily="34" charset="0"/>
-                <a:cs typeface="Arial" panose="020B0604020202020204" pitchFamily="34" charset="0"/>
-              </a:rPr>
-              <a:t>args</a:t>
-            </a:r>
-            <a:r>
-              <a:rPr lang="en-US" sz="3600" b="1" spc="75" dirty="0">
-                <a:latin typeface="Arial" panose="020B0604020202020204" pitchFamily="34" charset="0"/>
-                <a:cs typeface="Arial" panose="020B0604020202020204" pitchFamily="34" charset="0"/>
-              </a:rPr>
-              <a:t> </a:t>
-            </a:r>
-            <a:r>
-              <a:rPr lang="en-US" sz="3600" b="1" spc="75" dirty="0" err="1">
-                <a:latin typeface="Arial" panose="020B0604020202020204" pitchFamily="34" charset="0"/>
-                <a:cs typeface="Arial" panose="020B0604020202020204" pitchFamily="34" charset="0"/>
-              </a:rPr>
-              <a:t>a.out</a:t>
-            </a:r>
-            <a:r>
-              <a:rPr lang="en-US" sz="3600" b="1" spc="75" dirty="0">
-                <a:latin typeface="Arial" panose="020B0604020202020204" pitchFamily="34" charset="0"/>
-                <a:cs typeface="Arial" panose="020B0604020202020204" pitchFamily="34" charset="0"/>
-              </a:rPr>
-              <a:t> arg1 arg2</a:t>
-            </a:r>
-          </a:p>
-          <a:p>
-            <a:pPr marL="362585" indent="-350520">
-              <a:lnSpc>
-                <a:spcPct val="100000"/>
-              </a:lnSpc>
-              <a:spcBef>
-                <a:spcPts val="1975"/>
-              </a:spcBef>
-              <a:buFont typeface="Microsoft Sans Serif"/>
-              <a:buChar char="•"/>
-              <a:tabLst>
-                <a:tab pos="362585" algn="l"/>
-                <a:tab pos="363220" algn="l"/>
-              </a:tabLst>
-            </a:pPr>
-            <a:r>
-              <a:rPr sz="3600" spc="75" dirty="0" err="1">
-                <a:latin typeface="Arial" panose="020B0604020202020204" pitchFamily="34" charset="0"/>
-                <a:cs typeface="Arial" panose="020B0604020202020204" pitchFamily="34" charset="0"/>
-              </a:rPr>
-              <a:t>База</a:t>
-            </a:r>
-            <a:r>
-              <a:rPr sz="3600" spc="75" dirty="0">
-                <a:latin typeface="Arial" panose="020B0604020202020204" pitchFamily="34" charset="0"/>
-                <a:cs typeface="Arial" panose="020B0604020202020204" pitchFamily="34" charset="0"/>
-              </a:rPr>
-              <a:t>:</a:t>
-            </a:r>
-            <a:endParaRPr sz="3600" dirty="0">
-              <a:latin typeface="Arial" panose="020B0604020202020204" pitchFamily="34" charset="0"/>
-              <a:cs typeface="Arial" panose="020B0604020202020204" pitchFamily="34" charset="0"/>
-            </a:endParaRPr>
-          </a:p>
-          <a:p>
-            <a:pPr marL="822960" lvl="1" indent="-350520">
-              <a:lnSpc>
-                <a:spcPct val="100000"/>
-              </a:lnSpc>
-              <a:spcBef>
-                <a:spcPts val="1875"/>
-              </a:spcBef>
-              <a:buChar char="•"/>
-              <a:tabLst>
-                <a:tab pos="822960" algn="l"/>
-                <a:tab pos="823594" algn="l"/>
-              </a:tabLst>
-            </a:pPr>
-            <a:r>
-              <a:rPr sz="3600" b="1" spc="60" dirty="0">
-                <a:latin typeface="Arial" panose="020B0604020202020204" pitchFamily="34" charset="0"/>
-                <a:cs typeface="Arial" panose="020B0604020202020204" pitchFamily="34" charset="0"/>
-              </a:rPr>
-              <a:t>break(b)</a:t>
-            </a:r>
-            <a:r>
-              <a:rPr sz="3600" b="1" spc="-15" dirty="0">
-                <a:latin typeface="Arial" panose="020B0604020202020204" pitchFamily="34" charset="0"/>
-                <a:cs typeface="Arial" panose="020B0604020202020204" pitchFamily="34" charset="0"/>
-              </a:rPr>
-              <a:t> </a:t>
-            </a:r>
-            <a:r>
-              <a:rPr sz="3600" spc="5" dirty="0">
-                <a:latin typeface="Arial" panose="020B0604020202020204" pitchFamily="34" charset="0"/>
-                <a:cs typeface="Arial" panose="020B0604020202020204" pitchFamily="34" charset="0"/>
-              </a:rPr>
-              <a:t>-</a:t>
-            </a:r>
-            <a:r>
-              <a:rPr sz="3600" spc="-10" dirty="0">
-                <a:latin typeface="Arial" panose="020B0604020202020204" pitchFamily="34" charset="0"/>
-                <a:cs typeface="Arial" panose="020B0604020202020204" pitchFamily="34" charset="0"/>
-              </a:rPr>
-              <a:t> </a:t>
-            </a:r>
-            <a:r>
-              <a:rPr sz="3600" spc="114" dirty="0">
-                <a:latin typeface="Arial" panose="020B0604020202020204" pitchFamily="34" charset="0"/>
-                <a:cs typeface="Arial" panose="020B0604020202020204" pitchFamily="34" charset="0"/>
-              </a:rPr>
-              <a:t>breakpoint</a:t>
-            </a:r>
-            <a:endParaRPr sz="3600" dirty="0">
-              <a:latin typeface="Arial" panose="020B0604020202020204" pitchFamily="34" charset="0"/>
-              <a:cs typeface="Arial" panose="020B0604020202020204" pitchFamily="34" charset="0"/>
-            </a:endParaRPr>
-          </a:p>
-          <a:p>
-            <a:pPr marL="822960" lvl="1" indent="-350520">
-              <a:lnSpc>
-                <a:spcPct val="100000"/>
-              </a:lnSpc>
-              <a:spcBef>
-                <a:spcPts val="1875"/>
-              </a:spcBef>
-              <a:buChar char="•"/>
-              <a:tabLst>
-                <a:tab pos="822960" algn="l"/>
-                <a:tab pos="823594" algn="l"/>
-              </a:tabLst>
-            </a:pPr>
-            <a:r>
-              <a:rPr sz="3600" b="1" spc="40" dirty="0">
-                <a:latin typeface="Arial" panose="020B0604020202020204" pitchFamily="34" charset="0"/>
-                <a:cs typeface="Arial" panose="020B0604020202020204" pitchFamily="34" charset="0"/>
-              </a:rPr>
-              <a:t>step(s)</a:t>
-            </a:r>
-            <a:r>
-              <a:rPr sz="3600" b="1" dirty="0">
-                <a:latin typeface="Arial" panose="020B0604020202020204" pitchFamily="34" charset="0"/>
-                <a:cs typeface="Arial" panose="020B0604020202020204" pitchFamily="34" charset="0"/>
-              </a:rPr>
-              <a:t> </a:t>
-            </a:r>
-            <a:r>
-              <a:rPr sz="3600" b="1" spc="375" dirty="0">
-                <a:latin typeface="Arial" panose="020B0604020202020204" pitchFamily="34" charset="0"/>
-                <a:cs typeface="Arial" panose="020B0604020202020204" pitchFamily="34" charset="0"/>
-              </a:rPr>
-              <a:t>/</a:t>
-            </a:r>
-            <a:r>
-              <a:rPr sz="3600" b="1" spc="5" dirty="0">
-                <a:latin typeface="Arial" panose="020B0604020202020204" pitchFamily="34" charset="0"/>
-                <a:cs typeface="Arial" panose="020B0604020202020204" pitchFamily="34" charset="0"/>
-              </a:rPr>
-              <a:t> </a:t>
-            </a:r>
-            <a:r>
-              <a:rPr sz="3600" b="1" spc="70" dirty="0">
-                <a:latin typeface="Arial" panose="020B0604020202020204" pitchFamily="34" charset="0"/>
-                <a:cs typeface="Arial" panose="020B0604020202020204" pitchFamily="34" charset="0"/>
-              </a:rPr>
-              <a:t>next(n)</a:t>
-            </a:r>
-            <a:r>
-              <a:rPr sz="3600" b="1" spc="5" dirty="0">
-                <a:latin typeface="Arial" panose="020B0604020202020204" pitchFamily="34" charset="0"/>
-                <a:cs typeface="Arial" panose="020B0604020202020204" pitchFamily="34" charset="0"/>
-              </a:rPr>
-              <a:t> </a:t>
-            </a:r>
-            <a:r>
-              <a:rPr sz="3600" spc="5" dirty="0">
-                <a:latin typeface="Arial" panose="020B0604020202020204" pitchFamily="34" charset="0"/>
-                <a:cs typeface="Arial" panose="020B0604020202020204" pitchFamily="34" charset="0"/>
-              </a:rPr>
-              <a:t>-</a:t>
-            </a:r>
-            <a:r>
-              <a:rPr sz="3600" dirty="0">
-                <a:latin typeface="Arial" panose="020B0604020202020204" pitchFamily="34" charset="0"/>
-                <a:cs typeface="Arial" panose="020B0604020202020204" pitchFamily="34" charset="0"/>
-              </a:rPr>
-              <a:t> </a:t>
-            </a:r>
-            <a:r>
-              <a:rPr sz="3600" spc="-65" dirty="0">
-                <a:latin typeface="Arial" panose="020B0604020202020204" pitchFamily="34" charset="0"/>
-                <a:cs typeface="Arial" panose="020B0604020202020204" pitchFamily="34" charset="0"/>
-              </a:rPr>
-              <a:t>следующая</a:t>
-            </a:r>
-            <a:r>
-              <a:rPr sz="3600" spc="-150" dirty="0">
-                <a:latin typeface="Arial" panose="020B0604020202020204" pitchFamily="34" charset="0"/>
-                <a:cs typeface="Arial" panose="020B0604020202020204" pitchFamily="34" charset="0"/>
-              </a:rPr>
-              <a:t> </a:t>
-            </a:r>
-            <a:r>
-              <a:rPr sz="3600" spc="-60" dirty="0">
-                <a:latin typeface="Arial" panose="020B0604020202020204" pitchFamily="34" charset="0"/>
-                <a:cs typeface="Arial" panose="020B0604020202020204" pitchFamily="34" charset="0"/>
-              </a:rPr>
-              <a:t>строка</a:t>
-            </a:r>
-            <a:r>
-              <a:rPr sz="3600" spc="-150" dirty="0">
-                <a:latin typeface="Arial" panose="020B0604020202020204" pitchFamily="34" charset="0"/>
-                <a:cs typeface="Arial" panose="020B0604020202020204" pitchFamily="34" charset="0"/>
-              </a:rPr>
-              <a:t> </a:t>
-            </a:r>
-            <a:r>
-              <a:rPr sz="3600" spc="-35" dirty="0">
-                <a:latin typeface="Arial" panose="020B0604020202020204" pitchFamily="34" charset="0"/>
-                <a:cs typeface="Arial" panose="020B0604020202020204" pitchFamily="34" charset="0"/>
-              </a:rPr>
-              <a:t>с</a:t>
-            </a:r>
-            <a:r>
-              <a:rPr sz="3600" spc="-155" dirty="0">
-                <a:latin typeface="Arial" panose="020B0604020202020204" pitchFamily="34" charset="0"/>
-                <a:cs typeface="Arial" panose="020B0604020202020204" pitchFamily="34" charset="0"/>
-              </a:rPr>
-              <a:t> </a:t>
-            </a:r>
-            <a:r>
-              <a:rPr sz="3600" spc="-140" dirty="0">
-                <a:latin typeface="Arial" panose="020B0604020202020204" pitchFamily="34" charset="0"/>
-                <a:cs typeface="Arial" panose="020B0604020202020204" pitchFamily="34" charset="0"/>
-              </a:rPr>
-              <a:t>заходом</a:t>
-            </a:r>
-            <a:r>
-              <a:rPr sz="3600" spc="-150" dirty="0">
-                <a:latin typeface="Arial" panose="020B0604020202020204" pitchFamily="34" charset="0"/>
-                <a:cs typeface="Arial" panose="020B0604020202020204" pitchFamily="34" charset="0"/>
-              </a:rPr>
-              <a:t> </a:t>
-            </a:r>
-            <a:r>
-              <a:rPr sz="3600" spc="375" dirty="0">
-                <a:latin typeface="Arial" panose="020B0604020202020204" pitchFamily="34" charset="0"/>
-                <a:cs typeface="Arial" panose="020B0604020202020204" pitchFamily="34" charset="0"/>
-              </a:rPr>
-              <a:t>/</a:t>
-            </a:r>
-            <a:r>
-              <a:rPr sz="3600" spc="5" dirty="0">
-                <a:latin typeface="Arial" panose="020B0604020202020204" pitchFamily="34" charset="0"/>
-                <a:cs typeface="Arial" panose="020B0604020202020204" pitchFamily="34" charset="0"/>
-              </a:rPr>
-              <a:t> </a:t>
-            </a:r>
-            <a:r>
-              <a:rPr sz="3600" spc="-20" dirty="0">
-                <a:latin typeface="Arial" panose="020B0604020202020204" pitchFamily="34" charset="0"/>
-                <a:cs typeface="Arial" panose="020B0604020202020204" pitchFamily="34" charset="0"/>
-              </a:rPr>
-              <a:t>без</a:t>
-            </a:r>
-            <a:r>
-              <a:rPr sz="3600" spc="-150" dirty="0">
-                <a:latin typeface="Arial" panose="020B0604020202020204" pitchFamily="34" charset="0"/>
-                <a:cs typeface="Arial" panose="020B0604020202020204" pitchFamily="34" charset="0"/>
-              </a:rPr>
-              <a:t> </a:t>
-            </a:r>
-            <a:r>
-              <a:rPr sz="3600" spc="-105" dirty="0">
-                <a:latin typeface="Arial" panose="020B0604020202020204" pitchFamily="34" charset="0"/>
-                <a:cs typeface="Arial" panose="020B0604020202020204" pitchFamily="34" charset="0"/>
-              </a:rPr>
-              <a:t>захода</a:t>
-            </a:r>
-            <a:r>
-              <a:rPr sz="3600" spc="-155" dirty="0">
-                <a:latin typeface="Arial" panose="020B0604020202020204" pitchFamily="34" charset="0"/>
-                <a:cs typeface="Arial" panose="020B0604020202020204" pitchFamily="34" charset="0"/>
-              </a:rPr>
-              <a:t> </a:t>
-            </a:r>
-            <a:r>
-              <a:rPr sz="3600" spc="70" dirty="0">
-                <a:latin typeface="Arial" panose="020B0604020202020204" pitchFamily="34" charset="0"/>
-                <a:cs typeface="Arial" panose="020B0604020202020204" pitchFamily="34" charset="0"/>
-              </a:rPr>
-              <a:t>в</a:t>
-            </a:r>
-            <a:r>
-              <a:rPr sz="3600" spc="-150" dirty="0">
-                <a:latin typeface="Arial" panose="020B0604020202020204" pitchFamily="34" charset="0"/>
-                <a:cs typeface="Arial" panose="020B0604020202020204" pitchFamily="34" charset="0"/>
-              </a:rPr>
-              <a:t> </a:t>
-            </a:r>
-            <a:r>
-              <a:rPr sz="3600" spc="-100" dirty="0">
-                <a:latin typeface="Arial" panose="020B0604020202020204" pitchFamily="34" charset="0"/>
-                <a:cs typeface="Arial" panose="020B0604020202020204" pitchFamily="34" charset="0"/>
-              </a:rPr>
-              <a:t>функцию</a:t>
-            </a:r>
-            <a:endParaRPr sz="3600" dirty="0">
-              <a:latin typeface="Arial" panose="020B0604020202020204" pitchFamily="34" charset="0"/>
-              <a:cs typeface="Arial" panose="020B0604020202020204" pitchFamily="34" charset="0"/>
-            </a:endParaRPr>
-          </a:p>
-          <a:p>
-            <a:pPr marL="822960" lvl="1" indent="-350520">
-              <a:lnSpc>
-                <a:spcPct val="100000"/>
-              </a:lnSpc>
-              <a:spcBef>
-                <a:spcPts val="1889"/>
-              </a:spcBef>
-              <a:buChar char="•"/>
-              <a:tabLst>
-                <a:tab pos="822960" algn="l"/>
-                <a:tab pos="823594" algn="l"/>
-              </a:tabLst>
-            </a:pPr>
-            <a:r>
-              <a:rPr sz="3600" b="1" spc="45" dirty="0">
-                <a:latin typeface="Arial" panose="020B0604020202020204" pitchFamily="34" charset="0"/>
-                <a:cs typeface="Arial" panose="020B0604020202020204" pitchFamily="34" charset="0"/>
-              </a:rPr>
-              <a:t>stepi(si)</a:t>
-            </a:r>
-            <a:r>
-              <a:rPr sz="3600" b="1" spc="5" dirty="0">
-                <a:latin typeface="Arial" panose="020B0604020202020204" pitchFamily="34" charset="0"/>
-                <a:cs typeface="Arial" panose="020B0604020202020204" pitchFamily="34" charset="0"/>
-              </a:rPr>
-              <a:t> </a:t>
-            </a:r>
-            <a:r>
-              <a:rPr sz="3600" b="1" spc="375" dirty="0">
-                <a:latin typeface="Arial" panose="020B0604020202020204" pitchFamily="34" charset="0"/>
-                <a:cs typeface="Arial" panose="020B0604020202020204" pitchFamily="34" charset="0"/>
-              </a:rPr>
-              <a:t>/</a:t>
-            </a:r>
-            <a:r>
-              <a:rPr sz="3600" b="1" spc="10" dirty="0">
-                <a:latin typeface="Arial" panose="020B0604020202020204" pitchFamily="34" charset="0"/>
-                <a:cs typeface="Arial" panose="020B0604020202020204" pitchFamily="34" charset="0"/>
-              </a:rPr>
-              <a:t> </a:t>
-            </a:r>
-            <a:r>
-              <a:rPr sz="3600" b="1" spc="75" dirty="0">
-                <a:latin typeface="Arial" panose="020B0604020202020204" pitchFamily="34" charset="0"/>
-                <a:cs typeface="Arial" panose="020B0604020202020204" pitchFamily="34" charset="0"/>
-              </a:rPr>
-              <a:t>nexti(ni)</a:t>
-            </a:r>
-            <a:r>
-              <a:rPr sz="3600" b="1" spc="10" dirty="0">
-                <a:latin typeface="Arial" panose="020B0604020202020204" pitchFamily="34" charset="0"/>
-                <a:cs typeface="Arial" panose="020B0604020202020204" pitchFamily="34" charset="0"/>
-              </a:rPr>
-              <a:t> </a:t>
-            </a:r>
-            <a:r>
-              <a:rPr sz="3600" spc="5" dirty="0">
-                <a:latin typeface="Arial" panose="020B0604020202020204" pitchFamily="34" charset="0"/>
-                <a:cs typeface="Arial" panose="020B0604020202020204" pitchFamily="34" charset="0"/>
-              </a:rPr>
-              <a:t>- </a:t>
-            </a:r>
-            <a:r>
-              <a:rPr sz="3600" spc="-65" dirty="0">
-                <a:latin typeface="Arial" panose="020B0604020202020204" pitchFamily="34" charset="0"/>
-                <a:cs typeface="Arial" panose="020B0604020202020204" pitchFamily="34" charset="0"/>
-              </a:rPr>
-              <a:t>следующая</a:t>
-            </a:r>
-            <a:r>
-              <a:rPr sz="3600" spc="-145" dirty="0">
-                <a:latin typeface="Arial" panose="020B0604020202020204" pitchFamily="34" charset="0"/>
-                <a:cs typeface="Arial" panose="020B0604020202020204" pitchFamily="34" charset="0"/>
-              </a:rPr>
-              <a:t> </a:t>
-            </a:r>
-            <a:r>
-              <a:rPr sz="3600" spc="-55" dirty="0">
-                <a:latin typeface="Arial" panose="020B0604020202020204" pitchFamily="34" charset="0"/>
-                <a:cs typeface="Arial" panose="020B0604020202020204" pitchFamily="34" charset="0"/>
-              </a:rPr>
-              <a:t>ассемблерная</a:t>
-            </a:r>
-            <a:r>
-              <a:rPr sz="3600" spc="-145" dirty="0">
-                <a:latin typeface="Arial" panose="020B0604020202020204" pitchFamily="34" charset="0"/>
-                <a:cs typeface="Arial" panose="020B0604020202020204" pitchFamily="34" charset="0"/>
-              </a:rPr>
-              <a:t> </a:t>
-            </a:r>
-            <a:r>
-              <a:rPr sz="3600" spc="-90" dirty="0">
-                <a:latin typeface="Arial" panose="020B0604020202020204" pitchFamily="34" charset="0"/>
-                <a:cs typeface="Arial" panose="020B0604020202020204" pitchFamily="34" charset="0"/>
-              </a:rPr>
-              <a:t>инструкция</a:t>
-            </a:r>
-            <a:r>
-              <a:rPr sz="3600" spc="-150" dirty="0">
-                <a:latin typeface="Arial" panose="020B0604020202020204" pitchFamily="34" charset="0"/>
-                <a:cs typeface="Arial" panose="020B0604020202020204" pitchFamily="34" charset="0"/>
-              </a:rPr>
-              <a:t> </a:t>
-            </a:r>
-            <a:r>
-              <a:rPr sz="3600" spc="-35" dirty="0">
-                <a:latin typeface="Arial" panose="020B0604020202020204" pitchFamily="34" charset="0"/>
-                <a:cs typeface="Arial" panose="020B0604020202020204" pitchFamily="34" charset="0"/>
-              </a:rPr>
-              <a:t>с</a:t>
-            </a:r>
-            <a:r>
-              <a:rPr sz="3600" spc="-145" dirty="0">
-                <a:latin typeface="Arial" panose="020B0604020202020204" pitchFamily="34" charset="0"/>
-                <a:cs typeface="Arial" panose="020B0604020202020204" pitchFamily="34" charset="0"/>
-              </a:rPr>
-              <a:t> </a:t>
-            </a:r>
-            <a:r>
-              <a:rPr sz="3600" spc="-140" dirty="0">
-                <a:latin typeface="Arial" panose="020B0604020202020204" pitchFamily="34" charset="0"/>
-                <a:cs typeface="Arial" panose="020B0604020202020204" pitchFamily="34" charset="0"/>
-              </a:rPr>
-              <a:t>заходом</a:t>
-            </a:r>
-            <a:r>
-              <a:rPr sz="3600" spc="-145" dirty="0">
-                <a:latin typeface="Arial" panose="020B0604020202020204" pitchFamily="34" charset="0"/>
-                <a:cs typeface="Arial" panose="020B0604020202020204" pitchFamily="34" charset="0"/>
-              </a:rPr>
-              <a:t> </a:t>
-            </a:r>
-            <a:r>
-              <a:rPr sz="3600" spc="375" dirty="0">
-                <a:latin typeface="Arial" panose="020B0604020202020204" pitchFamily="34" charset="0"/>
-                <a:cs typeface="Arial" panose="020B0604020202020204" pitchFamily="34" charset="0"/>
-              </a:rPr>
-              <a:t>/</a:t>
-            </a:r>
-            <a:r>
-              <a:rPr sz="3600" spc="5" dirty="0">
-                <a:latin typeface="Arial" panose="020B0604020202020204" pitchFamily="34" charset="0"/>
-                <a:cs typeface="Arial" panose="020B0604020202020204" pitchFamily="34" charset="0"/>
-              </a:rPr>
-              <a:t> </a:t>
-            </a:r>
-            <a:r>
-              <a:rPr sz="3600" spc="-20" dirty="0">
-                <a:latin typeface="Arial" panose="020B0604020202020204" pitchFamily="34" charset="0"/>
-                <a:cs typeface="Arial" panose="020B0604020202020204" pitchFamily="34" charset="0"/>
-              </a:rPr>
-              <a:t>без</a:t>
-            </a:r>
-            <a:r>
-              <a:rPr sz="3600" spc="-145" dirty="0">
-                <a:latin typeface="Arial" panose="020B0604020202020204" pitchFamily="34" charset="0"/>
-                <a:cs typeface="Arial" panose="020B0604020202020204" pitchFamily="34" charset="0"/>
-              </a:rPr>
-              <a:t> </a:t>
-            </a:r>
-            <a:r>
-              <a:rPr sz="3600" spc="-105" dirty="0">
-                <a:latin typeface="Arial" panose="020B0604020202020204" pitchFamily="34" charset="0"/>
-                <a:cs typeface="Arial" panose="020B0604020202020204" pitchFamily="34" charset="0"/>
-              </a:rPr>
-              <a:t>захода</a:t>
-            </a:r>
-            <a:r>
-              <a:rPr sz="3600" spc="-145" dirty="0">
-                <a:latin typeface="Arial" panose="020B0604020202020204" pitchFamily="34" charset="0"/>
-                <a:cs typeface="Arial" panose="020B0604020202020204" pitchFamily="34" charset="0"/>
-              </a:rPr>
-              <a:t> </a:t>
-            </a:r>
-            <a:r>
-              <a:rPr sz="3600" spc="70" dirty="0">
-                <a:latin typeface="Arial" panose="020B0604020202020204" pitchFamily="34" charset="0"/>
-                <a:cs typeface="Arial" panose="020B0604020202020204" pitchFamily="34" charset="0"/>
-              </a:rPr>
-              <a:t>в</a:t>
-            </a:r>
-            <a:r>
-              <a:rPr sz="3600" spc="-150" dirty="0">
-                <a:latin typeface="Arial" panose="020B0604020202020204" pitchFamily="34" charset="0"/>
-                <a:cs typeface="Arial" panose="020B0604020202020204" pitchFamily="34" charset="0"/>
-              </a:rPr>
-              <a:t> </a:t>
-            </a:r>
-            <a:r>
-              <a:rPr sz="3600" spc="-100" dirty="0">
-                <a:latin typeface="Arial" panose="020B0604020202020204" pitchFamily="34" charset="0"/>
-                <a:cs typeface="Arial" panose="020B0604020202020204" pitchFamily="34" charset="0"/>
-              </a:rPr>
-              <a:t>функцию</a:t>
-            </a:r>
-            <a:endParaRPr sz="3600" dirty="0">
-              <a:latin typeface="Arial" panose="020B0604020202020204" pitchFamily="34" charset="0"/>
-              <a:cs typeface="Arial" panose="020B0604020202020204" pitchFamily="34" charset="0"/>
-            </a:endParaRPr>
-          </a:p>
-          <a:p>
-            <a:pPr marL="822960" lvl="1" indent="-350520">
-              <a:lnSpc>
-                <a:spcPct val="100000"/>
-              </a:lnSpc>
-              <a:spcBef>
-                <a:spcPts val="1895"/>
-              </a:spcBef>
-              <a:buChar char="•"/>
-              <a:tabLst>
-                <a:tab pos="822960" algn="l"/>
-                <a:tab pos="823594" algn="l"/>
-              </a:tabLst>
-            </a:pPr>
-            <a:r>
-              <a:rPr sz="3600" b="1" spc="75" dirty="0">
-                <a:latin typeface="Arial" panose="020B0604020202020204" pitchFamily="34" charset="0"/>
-                <a:cs typeface="Arial" panose="020B0604020202020204" pitchFamily="34" charset="0"/>
-              </a:rPr>
-              <a:t>run(r) </a:t>
-            </a:r>
-            <a:r>
-              <a:rPr sz="3600" spc="5" dirty="0">
-                <a:latin typeface="Arial" panose="020B0604020202020204" pitchFamily="34" charset="0"/>
-                <a:cs typeface="Arial" panose="020B0604020202020204" pitchFamily="34" charset="0"/>
-              </a:rPr>
-              <a:t>- </a:t>
-            </a:r>
-            <a:r>
-              <a:rPr sz="3600" spc="35" dirty="0">
-                <a:latin typeface="Arial" panose="020B0604020202020204" pitchFamily="34" charset="0"/>
-                <a:cs typeface="Arial" panose="020B0604020202020204" pitchFamily="34" charset="0"/>
-              </a:rPr>
-              <a:t>за</a:t>
-            </a:r>
-            <a:r>
-              <a:rPr sz="3600" spc="-210" dirty="0">
-                <a:latin typeface="Arial" panose="020B0604020202020204" pitchFamily="34" charset="0"/>
-                <a:cs typeface="Arial" panose="020B0604020202020204" pitchFamily="34" charset="0"/>
-              </a:rPr>
-              <a:t>п</a:t>
-            </a:r>
-            <a:r>
-              <a:rPr sz="3600" spc="-55" dirty="0">
-                <a:latin typeface="Arial" panose="020B0604020202020204" pitchFamily="34" charset="0"/>
-                <a:cs typeface="Arial" panose="020B0604020202020204" pitchFamily="34" charset="0"/>
-              </a:rPr>
-              <a:t>усти</a:t>
-            </a:r>
-            <a:r>
-              <a:rPr sz="3600" dirty="0">
-                <a:latin typeface="Arial" panose="020B0604020202020204" pitchFamily="34" charset="0"/>
-                <a:cs typeface="Arial" panose="020B0604020202020204" pitchFamily="34" charset="0"/>
-              </a:rPr>
-              <a:t>ть</a:t>
-            </a:r>
-            <a:r>
-              <a:rPr sz="3600" spc="-155" dirty="0">
-                <a:latin typeface="Arial" panose="020B0604020202020204" pitchFamily="34" charset="0"/>
-                <a:cs typeface="Arial" panose="020B0604020202020204" pitchFamily="34" charset="0"/>
-              </a:rPr>
-              <a:t> </a:t>
-            </a:r>
-            <a:r>
-              <a:rPr sz="3600" spc="-125" dirty="0">
-                <a:latin typeface="Arial" panose="020B0604020202020204" pitchFamily="34" charset="0"/>
-                <a:cs typeface="Arial" panose="020B0604020202020204" pitchFamily="34" charset="0"/>
-              </a:rPr>
-              <a:t>и</a:t>
-            </a:r>
-            <a:r>
-              <a:rPr sz="3600" spc="-120" dirty="0">
-                <a:latin typeface="Arial" panose="020B0604020202020204" pitchFamily="34" charset="0"/>
-                <a:cs typeface="Arial" panose="020B0604020202020204" pitchFamily="34" charset="0"/>
-              </a:rPr>
-              <a:t>сп</a:t>
-            </a:r>
-            <a:r>
-              <a:rPr sz="3600" spc="-170" dirty="0">
-                <a:latin typeface="Arial" panose="020B0604020202020204" pitchFamily="34" charset="0"/>
-                <a:cs typeface="Arial" panose="020B0604020202020204" pitchFamily="34" charset="0"/>
-              </a:rPr>
-              <a:t>о</a:t>
-            </a:r>
-            <a:r>
-              <a:rPr sz="3600" spc="-45" dirty="0">
-                <a:latin typeface="Arial" panose="020B0604020202020204" pitchFamily="34" charset="0"/>
-                <a:cs typeface="Arial" panose="020B0604020202020204" pitchFamily="34" charset="0"/>
-              </a:rPr>
-              <a:t>л</a:t>
-            </a:r>
-            <a:r>
-              <a:rPr sz="3600" spc="-210" dirty="0">
-                <a:latin typeface="Arial" panose="020B0604020202020204" pitchFamily="34" charset="0"/>
-                <a:cs typeface="Arial" panose="020B0604020202020204" pitchFamily="34" charset="0"/>
-              </a:rPr>
-              <a:t>н</a:t>
-            </a:r>
-            <a:r>
-              <a:rPr sz="3600" dirty="0">
-                <a:latin typeface="Arial" panose="020B0604020202020204" pitchFamily="34" charset="0"/>
-                <a:cs typeface="Arial" panose="020B0604020202020204" pitchFamily="34" charset="0"/>
-              </a:rPr>
-              <a:t>е</a:t>
-            </a:r>
-            <a:r>
-              <a:rPr sz="3600" spc="-210" dirty="0">
-                <a:latin typeface="Arial" panose="020B0604020202020204" pitchFamily="34" charset="0"/>
-                <a:cs typeface="Arial" panose="020B0604020202020204" pitchFamily="34" charset="0"/>
-              </a:rPr>
-              <a:t>н</a:t>
-            </a:r>
-            <a:r>
-              <a:rPr sz="3600" spc="-125" dirty="0">
-                <a:latin typeface="Arial" panose="020B0604020202020204" pitchFamily="34" charset="0"/>
-                <a:cs typeface="Arial" panose="020B0604020202020204" pitchFamily="34" charset="0"/>
-              </a:rPr>
-              <a:t>и</a:t>
-            </a:r>
-            <a:r>
-              <a:rPr sz="3600" dirty="0">
-                <a:latin typeface="Arial" panose="020B0604020202020204" pitchFamily="34" charset="0"/>
-                <a:cs typeface="Arial" panose="020B0604020202020204" pitchFamily="34" charset="0"/>
-              </a:rPr>
-              <a:t>е</a:t>
-            </a:r>
-            <a:r>
-              <a:rPr sz="3600" spc="-155" dirty="0">
-                <a:latin typeface="Arial" panose="020B0604020202020204" pitchFamily="34" charset="0"/>
-                <a:cs typeface="Arial" panose="020B0604020202020204" pitchFamily="34" charset="0"/>
-              </a:rPr>
-              <a:t> </a:t>
-            </a:r>
-            <a:r>
-              <a:rPr sz="3600" spc="-210" dirty="0">
-                <a:latin typeface="Arial" panose="020B0604020202020204" pitchFamily="34" charset="0"/>
-                <a:cs typeface="Arial" panose="020B0604020202020204" pitchFamily="34" charset="0"/>
-              </a:rPr>
-              <a:t>п</a:t>
-            </a:r>
-            <a:r>
-              <a:rPr sz="3600" spc="-220" dirty="0">
-                <a:latin typeface="Arial" panose="020B0604020202020204" pitchFamily="34" charset="0"/>
-                <a:cs typeface="Arial" panose="020B0604020202020204" pitchFamily="34" charset="0"/>
-              </a:rPr>
-              <a:t>р</a:t>
-            </a:r>
-            <a:r>
-              <a:rPr sz="3600" spc="-170" dirty="0">
-                <a:latin typeface="Arial" panose="020B0604020202020204" pitchFamily="34" charset="0"/>
-                <a:cs typeface="Arial" panose="020B0604020202020204" pitchFamily="34" charset="0"/>
-              </a:rPr>
-              <a:t>о</a:t>
-            </a:r>
-            <a:r>
-              <a:rPr sz="3600" spc="-280" dirty="0">
-                <a:latin typeface="Arial" panose="020B0604020202020204" pitchFamily="34" charset="0"/>
-                <a:cs typeface="Arial" panose="020B0604020202020204" pitchFamily="34" charset="0"/>
-              </a:rPr>
-              <a:t>г</a:t>
-            </a:r>
-            <a:r>
-              <a:rPr sz="3600" spc="-220" dirty="0">
-                <a:latin typeface="Arial" panose="020B0604020202020204" pitchFamily="34" charset="0"/>
-                <a:cs typeface="Arial" panose="020B0604020202020204" pitchFamily="34" charset="0"/>
-              </a:rPr>
-              <a:t>р</a:t>
-            </a:r>
-            <a:r>
-              <a:rPr sz="3600" spc="15" dirty="0">
-                <a:latin typeface="Arial" panose="020B0604020202020204" pitchFamily="34" charset="0"/>
-                <a:cs typeface="Arial" panose="020B0604020202020204" pitchFamily="34" charset="0"/>
-              </a:rPr>
-              <a:t>а</a:t>
-            </a:r>
-            <a:r>
-              <a:rPr sz="3600" spc="-120" dirty="0">
-                <a:latin typeface="Arial" panose="020B0604020202020204" pitchFamily="34" charset="0"/>
-                <a:cs typeface="Arial" panose="020B0604020202020204" pitchFamily="34" charset="0"/>
-              </a:rPr>
-              <a:t>ммы</a:t>
-            </a:r>
-            <a:r>
-              <a:rPr sz="3600" spc="-155" dirty="0">
-                <a:latin typeface="Arial" panose="020B0604020202020204" pitchFamily="34" charset="0"/>
-                <a:cs typeface="Arial" panose="020B0604020202020204" pitchFamily="34" charset="0"/>
-              </a:rPr>
-              <a:t> </a:t>
-            </a:r>
-            <a:r>
-              <a:rPr sz="3600" spc="-35" dirty="0">
-                <a:latin typeface="Arial" panose="020B0604020202020204" pitchFamily="34" charset="0"/>
-                <a:cs typeface="Arial" panose="020B0604020202020204" pitchFamily="34" charset="0"/>
-              </a:rPr>
-              <a:t>с</a:t>
-            </a:r>
-            <a:r>
-              <a:rPr sz="3600" spc="-155" dirty="0">
-                <a:latin typeface="Arial" panose="020B0604020202020204" pitchFamily="34" charset="0"/>
-                <a:cs typeface="Arial" panose="020B0604020202020204" pitchFamily="34" charset="0"/>
-              </a:rPr>
-              <a:t> </a:t>
-            </a:r>
-            <a:r>
-              <a:rPr sz="3600" spc="-25" dirty="0">
-                <a:latin typeface="Arial" panose="020B0604020202020204" pitchFamily="34" charset="0"/>
-                <a:cs typeface="Arial" panose="020B0604020202020204" pitchFamily="34" charset="0"/>
-              </a:rPr>
-              <a:t>начала</a:t>
-            </a:r>
-            <a:endParaRPr sz="3600" dirty="0">
-              <a:latin typeface="Arial" panose="020B0604020202020204" pitchFamily="34" charset="0"/>
-              <a:cs typeface="Arial" panose="020B0604020202020204" pitchFamily="34" charset="0"/>
-            </a:endParaRPr>
-          </a:p>
-          <a:p>
-            <a:pPr marL="822960" lvl="1" indent="-350520">
-              <a:lnSpc>
-                <a:spcPct val="100000"/>
-              </a:lnSpc>
-              <a:spcBef>
-                <a:spcPts val="1889"/>
-              </a:spcBef>
-              <a:buChar char="•"/>
-              <a:tabLst>
-                <a:tab pos="822960" algn="l"/>
-                <a:tab pos="823594" algn="l"/>
-              </a:tabLst>
-            </a:pPr>
-            <a:r>
-              <a:rPr sz="3600" b="1" spc="110" dirty="0">
-                <a:latin typeface="Arial" panose="020B0604020202020204" pitchFamily="34" charset="0"/>
-                <a:cs typeface="Arial" panose="020B0604020202020204" pitchFamily="34" charset="0"/>
-              </a:rPr>
-              <a:t>continue(c)</a:t>
-            </a:r>
-            <a:r>
-              <a:rPr sz="3600" b="1" spc="10" dirty="0">
-                <a:latin typeface="Arial" panose="020B0604020202020204" pitchFamily="34" charset="0"/>
-                <a:cs typeface="Arial" panose="020B0604020202020204" pitchFamily="34" charset="0"/>
-              </a:rPr>
-              <a:t> </a:t>
-            </a:r>
-            <a:r>
-              <a:rPr sz="3600" spc="5" dirty="0">
-                <a:latin typeface="Arial" panose="020B0604020202020204" pitchFamily="34" charset="0"/>
-                <a:cs typeface="Arial" panose="020B0604020202020204" pitchFamily="34" charset="0"/>
-              </a:rPr>
-              <a:t>-</a:t>
-            </a:r>
-            <a:r>
-              <a:rPr sz="3600" spc="10" dirty="0">
-                <a:latin typeface="Arial" panose="020B0604020202020204" pitchFamily="34" charset="0"/>
-                <a:cs typeface="Arial" panose="020B0604020202020204" pitchFamily="34" charset="0"/>
-              </a:rPr>
-              <a:t> </a:t>
-            </a:r>
-            <a:r>
-              <a:rPr sz="3600" spc="-100" dirty="0">
-                <a:latin typeface="Arial" panose="020B0604020202020204" pitchFamily="34" charset="0"/>
-                <a:cs typeface="Arial" panose="020B0604020202020204" pitchFamily="34" charset="0"/>
-              </a:rPr>
-              <a:t>продолжить</a:t>
-            </a:r>
-            <a:r>
-              <a:rPr sz="3600" spc="-145" dirty="0">
-                <a:latin typeface="Arial" panose="020B0604020202020204" pitchFamily="34" charset="0"/>
-                <a:cs typeface="Arial" panose="020B0604020202020204" pitchFamily="34" charset="0"/>
-              </a:rPr>
-              <a:t> </a:t>
-            </a:r>
-            <a:r>
-              <a:rPr sz="3600" spc="-114" dirty="0">
-                <a:latin typeface="Arial" panose="020B0604020202020204" pitchFamily="34" charset="0"/>
-                <a:cs typeface="Arial" panose="020B0604020202020204" pitchFamily="34" charset="0"/>
-              </a:rPr>
-              <a:t>исполнение</a:t>
-            </a:r>
-            <a:r>
-              <a:rPr sz="3600" spc="-140" dirty="0">
-                <a:latin typeface="Arial" panose="020B0604020202020204" pitchFamily="34" charset="0"/>
-                <a:cs typeface="Arial" panose="020B0604020202020204" pitchFamily="34" charset="0"/>
-              </a:rPr>
-              <a:t> </a:t>
-            </a:r>
-            <a:r>
-              <a:rPr sz="3600" spc="-135" dirty="0">
-                <a:latin typeface="Arial" panose="020B0604020202020204" pitchFamily="34" charset="0"/>
-                <a:cs typeface="Arial" panose="020B0604020202020204" pitchFamily="34" charset="0"/>
-              </a:rPr>
-              <a:t>(до</a:t>
-            </a:r>
-            <a:r>
-              <a:rPr sz="3600" spc="-145" dirty="0">
-                <a:latin typeface="Arial" panose="020B0604020202020204" pitchFamily="34" charset="0"/>
-                <a:cs typeface="Arial" panose="020B0604020202020204" pitchFamily="34" charset="0"/>
-              </a:rPr>
-              <a:t> </a:t>
-            </a:r>
-            <a:r>
-              <a:rPr sz="3600" spc="-125" dirty="0">
-                <a:latin typeface="Arial" panose="020B0604020202020204" pitchFamily="34" charset="0"/>
-                <a:cs typeface="Arial" panose="020B0604020202020204" pitchFamily="34" charset="0"/>
-              </a:rPr>
-              <a:t>конца</a:t>
-            </a:r>
-            <a:r>
-              <a:rPr sz="3600" spc="-145" dirty="0">
-                <a:latin typeface="Arial" panose="020B0604020202020204" pitchFamily="34" charset="0"/>
-                <a:cs typeface="Arial" panose="020B0604020202020204" pitchFamily="34" charset="0"/>
-              </a:rPr>
-              <a:t> </a:t>
-            </a:r>
-            <a:r>
-              <a:rPr sz="3600" spc="-95" dirty="0">
-                <a:latin typeface="Arial" panose="020B0604020202020204" pitchFamily="34" charset="0"/>
-                <a:cs typeface="Arial" panose="020B0604020202020204" pitchFamily="34" charset="0"/>
-              </a:rPr>
-              <a:t>или</a:t>
-            </a:r>
-            <a:r>
-              <a:rPr sz="3600" spc="-145" dirty="0">
-                <a:latin typeface="Arial" panose="020B0604020202020204" pitchFamily="34" charset="0"/>
-                <a:cs typeface="Arial" panose="020B0604020202020204" pitchFamily="34" charset="0"/>
-              </a:rPr>
-              <a:t> </a:t>
-            </a:r>
-            <a:r>
-              <a:rPr sz="3600" spc="-120" dirty="0">
-                <a:latin typeface="Arial" panose="020B0604020202020204" pitchFamily="34" charset="0"/>
-                <a:cs typeface="Arial" panose="020B0604020202020204" pitchFamily="34" charset="0"/>
-              </a:rPr>
-              <a:t>следующего</a:t>
-            </a:r>
-            <a:r>
-              <a:rPr sz="3600" spc="-140" dirty="0">
-                <a:latin typeface="Arial" panose="020B0604020202020204" pitchFamily="34" charset="0"/>
-                <a:cs typeface="Arial" panose="020B0604020202020204" pitchFamily="34" charset="0"/>
-              </a:rPr>
-              <a:t> </a:t>
-            </a:r>
-            <a:r>
-              <a:rPr sz="3600" spc="100" dirty="0">
-                <a:latin typeface="Arial" panose="020B0604020202020204" pitchFamily="34" charset="0"/>
-                <a:cs typeface="Arial" panose="020B0604020202020204" pitchFamily="34" charset="0"/>
-              </a:rPr>
-              <a:t>breakpoint)</a:t>
-            </a:r>
-            <a:endParaRPr sz="3600" dirty="0">
-              <a:latin typeface="Arial" panose="020B0604020202020204" pitchFamily="34" charset="0"/>
-              <a:cs typeface="Arial" panose="020B0604020202020204" pitchFamily="34" charset="0"/>
-            </a:endParaRPr>
-          </a:p>
-          <a:p>
-            <a:pPr marL="822960" lvl="1" indent="-350520">
-              <a:lnSpc>
-                <a:spcPct val="100000"/>
-              </a:lnSpc>
-              <a:spcBef>
-                <a:spcPts val="1889"/>
-              </a:spcBef>
-              <a:buChar char="•"/>
-              <a:tabLst>
-                <a:tab pos="822960" algn="l"/>
-                <a:tab pos="823594" algn="l"/>
-              </a:tabLst>
-            </a:pPr>
-            <a:r>
-              <a:rPr sz="3600" b="1" spc="160" dirty="0">
-                <a:latin typeface="Arial" panose="020B0604020202020204" pitchFamily="34" charset="0"/>
-                <a:cs typeface="Arial" panose="020B0604020202020204" pitchFamily="34" charset="0"/>
-              </a:rPr>
-              <a:t>quit</a:t>
-            </a:r>
-            <a:r>
-              <a:rPr sz="3600" spc="-20" dirty="0">
-                <a:latin typeface="Arial" panose="020B0604020202020204" pitchFamily="34" charset="0"/>
-                <a:cs typeface="Arial" panose="020B0604020202020204" pitchFamily="34" charset="0"/>
-              </a:rPr>
-              <a:t> </a:t>
-            </a:r>
-            <a:r>
-              <a:rPr sz="3600" spc="5" dirty="0">
-                <a:latin typeface="Arial" panose="020B0604020202020204" pitchFamily="34" charset="0"/>
-                <a:cs typeface="Arial" panose="020B0604020202020204" pitchFamily="34" charset="0"/>
-              </a:rPr>
-              <a:t>-</a:t>
-            </a:r>
-            <a:r>
-              <a:rPr sz="3600" spc="-20" dirty="0">
-                <a:latin typeface="Arial" panose="020B0604020202020204" pitchFamily="34" charset="0"/>
-                <a:cs typeface="Arial" panose="020B0604020202020204" pitchFamily="34" charset="0"/>
-              </a:rPr>
-              <a:t> </a:t>
-            </a:r>
-            <a:r>
-              <a:rPr sz="3600" spc="-35" dirty="0">
-                <a:latin typeface="Arial" panose="020B0604020202020204" pitchFamily="34" charset="0"/>
-                <a:cs typeface="Arial" panose="020B0604020202020204" pitchFamily="34" charset="0"/>
-              </a:rPr>
-              <a:t>выйти</a:t>
-            </a:r>
-            <a:endParaRPr sz="3600" dirty="0">
-              <a:latin typeface="Arial" panose="020B0604020202020204" pitchFamily="34" charset="0"/>
-              <a:cs typeface="Arial" panose="020B0604020202020204" pitchFamily="34" charset="0"/>
-            </a:endParaRPr>
-          </a:p>
-          <a:p>
-            <a:pPr marL="362585" indent="-350520">
-              <a:lnSpc>
-                <a:spcPct val="100000"/>
-              </a:lnSpc>
-              <a:spcBef>
-                <a:spcPts val="1880"/>
-              </a:spcBef>
-              <a:buChar char="•"/>
-              <a:tabLst>
-                <a:tab pos="362585" algn="l"/>
-                <a:tab pos="363220" algn="l"/>
-              </a:tabLst>
-            </a:pPr>
-            <a:r>
-              <a:rPr sz="3600" spc="60" dirty="0">
-                <a:latin typeface="Arial" panose="020B0604020202020204" pitchFamily="34" charset="0"/>
-                <a:cs typeface="Arial" panose="020B0604020202020204" pitchFamily="34" charset="0"/>
-              </a:rPr>
-              <a:t>Layout:</a:t>
-            </a:r>
-            <a:endParaRPr sz="3600" dirty="0">
-              <a:latin typeface="Arial" panose="020B0604020202020204" pitchFamily="34" charset="0"/>
-              <a:cs typeface="Arial" panose="020B0604020202020204" pitchFamily="34" charset="0"/>
-            </a:endParaRPr>
-          </a:p>
-          <a:p>
-            <a:pPr marL="822960" lvl="1" indent="-350520">
-              <a:lnSpc>
-                <a:spcPct val="100000"/>
-              </a:lnSpc>
-              <a:spcBef>
-                <a:spcPts val="1875"/>
-              </a:spcBef>
-              <a:buChar char="•"/>
-              <a:tabLst>
-                <a:tab pos="822960" algn="l"/>
-                <a:tab pos="823594" algn="l"/>
-              </a:tabLst>
-            </a:pPr>
-            <a:r>
-              <a:rPr sz="3600" b="1" spc="85" dirty="0">
-                <a:latin typeface="Arial" panose="020B0604020202020204" pitchFamily="34" charset="0"/>
-                <a:cs typeface="Arial" panose="020B0604020202020204" pitchFamily="34" charset="0"/>
-              </a:rPr>
-              <a:t>layout</a:t>
-            </a:r>
-            <a:r>
-              <a:rPr sz="3600" b="1" spc="10" dirty="0">
-                <a:latin typeface="Arial" panose="020B0604020202020204" pitchFamily="34" charset="0"/>
-                <a:cs typeface="Arial" panose="020B0604020202020204" pitchFamily="34" charset="0"/>
-              </a:rPr>
-              <a:t> </a:t>
-            </a:r>
-            <a:r>
-              <a:rPr sz="3600" b="1" spc="95" dirty="0">
-                <a:latin typeface="Arial" panose="020B0604020202020204" pitchFamily="34" charset="0"/>
-                <a:cs typeface="Arial" panose="020B0604020202020204" pitchFamily="34" charset="0"/>
-              </a:rPr>
-              <a:t>next(n)/prev(p)/src/asm/split/regs</a:t>
-            </a:r>
-            <a:r>
-              <a:rPr sz="3600" b="1" spc="15" dirty="0">
-                <a:latin typeface="Arial" panose="020B0604020202020204" pitchFamily="34" charset="0"/>
-                <a:cs typeface="Arial" panose="020B0604020202020204" pitchFamily="34" charset="0"/>
-              </a:rPr>
-              <a:t> </a:t>
-            </a:r>
-            <a:r>
-              <a:rPr sz="3600" spc="5" dirty="0">
-                <a:latin typeface="Arial" panose="020B0604020202020204" pitchFamily="34" charset="0"/>
-                <a:cs typeface="Arial" panose="020B0604020202020204" pitchFamily="34" charset="0"/>
-              </a:rPr>
-              <a:t>-</a:t>
-            </a:r>
-            <a:r>
-              <a:rPr sz="3600" spc="15" dirty="0">
-                <a:latin typeface="Arial" panose="020B0604020202020204" pitchFamily="34" charset="0"/>
-                <a:cs typeface="Arial" panose="020B0604020202020204" pitchFamily="34" charset="0"/>
-              </a:rPr>
-              <a:t> </a:t>
-            </a:r>
-            <a:r>
-              <a:rPr sz="3600" spc="-75" dirty="0">
-                <a:latin typeface="Arial" panose="020B0604020202020204" pitchFamily="34" charset="0"/>
-                <a:cs typeface="Arial" panose="020B0604020202020204" pitchFamily="34" charset="0"/>
-              </a:rPr>
-              <a:t>изменить</a:t>
-            </a:r>
-            <a:r>
-              <a:rPr sz="3600" spc="-140" dirty="0">
-                <a:latin typeface="Arial" panose="020B0604020202020204" pitchFamily="34" charset="0"/>
-                <a:cs typeface="Arial" panose="020B0604020202020204" pitchFamily="34" charset="0"/>
-              </a:rPr>
-              <a:t> </a:t>
-            </a:r>
-            <a:r>
-              <a:rPr sz="3600" spc="85" dirty="0">
-                <a:latin typeface="Arial" panose="020B0604020202020204" pitchFamily="34" charset="0"/>
-                <a:cs typeface="Arial" panose="020B0604020202020204" pitchFamily="34" charset="0"/>
-              </a:rPr>
-              <a:t>layout</a:t>
-            </a:r>
-            <a:endParaRPr sz="3600" dirty="0">
-              <a:latin typeface="Arial" panose="020B0604020202020204" pitchFamily="34" charset="0"/>
-              <a:cs typeface="Arial" panose="020B0604020202020204" pitchFamily="34" charset="0"/>
-            </a:endParaRPr>
-          </a:p>
-          <a:p>
-            <a:pPr marL="822960" lvl="1" indent="-350520">
-              <a:lnSpc>
-                <a:spcPct val="100000"/>
-              </a:lnSpc>
-              <a:spcBef>
-                <a:spcPts val="1889"/>
-              </a:spcBef>
-              <a:buChar char="•"/>
-              <a:tabLst>
-                <a:tab pos="822960" algn="l"/>
-                <a:tab pos="823594" algn="l"/>
-              </a:tabLst>
-            </a:pPr>
-            <a:r>
-              <a:rPr sz="3600" b="1" spc="110" dirty="0">
-                <a:latin typeface="Arial" panose="020B0604020202020204" pitchFamily="34" charset="0"/>
-                <a:cs typeface="Arial" panose="020B0604020202020204" pitchFamily="34" charset="0"/>
-              </a:rPr>
-              <a:t>focus</a:t>
-            </a:r>
-            <a:r>
-              <a:rPr sz="3600" b="1" spc="5" dirty="0">
-                <a:latin typeface="Arial" panose="020B0604020202020204" pitchFamily="34" charset="0"/>
-                <a:cs typeface="Arial" panose="020B0604020202020204" pitchFamily="34" charset="0"/>
-              </a:rPr>
-              <a:t> </a:t>
-            </a:r>
-            <a:r>
-              <a:rPr sz="3600" b="1" spc="95" dirty="0">
-                <a:latin typeface="Arial" panose="020B0604020202020204" pitchFamily="34" charset="0"/>
-                <a:cs typeface="Arial" panose="020B0604020202020204" pitchFamily="34" charset="0"/>
-              </a:rPr>
-              <a:t>next(n)/prev(p)/src/asm/split/regs</a:t>
-            </a:r>
-            <a:r>
-              <a:rPr sz="3600" b="1" spc="10" dirty="0">
-                <a:latin typeface="Arial" panose="020B0604020202020204" pitchFamily="34" charset="0"/>
-                <a:cs typeface="Arial" panose="020B0604020202020204" pitchFamily="34" charset="0"/>
-              </a:rPr>
-              <a:t> </a:t>
-            </a:r>
-            <a:r>
-              <a:rPr sz="3600" spc="5" dirty="0">
-                <a:latin typeface="Arial" panose="020B0604020202020204" pitchFamily="34" charset="0"/>
-                <a:cs typeface="Arial" panose="020B0604020202020204" pitchFamily="34" charset="0"/>
-              </a:rPr>
-              <a:t>- </a:t>
-            </a:r>
-            <a:r>
-              <a:rPr sz="3600" spc="-75" dirty="0">
-                <a:latin typeface="Arial" panose="020B0604020202020204" pitchFamily="34" charset="0"/>
-                <a:cs typeface="Arial" panose="020B0604020202020204" pitchFamily="34" charset="0"/>
-              </a:rPr>
-              <a:t>изменить</a:t>
-            </a:r>
-            <a:r>
-              <a:rPr sz="3600" spc="-145" dirty="0">
-                <a:latin typeface="Arial" panose="020B0604020202020204" pitchFamily="34" charset="0"/>
-                <a:cs typeface="Arial" panose="020B0604020202020204" pitchFamily="34" charset="0"/>
-              </a:rPr>
-              <a:t> </a:t>
-            </a:r>
-            <a:r>
-              <a:rPr sz="3600" spc="-35" dirty="0">
-                <a:latin typeface="Arial" panose="020B0604020202020204" pitchFamily="34" charset="0"/>
-                <a:cs typeface="Arial" panose="020B0604020202020204" pitchFamily="34" charset="0"/>
-              </a:rPr>
-              <a:t>фокус</a:t>
-            </a:r>
-            <a:endParaRPr sz="3600" dirty="0">
-              <a:latin typeface="Arial" panose="020B0604020202020204" pitchFamily="34" charset="0"/>
-              <a:cs typeface="Arial" panose="020B0604020202020204" pitchFamily="34" charset="0"/>
-            </a:endParaRPr>
-          </a:p>
-        </p:txBody>
-      </p:sp>
-    </p:spTree>
-  </p:cSld>
-  <p:clrMapOvr>
-    <a:masterClrMapping/>
-  </p:clrMapOvr>
-</p:sld>
-</file>
-
-<file path=ppt/slides/slide4.xml><?xml version="1.0" encoding="utf-8"?>
-<p:sld xmlns:a="http://schemas.openxmlformats.org/drawingml/2006/main" xmlns:r="http://schemas.openxmlformats.org/officeDocument/2006/relationships" xmlns:p="http://schemas.openxmlformats.org/presentationml/2006/main" showMasterSp="0">
-  <p:cSld>
-    <p:spTree>
-      <p:nvGrpSpPr>
-        <p:cNvPr id="1" name=""/>
-        <p:cNvGrpSpPr/>
-        <p:nvPr/>
-      </p:nvGrpSpPr>
-      <p:grpSpPr>
-        <a:xfrm>
-          <a:off x="0" y="0"/>
-          <a:ext cx="0" cy="0"/>
-          <a:chOff x="0" y="0"/>
-          <a:chExt cx="0" cy="0"/>
-        </a:xfrm>
-      </p:grpSpPr>
-      <p:sp>
-        <p:nvSpPr>
-          <p:cNvPr id="2" name="object 2"/>
-          <p:cNvSpPr txBox="1">
-            <a:spLocks noGrp="1"/>
-          </p:cNvSpPr>
-          <p:nvPr>
-            <p:ph type="title"/>
-          </p:nvPr>
-        </p:nvSpPr>
-        <p:spPr>
-          <a:xfrm>
-            <a:off x="9113618" y="832090"/>
-            <a:ext cx="1864360" cy="1081405"/>
-          </a:xfrm>
-          <a:prstGeom prst="rect">
-            <a:avLst/>
-          </a:prstGeom>
-        </p:spPr>
-        <p:txBody>
-          <a:bodyPr vert="horz" wrap="square" lIns="0" tIns="15875" rIns="0" bIns="0" rtlCol="0">
-            <a:spAutoFit/>
-          </a:bodyPr>
-          <a:lstStyle/>
-          <a:p>
-            <a:pPr marL="12700">
-              <a:lnSpc>
-                <a:spcPct val="100000"/>
-              </a:lnSpc>
-              <a:spcBef>
-                <a:spcPts val="125"/>
-              </a:spcBef>
-            </a:pPr>
-            <a:r>
-              <a:rPr spc="-325" dirty="0"/>
-              <a:t>GDB</a:t>
-            </a:r>
-          </a:p>
-        </p:txBody>
-      </p:sp>
-      <p:sp>
-        <p:nvSpPr>
-          <p:cNvPr id="3" name="object 3"/>
-          <p:cNvSpPr txBox="1"/>
-          <p:nvPr/>
-        </p:nvSpPr>
-        <p:spPr>
-          <a:xfrm>
             <a:off x="1076272" y="3278514"/>
             <a:ext cx="12685395" cy="6595395"/>
           </a:xfrm>
@@ -7065,7 +8166,7 @@
 </p:sld>
 </file>
 
-<file path=ppt/slides/slide5.xml><?xml version="1.0" encoding="utf-8"?>
+<file path=ppt/slides/slide6.xml><?xml version="1.0" encoding="utf-8"?>
 <p:sld xmlns:a="http://schemas.openxmlformats.org/drawingml/2006/main" xmlns:r="http://schemas.openxmlformats.org/officeDocument/2006/relationships" xmlns:p="http://schemas.openxmlformats.org/presentationml/2006/main">
   <p:cSld>
     <p:spTree>
@@ -7135,7 +8236,7 @@
         <p:spPr>
           <a:xfrm>
             <a:off x="1076272" y="3513916"/>
-            <a:ext cx="17951555" cy="3693319"/>
+            <a:ext cx="17951555" cy="2954655"/>
           </a:xfrm>
         </p:spPr>
         <p:txBody>
@@ -7212,8 +8313,32 @@
                 </a:solidFill>
                 <a:latin typeface="AAAAAB+ArialMT"/>
               </a:rPr>
-              <a:t>– set a breakpoint </a:t>
-            </a:r>
+              <a:t>– </a:t>
+            </a:r>
+            <a:r>
+              <a:rPr lang="ru-RU" sz="4800" dirty="0">
+                <a:solidFill>
+                  <a:srgbClr val="000000"/>
+                </a:solidFill>
+                <a:latin typeface="AAAAAB+ArialMT"/>
+              </a:rPr>
+              <a:t>установить </a:t>
+            </a:r>
+            <a:r>
+              <a:rPr lang="en-US" sz="4800" dirty="0">
+                <a:solidFill>
+                  <a:srgbClr val="000000"/>
+                </a:solidFill>
+                <a:latin typeface="AAAAAB+ArialMT"/>
+              </a:rPr>
+              <a:t>breakpoint</a:t>
+            </a:r>
+            <a:endParaRPr lang="en-US" sz="4800" b="0" i="0" u="none" strike="noStrike" baseline="0" dirty="0">
+              <a:solidFill>
+                <a:srgbClr val="000000"/>
+              </a:solidFill>
+              <a:latin typeface="AAAAAB+ArialMT"/>
+            </a:endParaRPr>
           </a:p>
           <a:p>
             <a:r>
@@ -7241,10 +8366,17 @@
                 </a:solidFill>
                 <a:latin typeface="AAAAAB+ArialMT"/>
               </a:rPr>
-              <a:t>– get the list of breakpoints </a:t>
-            </a:r>
-          </a:p>
-          <a:p>
+              <a:t>– </a:t>
+            </a:r>
+            <a:r>
+              <a:rPr lang="ru-RU" sz="4800" b="0" i="0" u="none" strike="noStrike" baseline="0" dirty="0">
+                <a:solidFill>
+                  <a:srgbClr val="000000"/>
+                </a:solidFill>
+                <a:latin typeface="AAAAAB+ArialMT"/>
+              </a:rPr>
+              <a:t>получить список </a:t>
+            </a:r>
             <a:r>
               <a:rPr lang="en-US" sz="4800" b="0" i="0" u="none" strike="noStrike" baseline="0" dirty="0">
                 <a:solidFill>
@@ -7252,6 +8384,17 @@
                 </a:solidFill>
                 <a:latin typeface="AAAAAB+ArialMT"/>
               </a:rPr>
+              <a:t>breakpoints</a:t>
+            </a:r>
+          </a:p>
+          <a:p>
+            <a:r>
+              <a:rPr lang="en-US" sz="4800" b="0" i="0" u="none" strike="noStrike" baseline="0" dirty="0">
+                <a:solidFill>
+                  <a:srgbClr val="000000"/>
+                </a:solidFill>
+                <a:latin typeface="AAAAAB+ArialMT"/>
+              </a:rPr>
               <a:t>• </a:t>
             </a:r>
             <a:r>
@@ -7288,10 +8431,17 @@
                 </a:solidFill>
                 <a:latin typeface="AAAAAB+ArialMT"/>
               </a:rPr>
-              <a:t>– delete a breakpoint </a:t>
-            </a:r>
-          </a:p>
-          <a:p>
+              <a:t>–</a:t>
+            </a:r>
+            <a:r>
+              <a:rPr lang="ru-RU" sz="4800" b="0" i="0" u="none" strike="noStrike" baseline="0" dirty="0">
+                <a:solidFill>
+                  <a:srgbClr val="000000"/>
+                </a:solidFill>
+                <a:latin typeface="AAAAAB+ArialMT"/>
+              </a:rPr>
+              <a:t> удалить </a:t>
+            </a:r>
             <a:r>
               <a:rPr lang="en-US" sz="4800" b="0" i="0" u="none" strike="noStrike" baseline="0" dirty="0">
                 <a:solidFill>
@@ -7299,6 +8449,23 @@
                 </a:solidFill>
                 <a:latin typeface="AAAAAB+ArialMT"/>
               </a:rPr>
+              <a:t>breakpoint </a:t>
+            </a:r>
+            <a:endParaRPr lang="en-US" sz="4800" dirty="0">
+              <a:solidFill>
+                <a:srgbClr val="000000"/>
+              </a:solidFill>
+              <a:latin typeface="AAAAAB+ArialMT"/>
+            </a:endParaRPr>
+          </a:p>
+          <a:p>
+            <a:r>
+              <a:rPr lang="en-US" sz="4800" b="0" i="0" u="none" strike="noStrike" baseline="0" dirty="0">
+                <a:solidFill>
+                  <a:srgbClr val="000000"/>
+                </a:solidFill>
+                <a:latin typeface="AAAAAB+ArialMT"/>
+              </a:rPr>
               <a:t>• </a:t>
             </a:r>
             <a:r>
@@ -7308,7 +8475,7 @@
                 </a:solidFill>
                 <a:latin typeface="AAAAAD+Arial-BoldMT"/>
               </a:rPr>
-              <a:t>clear </a:t>
+              <a:t>enable </a:t>
             </a:r>
             <a:r>
               <a:rPr lang="en-US" sz="4800" b="0" i="0" u="none" strike="noStrike" baseline="0" dirty="0">
@@ -7317,10 +8484,44 @@
                 </a:solidFill>
                 <a:latin typeface="AAAAAB+ArialMT"/>
               </a:rPr>
-              <a:t>– delete all breakpoints </a:t>
-            </a:r>
-          </a:p>
-          <a:p>
+              <a:t>/ </a:t>
+            </a:r>
+            <a:r>
+              <a:rPr lang="en-US" sz="4800" b="1" i="0" u="none" strike="noStrike" baseline="0" dirty="0">
+                <a:solidFill>
+                  <a:srgbClr val="000000"/>
+                </a:solidFill>
+                <a:latin typeface="AAAAAD+Arial-BoldMT"/>
+              </a:rPr>
+              <a:t>disable </a:t>
+            </a:r>
+            <a:r>
+              <a:rPr lang="en-US" sz="4800" b="1" i="0" u="none" strike="noStrike" baseline="0" dirty="0">
+                <a:solidFill>
+                  <a:srgbClr val="000000"/>
+                </a:solidFill>
+                <a:latin typeface="AAAAAB+ArialMT"/>
+              </a:rPr>
+              <a:t>*</a:t>
+            </a:r>
+            <a:r>
+              <a:rPr lang="en-US" sz="4800" b="1" i="0" u="none" strike="noStrike" baseline="0" dirty="0" err="1">
+                <a:solidFill>
+                  <a:srgbClr val="000000"/>
+                </a:solidFill>
+                <a:latin typeface="AAAAAB+ArialMT"/>
+              </a:rPr>
+              <a:t>break_num</a:t>
+            </a:r>
+            <a:r>
+              <a:rPr lang="en-US" sz="4800" b="1" i="0" u="none" strike="noStrike" baseline="0" dirty="0">
+                <a:solidFill>
+                  <a:srgbClr val="000000"/>
+                </a:solidFill>
+                <a:latin typeface="AAAAAB+ArialMT"/>
+              </a:rPr>
+              <a:t>* </a:t>
+            </a:r>
             <a:r>
               <a:rPr lang="en-US" sz="4800" b="0" i="0" u="none" strike="noStrike" baseline="0" dirty="0">
                 <a:solidFill>
@@ -7328,16 +8529,16 @@
                 </a:solidFill>
                 <a:latin typeface="AAAAAB+ArialMT"/>
               </a:rPr>
-              <a:t>• </a:t>
-            </a:r>
-            <a:r>
-              <a:rPr lang="en-US" sz="4800" b="1" i="0" u="none" strike="noStrike" baseline="0" dirty="0">
+              <a:t>– </a:t>
+            </a:r>
+            <a:r>
+              <a:rPr lang="ru-RU" sz="4800" b="0" i="0" u="none" strike="noStrike" baseline="0" dirty="0">
                 <a:solidFill>
                   <a:srgbClr val="000000"/>
                 </a:solidFill>
-                <a:latin typeface="AAAAAD+Arial-BoldMT"/>
-              </a:rPr>
-              <a:t>enable </a:t>
+                <a:latin typeface="AAAAAB+ArialMT"/>
+              </a:rPr>
+              <a:t>включить </a:t>
             </a:r>
             <a:r>
               <a:rPr lang="en-US" sz="4800" b="0" i="0" u="none" strike="noStrike" baseline="0" dirty="0">
@@ -7349,13 +8550,13 @@
               <a:t>/ </a:t>
             </a:r>
             <a:r>
-              <a:rPr lang="en-US" sz="4800" b="1" i="0" u="none" strike="noStrike" baseline="0" dirty="0">
+              <a:rPr lang="ru-RU" sz="4800" b="0" i="0" u="none" strike="noStrike" baseline="0" dirty="0">
                 <a:solidFill>
                   <a:srgbClr val="000000"/>
                 </a:solidFill>
-                <a:latin typeface="AAAAAD+Arial-BoldMT"/>
-              </a:rPr>
-              <a:t>disable </a:t>
+                <a:latin typeface="AAAAAB+ArialMT"/>
+              </a:rPr>
+              <a:t>отключить </a:t>
             </a:r>
             <a:r>
               <a:rPr lang="en-US" sz="4800" b="0" i="0" u="none" strike="noStrike" baseline="0" dirty="0">
@@ -7364,27 +8565,8 @@
                 </a:solidFill>
                 <a:latin typeface="AAAAAB+ArialMT"/>
               </a:rPr>
-              <a:t>*</a:t>
-            </a:r>
-            <a:r>
-              <a:rPr lang="en-US" sz="4800" b="0" i="0" u="none" strike="noStrike" baseline="0" dirty="0" err="1">
-                <a:solidFill>
-                  <a:srgbClr val="000000"/>
-                </a:solidFill>
-                <a:latin typeface="AAAAAB+ArialMT"/>
-              </a:rPr>
-              <a:t>break_num</a:t>
-            </a:r>
-            <a:r>
-              <a:rPr lang="en-US" sz="4800" b="0" i="0" u="none" strike="noStrike" baseline="0" dirty="0">
-                <a:solidFill>
-                  <a:srgbClr val="000000"/>
-                </a:solidFill>
-                <a:latin typeface="AAAAAB+ArialMT"/>
-              </a:rPr>
-              <a:t>* – obvious</a:t>
-            </a:r>
-            <a:endParaRPr lang="ru-RU" sz="4800" dirty="0"/>
+              <a:t>breakpoint</a:t>
+            </a:r>
           </a:p>
         </p:txBody>
       </p:sp>
@@ -7401,7 +8583,7 @@
 </p:sld>
 </file>
 
-<file path=ppt/slides/slide6.xml><?xml version="1.0" encoding="utf-8"?>
+<file path=ppt/slides/slide7.xml><?xml version="1.0" encoding="utf-8"?>
 <p:sld xmlns:a="http://schemas.openxmlformats.org/drawingml/2006/main" xmlns:r="http://schemas.openxmlformats.org/officeDocument/2006/relationships" xmlns:p="http://schemas.openxmlformats.org/presentationml/2006/main">
   <p:cSld>
     <p:spTree>
@@ -7436,7 +8618,7 @@
         </p:nvSpPr>
         <p:spPr>
           <a:xfrm>
-            <a:off x="8130558" y="679690"/>
+            <a:off x="7338703" y="625475"/>
             <a:ext cx="5426692" cy="2123658"/>
           </a:xfrm>
         </p:spPr>
@@ -7472,191 +8654,374 @@
         <p:spPr>
           <a:xfrm>
             <a:off x="1076272" y="3513916"/>
-            <a:ext cx="17951555" cy="2215991"/>
+            <a:ext cx="17951555" cy="5909310"/>
           </a:xfrm>
         </p:spPr>
         <p:txBody>
           <a:bodyPr/>
           <a:lstStyle/>
           <a:p>
-            <a:pPr marL="285750" indent="-285750">
+            <a:pPr marL="685800" indent="-685800">
               <a:buFont typeface="Arial" panose="020B0604020202020204" pitchFamily="34" charset="0"/>
               <a:buChar char="•"/>
             </a:pPr>
             <a:r>
+              <a:rPr lang="en-US" sz="4800" b="1" i="0" u="none" strike="noStrike" baseline="0" dirty="0" err="1">
+                <a:solidFill>
+                  <a:srgbClr val="000000"/>
+                </a:solidFill>
+                <a:latin typeface="Arial" panose="020B0604020202020204" pitchFamily="34" charset="0"/>
+                <a:cs typeface="Arial" panose="020B0604020202020204" pitchFamily="34" charset="0"/>
+              </a:rPr>
+              <a:t>backtrace</a:t>
+            </a:r>
+            <a:r>
+              <a:rPr lang="en-US" sz="4800" b="1" i="0" u="none" strike="noStrike" baseline="0" dirty="0">
+                <a:solidFill>
+                  <a:srgbClr val="000000"/>
+                </a:solidFill>
+                <a:latin typeface="Arial" panose="020B0604020202020204" pitchFamily="34" charset="0"/>
+                <a:cs typeface="Arial" panose="020B0604020202020204" pitchFamily="34" charset="0"/>
+              </a:rPr>
+              <a:t> </a:t>
+            </a:r>
+            <a:r>
               <a:rPr lang="en-US" sz="4800" b="0" i="0" u="none" strike="noStrike" baseline="0" dirty="0">
                 <a:solidFill>
                   <a:srgbClr val="000000"/>
                 </a:solidFill>
+                <a:latin typeface="Arial" panose="020B0604020202020204" pitchFamily="34" charset="0"/>
+                <a:cs typeface="Arial" panose="020B0604020202020204" pitchFamily="34" charset="0"/>
+              </a:rPr>
+              <a:t>(</a:t>
+            </a:r>
+            <a:r>
+              <a:rPr lang="en-US" sz="4800" b="1" i="0" u="none" strike="noStrike" baseline="0" dirty="0" err="1">
+                <a:solidFill>
+                  <a:srgbClr val="000000"/>
+                </a:solidFill>
+                <a:latin typeface="Arial" panose="020B0604020202020204" pitchFamily="34" charset="0"/>
+                <a:cs typeface="Arial" panose="020B0604020202020204" pitchFamily="34" charset="0"/>
+              </a:rPr>
+              <a:t>bt</a:t>
+            </a:r>
+            <a:r>
+              <a:rPr lang="en-US" sz="4800" b="0" i="0" u="none" strike="noStrike" baseline="0" dirty="0">
+                <a:solidFill>
+                  <a:srgbClr val="000000"/>
+                </a:solidFill>
+                <a:latin typeface="Arial" panose="020B0604020202020204" pitchFamily="34" charset="0"/>
+                <a:cs typeface="Arial" panose="020B0604020202020204" pitchFamily="34" charset="0"/>
+              </a:rPr>
+              <a:t>) –</a:t>
+            </a:r>
+            <a:r>
+              <a:rPr lang="ru-RU" sz="4800" b="0" i="0" u="none" strike="noStrike" baseline="0" dirty="0">
+                <a:solidFill>
+                  <a:srgbClr val="000000"/>
+                </a:solidFill>
+                <a:latin typeface="Arial" panose="020B0604020202020204" pitchFamily="34" charset="0"/>
+                <a:cs typeface="Arial" panose="020B0604020202020204" pitchFamily="34" charset="0"/>
+              </a:rPr>
+              <a:t>распечатать </a:t>
+            </a:r>
+            <a:r>
+              <a:rPr lang="en-US" sz="4800" b="0" i="0" u="none" strike="noStrike" baseline="0" dirty="0" err="1">
+                <a:solidFill>
+                  <a:srgbClr val="000000"/>
+                </a:solidFill>
+                <a:latin typeface="Arial" panose="020B0604020202020204" pitchFamily="34" charset="0"/>
+                <a:cs typeface="Arial" panose="020B0604020202020204" pitchFamily="34" charset="0"/>
+              </a:rPr>
+              <a:t>backtrace</a:t>
+            </a:r>
+            <a:r>
+              <a:rPr lang="en-US" sz="4800" b="0" i="0" u="none" strike="noStrike" baseline="0" dirty="0">
+                <a:solidFill>
+                  <a:srgbClr val="000000"/>
+                </a:solidFill>
+                <a:latin typeface="Arial" panose="020B0604020202020204" pitchFamily="34" charset="0"/>
+                <a:cs typeface="Arial" panose="020B0604020202020204" pitchFamily="34" charset="0"/>
+              </a:rPr>
+              <a:t> </a:t>
+            </a:r>
+            <a:endParaRPr lang="en-US" sz="4800" dirty="0">
+              <a:solidFill>
+                <a:srgbClr val="000000"/>
+              </a:solidFill>
+              <a:latin typeface="Arial" panose="020B0604020202020204" pitchFamily="34" charset="0"/>
+              <a:cs typeface="Arial" panose="020B0604020202020204" pitchFamily="34" charset="0"/>
+            </a:endParaRPr>
+          </a:p>
+          <a:p>
+            <a:pPr marL="685800" indent="-685800">
+              <a:buFont typeface="Arial" panose="020B0604020202020204" pitchFamily="34" charset="0"/>
+              <a:buChar char="•"/>
+            </a:pPr>
+            <a:r>
+              <a:rPr lang="en-US" sz="4800" b="1" i="0" u="none" strike="noStrike" baseline="0" dirty="0" err="1">
+                <a:solidFill>
+                  <a:srgbClr val="000000"/>
+                </a:solidFill>
+                <a:latin typeface="Arial" panose="020B0604020202020204" pitchFamily="34" charset="0"/>
+                <a:cs typeface="Arial" panose="020B0604020202020204" pitchFamily="34" charset="0"/>
+              </a:rPr>
+              <a:t>backtrace</a:t>
+            </a:r>
+            <a:r>
+              <a:rPr lang="en-US" sz="4800" b="1" i="0" u="none" strike="noStrike" baseline="0" dirty="0">
+                <a:solidFill>
+                  <a:srgbClr val="000000"/>
+                </a:solidFill>
+                <a:latin typeface="Arial" panose="020B0604020202020204" pitchFamily="34" charset="0"/>
+                <a:cs typeface="Arial" panose="020B0604020202020204" pitchFamily="34" charset="0"/>
+              </a:rPr>
+              <a:t> full </a:t>
+            </a:r>
+            <a:r>
+              <a:rPr lang="en-US" sz="4800" b="0" i="0" u="none" strike="noStrike" baseline="0" dirty="0">
+                <a:solidFill>
+                  <a:srgbClr val="000000"/>
+                </a:solidFill>
+                <a:latin typeface="Arial" panose="020B0604020202020204" pitchFamily="34" charset="0"/>
+                <a:cs typeface="Arial" panose="020B0604020202020204" pitchFamily="34" charset="0"/>
+              </a:rPr>
+              <a:t>–</a:t>
+            </a:r>
+            <a:r>
+              <a:rPr lang="ru-RU" sz="4800" b="0" i="0" u="none" strike="noStrike" baseline="0" dirty="0">
+                <a:solidFill>
+                  <a:srgbClr val="000000"/>
+                </a:solidFill>
+                <a:latin typeface="Arial" panose="020B0604020202020204" pitchFamily="34" charset="0"/>
+                <a:cs typeface="Arial" panose="020B0604020202020204" pitchFamily="34" charset="0"/>
+              </a:rPr>
+              <a:t> распечатать </a:t>
+            </a:r>
+            <a:r>
+              <a:rPr lang="en-US" sz="4800" b="0" i="0" u="none" strike="noStrike" baseline="0" dirty="0" err="1">
+                <a:solidFill>
+                  <a:srgbClr val="000000"/>
+                </a:solidFill>
+                <a:latin typeface="Arial" panose="020B0604020202020204" pitchFamily="34" charset="0"/>
+                <a:cs typeface="Arial" panose="020B0604020202020204" pitchFamily="34" charset="0"/>
+              </a:rPr>
+              <a:t>backtrace</a:t>
+            </a:r>
+            <a:r>
+              <a:rPr lang="ru-RU" sz="4800" b="0" i="0" u="none" strike="noStrike" baseline="0" dirty="0">
+                <a:solidFill>
+                  <a:srgbClr val="000000"/>
+                </a:solidFill>
+                <a:latin typeface="Arial" panose="020B0604020202020204" pitchFamily="34" charset="0"/>
+                <a:cs typeface="Arial" panose="020B0604020202020204" pitchFamily="34" charset="0"/>
+              </a:rPr>
+              <a:t> и локальные переменные</a:t>
+            </a:r>
+            <a:endParaRPr lang="en-US" sz="4800" dirty="0">
+              <a:solidFill>
+                <a:srgbClr val="000000"/>
+              </a:solidFill>
+              <a:latin typeface="Arial" panose="020B0604020202020204" pitchFamily="34" charset="0"/>
+              <a:cs typeface="Arial" panose="020B0604020202020204" pitchFamily="34" charset="0"/>
+            </a:endParaRPr>
+          </a:p>
+          <a:p>
+            <a:pPr marL="685800" indent="-685800">
+              <a:buFont typeface="Arial" panose="020B0604020202020204" pitchFamily="34" charset="0"/>
+              <a:buChar char="•"/>
+            </a:pPr>
+            <a:r>
+              <a:rPr lang="en-US" sz="4800" b="1" i="0" u="none" strike="noStrike" baseline="0" dirty="0">
+                <a:solidFill>
+                  <a:srgbClr val="000000"/>
+                </a:solidFill>
+                <a:latin typeface="Arial" panose="020B0604020202020204" pitchFamily="34" charset="0"/>
+                <a:cs typeface="Arial" panose="020B0604020202020204" pitchFamily="34" charset="0"/>
+              </a:rPr>
+              <a:t>list *</a:t>
+            </a:r>
+            <a:r>
+              <a:rPr lang="en-US" sz="4800" b="1" i="0" u="none" strike="noStrike" baseline="0" dirty="0" err="1">
+                <a:solidFill>
+                  <a:srgbClr val="000000"/>
+                </a:solidFill>
+                <a:latin typeface="Arial" panose="020B0604020202020204" pitchFamily="34" charset="0"/>
+                <a:cs typeface="Arial" panose="020B0604020202020204" pitchFamily="34" charset="0"/>
+              </a:rPr>
+              <a:t>func_name</a:t>
+            </a:r>
+            <a:r>
+              <a:rPr lang="en-US" sz="4800" b="1" i="0" u="none" strike="noStrike" baseline="0" dirty="0">
+                <a:solidFill>
+                  <a:srgbClr val="000000"/>
+                </a:solidFill>
+                <a:latin typeface="Arial" panose="020B0604020202020204" pitchFamily="34" charset="0"/>
+                <a:cs typeface="Arial" panose="020B0604020202020204" pitchFamily="34" charset="0"/>
+              </a:rPr>
+              <a:t>*/*line range*/... </a:t>
+            </a:r>
+            <a:r>
+              <a:rPr lang="en-US" sz="4800" b="0" i="0" u="none" strike="noStrike" baseline="0" dirty="0">
+                <a:solidFill>
+                  <a:srgbClr val="000000"/>
+                </a:solidFill>
+                <a:latin typeface="Arial" panose="020B0604020202020204" pitchFamily="34" charset="0"/>
+                <a:cs typeface="Arial" panose="020B0604020202020204" pitchFamily="34" charset="0"/>
+              </a:rPr>
+              <a:t>– </a:t>
+            </a:r>
+            <a:r>
+              <a:rPr lang="ru-RU" sz="4800" b="0" i="0" u="none" strike="noStrike" baseline="0" dirty="0">
+                <a:solidFill>
+                  <a:srgbClr val="000000"/>
+                </a:solidFill>
+                <a:latin typeface="Arial" panose="020B0604020202020204" pitchFamily="34" charset="0"/>
+                <a:cs typeface="Arial" panose="020B0604020202020204" pitchFamily="34" charset="0"/>
+              </a:rPr>
+              <a:t>распечатать код</a:t>
+            </a:r>
+            <a:endParaRPr lang="en-US" sz="4800" b="0" i="0" u="none" strike="noStrike" baseline="0" dirty="0">
+              <a:solidFill>
+                <a:srgbClr val="000000"/>
+              </a:solidFill>
+              <a:latin typeface="Arial" panose="020B0604020202020204" pitchFamily="34" charset="0"/>
+              <a:cs typeface="Arial" panose="020B0604020202020204" pitchFamily="34" charset="0"/>
+            </a:endParaRPr>
+          </a:p>
+          <a:p>
+            <a:pPr marL="685800" indent="-685800">
+              <a:buFont typeface="Arial" panose="020B0604020202020204" pitchFamily="34" charset="0"/>
+              <a:buChar char="•"/>
+            </a:pPr>
+            <a:r>
+              <a:rPr lang="en-US" sz="4800" b="1" i="0" dirty="0">
+                <a:solidFill>
+                  <a:srgbClr val="1F2328"/>
+                </a:solidFill>
+                <a:effectLst/>
+                <a:latin typeface="Arial" panose="020B0604020202020204" pitchFamily="34" charset="0"/>
+                <a:cs typeface="Arial" panose="020B0604020202020204" pitchFamily="34" charset="0"/>
+              </a:rPr>
+              <a:t>info </a:t>
+            </a:r>
+            <a:r>
+              <a:rPr lang="en-US" sz="4800" b="1" i="0" dirty="0" err="1">
+                <a:solidFill>
+                  <a:srgbClr val="1F2328"/>
+                </a:solidFill>
+                <a:effectLst/>
+                <a:latin typeface="Arial" panose="020B0604020202020204" pitchFamily="34" charset="0"/>
+                <a:cs typeface="Arial" panose="020B0604020202020204" pitchFamily="34" charset="0"/>
+              </a:rPr>
+              <a:t>args</a:t>
+            </a:r>
+            <a:r>
+              <a:rPr lang="en-US" sz="4800" b="1" i="0" dirty="0">
+                <a:solidFill>
+                  <a:srgbClr val="000000"/>
+                </a:solidFill>
+                <a:effectLst/>
+                <a:latin typeface="Arial" panose="020B0604020202020204" pitchFamily="34" charset="0"/>
+                <a:cs typeface="Arial" panose="020B0604020202020204" pitchFamily="34" charset="0"/>
+              </a:rPr>
+              <a:t> </a:t>
+            </a:r>
+            <a:r>
+              <a:rPr lang="en-US" sz="4800" b="0" i="0" dirty="0">
+                <a:solidFill>
+                  <a:srgbClr val="000000"/>
+                </a:solidFill>
+                <a:effectLst/>
+                <a:latin typeface="Arial" panose="020B0604020202020204" pitchFamily="34" charset="0"/>
+                <a:cs typeface="Arial" panose="020B0604020202020204" pitchFamily="34" charset="0"/>
+              </a:rPr>
+              <a:t>– </a:t>
+            </a:r>
+            <a:r>
+              <a:rPr lang="ru-RU" sz="4800" b="0" i="0" dirty="0">
+                <a:solidFill>
+                  <a:srgbClr val="000000"/>
+                </a:solidFill>
+                <a:effectLst/>
+                <a:latin typeface="Arial" panose="020B0604020202020204" pitchFamily="34" charset="0"/>
+                <a:cs typeface="Arial" panose="020B0604020202020204" pitchFamily="34" charset="0"/>
+              </a:rPr>
+              <a:t>распечатать аргументы функции</a:t>
+            </a:r>
+            <a:endParaRPr lang="en-US" sz="4800" b="0" i="0" dirty="0">
+              <a:solidFill>
+                <a:srgbClr val="000000"/>
+              </a:solidFill>
+              <a:effectLst/>
+              <a:latin typeface="Arial" panose="020B0604020202020204" pitchFamily="34" charset="0"/>
+              <a:cs typeface="Arial" panose="020B0604020202020204" pitchFamily="34" charset="0"/>
+            </a:endParaRPr>
+          </a:p>
+          <a:p>
+            <a:pPr marL="685800" indent="-685800">
+              <a:buFont typeface="Arial" panose="020B0604020202020204" pitchFamily="34" charset="0"/>
+              <a:buChar char="•"/>
+            </a:pPr>
+            <a:r>
+              <a:rPr lang="en-US" sz="4800" b="1" dirty="0">
+                <a:solidFill>
+                  <a:srgbClr val="000000"/>
+                </a:solidFill>
+                <a:latin typeface="Arial" panose="020B0604020202020204" pitchFamily="34" charset="0"/>
+                <a:cs typeface="Arial" panose="020B0604020202020204" pitchFamily="34" charset="0"/>
+              </a:rPr>
+              <a:t>i</a:t>
+            </a:r>
+            <a:r>
+              <a:rPr lang="en-US" sz="4800" b="1" u="none" strike="noStrike" baseline="0" dirty="0">
+                <a:solidFill>
+                  <a:srgbClr val="000000"/>
+                </a:solidFill>
+                <a:latin typeface="Arial" panose="020B0604020202020204" pitchFamily="34" charset="0"/>
+                <a:cs typeface="Arial" panose="020B0604020202020204" pitchFamily="34" charset="0"/>
+              </a:rPr>
+              <a:t>nfo locals </a:t>
+            </a:r>
+            <a:r>
+              <a:rPr lang="ru-RU" sz="4800" u="none" strike="noStrike" baseline="0" dirty="0">
+                <a:solidFill>
+                  <a:srgbClr val="000000"/>
+                </a:solidFill>
+                <a:latin typeface="Arial" panose="020B0604020202020204" pitchFamily="34" charset="0"/>
+                <a:cs typeface="Arial" panose="020B0604020202020204" pitchFamily="34" charset="0"/>
+              </a:rPr>
+              <a:t>– распечатать локальные переменные</a:t>
+            </a:r>
+            <a:endParaRPr lang="en-US" sz="4800" b="1" i="0" u="none" strike="noStrike" baseline="0" dirty="0">
+              <a:solidFill>
+                <a:srgbClr val="000000"/>
+              </a:solidFill>
+              <a:latin typeface="Arial" panose="020B0604020202020204" pitchFamily="34" charset="0"/>
+              <a:cs typeface="Arial" panose="020B0604020202020204" pitchFamily="34" charset="0"/>
+            </a:endParaRPr>
+          </a:p>
+          <a:p>
+            <a:pPr marL="685800" indent="-685800">
+              <a:buFont typeface="Arial" panose="020B0604020202020204" pitchFamily="34" charset="0"/>
+              <a:buChar char="•"/>
+            </a:pPr>
+            <a:endParaRPr lang="en-US" sz="4800" b="1" i="0" u="none" strike="noStrike" baseline="0" dirty="0">
+              <a:solidFill>
+                <a:srgbClr val="000000"/>
+              </a:solidFill>
+              <a:latin typeface="AAAAAB+ArialMT"/>
+            </a:endParaRPr>
+          </a:p>
+          <a:p>
+            <a:r>
+              <a:rPr lang="en-US" sz="4800" b="0" i="0" u="none" strike="noStrike" baseline="0" dirty="0">
+                <a:solidFill>
+                  <a:srgbClr val="000000"/>
+                </a:solidFill>
                 <a:latin typeface="AAAAAB+ArialMT"/>
               </a:rPr>
               <a:t> </a:t>
-            </a:r>
-            <a:r>
-              <a:rPr lang="en-US" sz="4800" b="1" i="0" u="none" strike="noStrike" baseline="0" dirty="0" err="1">
-                <a:solidFill>
-                  <a:srgbClr val="000000"/>
-                </a:solidFill>
-                <a:latin typeface="AAAAAD+Arial-BoldMT"/>
-              </a:rPr>
-              <a:t>backtrace</a:t>
-            </a:r>
-            <a:r>
-              <a:rPr lang="en-US" sz="4800" b="1" i="0" u="none" strike="noStrike" baseline="0" dirty="0">
-                <a:solidFill>
-                  <a:srgbClr val="000000"/>
-                </a:solidFill>
-                <a:latin typeface="AAAAAD+Arial-BoldMT"/>
-              </a:rPr>
-              <a:t> </a:t>
-            </a:r>
-            <a:r>
-              <a:rPr lang="en-US" sz="4800" b="0" i="0" u="none" strike="noStrike" baseline="0" dirty="0">
-                <a:solidFill>
-                  <a:srgbClr val="000000"/>
-                </a:solidFill>
-                <a:latin typeface="AAAAAB+ArialMT"/>
-              </a:rPr>
-              <a:t>(</a:t>
-            </a:r>
-            <a:r>
-              <a:rPr lang="en-US" sz="4800" b="1" i="0" u="none" strike="noStrike" baseline="0" dirty="0" err="1">
-                <a:solidFill>
-                  <a:srgbClr val="000000"/>
-                </a:solidFill>
-                <a:latin typeface="AAAAAD+Arial-BoldMT"/>
-              </a:rPr>
-              <a:t>bt</a:t>
-            </a:r>
-            <a:r>
-              <a:rPr lang="en-US" sz="4800" b="0" i="0" u="none" strike="noStrike" baseline="0" dirty="0">
-                <a:solidFill>
-                  <a:srgbClr val="000000"/>
-                </a:solidFill>
-                <a:latin typeface="AAAAAB+ArialMT"/>
-              </a:rPr>
-              <a:t>) – show </a:t>
-            </a:r>
-            <a:r>
-              <a:rPr lang="en-US" sz="4800" b="0" i="0" u="none" strike="noStrike" baseline="0" dirty="0" err="1">
-                <a:solidFill>
-                  <a:srgbClr val="000000"/>
-                </a:solidFill>
-                <a:latin typeface="AAAAAB+ArialMT"/>
-              </a:rPr>
-              <a:t>backtrace</a:t>
-            </a:r>
-            <a:r>
-              <a:rPr lang="en-US" sz="4800" b="0" i="0" u="none" strike="noStrike" baseline="0" dirty="0">
-                <a:solidFill>
-                  <a:srgbClr val="000000"/>
-                </a:solidFill>
-                <a:latin typeface="AAAAAB+ArialMT"/>
-              </a:rPr>
-              <a:t> </a:t>
-            </a:r>
-          </a:p>
-          <a:p>
-            <a:r>
-              <a:rPr lang="en-US" sz="4800" b="0" i="0" u="none" strike="noStrike" baseline="0" dirty="0">
-                <a:solidFill>
-                  <a:srgbClr val="000000"/>
-                </a:solidFill>
-                <a:latin typeface="AAAAAB+ArialMT"/>
-              </a:rPr>
-              <a:t>• </a:t>
-            </a:r>
-            <a:r>
-              <a:rPr lang="en-US" sz="4800" b="1" i="0" u="none" strike="noStrike" baseline="0" dirty="0" err="1">
-                <a:solidFill>
-                  <a:srgbClr val="000000"/>
-                </a:solidFill>
-                <a:latin typeface="AAAAAD+Arial-BoldMT"/>
-              </a:rPr>
-              <a:t>backtrace</a:t>
-            </a:r>
-            <a:r>
-              <a:rPr lang="en-US" sz="4800" b="1" i="0" u="none" strike="noStrike" baseline="0" dirty="0">
-                <a:solidFill>
-                  <a:srgbClr val="000000"/>
-                </a:solidFill>
-                <a:latin typeface="AAAAAD+Arial-BoldMT"/>
-              </a:rPr>
-              <a:t> full </a:t>
-            </a:r>
-            <a:r>
-              <a:rPr lang="en-US" sz="4800" b="0" i="0" u="none" strike="noStrike" baseline="0" dirty="0">
-                <a:solidFill>
-                  <a:srgbClr val="000000"/>
-                </a:solidFill>
-                <a:latin typeface="AAAAAB+ArialMT"/>
-              </a:rPr>
-              <a:t>– show </a:t>
-            </a:r>
-            <a:r>
-              <a:rPr lang="en-US" sz="4800" b="0" i="0" u="none" strike="noStrike" baseline="0" dirty="0" err="1">
-                <a:solidFill>
-                  <a:srgbClr val="000000"/>
-                </a:solidFill>
-                <a:latin typeface="AAAAAB+ArialMT"/>
-              </a:rPr>
-              <a:t>backtrace</a:t>
-            </a:r>
-            <a:r>
-              <a:rPr lang="en-US" sz="4800" b="0" i="0" u="none" strike="noStrike" baseline="0" dirty="0">
-                <a:solidFill>
-                  <a:srgbClr val="000000"/>
-                </a:solidFill>
-                <a:latin typeface="AAAAAB+ArialMT"/>
-              </a:rPr>
-              <a:t> with local variables </a:t>
-            </a:r>
-          </a:p>
-          <a:p>
-            <a:r>
-              <a:rPr lang="en-US" sz="4800" b="0" i="0" u="none" strike="noStrike" baseline="0" dirty="0">
-                <a:solidFill>
-                  <a:srgbClr val="000000"/>
-                </a:solidFill>
-                <a:latin typeface="AAAAAB+ArialMT"/>
-              </a:rPr>
-              <a:t>• </a:t>
-            </a:r>
-            <a:r>
-              <a:rPr lang="en-US" sz="4800" b="1" i="0" u="none" strike="noStrike" baseline="0" dirty="0">
-                <a:solidFill>
-                  <a:srgbClr val="000000"/>
-                </a:solidFill>
-                <a:latin typeface="AAAAAD+Arial-BoldMT"/>
-              </a:rPr>
-              <a:t>list *</a:t>
-            </a:r>
-            <a:r>
-              <a:rPr lang="en-US" sz="4800" b="1" i="0" u="none" strike="noStrike" baseline="0" dirty="0" err="1">
-                <a:solidFill>
-                  <a:srgbClr val="000000"/>
-                </a:solidFill>
-                <a:latin typeface="AAAAAD+Arial-BoldMT"/>
-              </a:rPr>
-              <a:t>func_name</a:t>
-            </a:r>
-            <a:r>
-              <a:rPr lang="en-US" sz="4800" b="1" i="0" u="none" strike="noStrike" baseline="0" dirty="0">
-                <a:solidFill>
-                  <a:srgbClr val="000000"/>
-                </a:solidFill>
-                <a:latin typeface="AAAAAD+Arial-BoldMT"/>
-              </a:rPr>
-              <a:t>*/*line range*/... </a:t>
-            </a:r>
-            <a:r>
-              <a:rPr lang="en-US" sz="4800" b="0" i="0" u="none" strike="noStrike" baseline="0" dirty="0">
-                <a:solidFill>
-                  <a:srgbClr val="000000"/>
-                </a:solidFill>
-                <a:latin typeface="AAAAAB+ArialMT"/>
-              </a:rPr>
-              <a:t>– displays some code </a:t>
             </a:r>
             <a:endParaRPr lang="ru-RU" sz="4800" dirty="0"/>
           </a:p>
@@ -7675,7 +9040,7 @@
 </p:sld>
 </file>
 
-<file path=ppt/slides/slide7.xml><?xml version="1.0" encoding="utf-8"?>
+<file path=ppt/slides/slide8.xml><?xml version="1.0" encoding="utf-8"?>
 <p:sld xmlns:a="http://schemas.openxmlformats.org/drawingml/2006/main" xmlns:r="http://schemas.openxmlformats.org/officeDocument/2006/relationships" xmlns:p="http://schemas.openxmlformats.org/presentationml/2006/main">
   <p:cSld>
     <p:spTree>
@@ -7796,8 +9161,25 @@
                 <a:latin typeface="Arial" panose="020B0604020202020204" pitchFamily="34" charset="0"/>
                 <a:cs typeface="Arial" panose="020B0604020202020204" pitchFamily="34" charset="0"/>
               </a:rPr>
-              <a:t>– set a value to a variable</a:t>
-            </a:r>
+              <a:t>– </a:t>
+            </a:r>
+            <a:r>
+              <a:rPr lang="ru-RU" sz="4400" b="0" i="0" u="none" strike="noStrike" baseline="0" dirty="0">
+                <a:solidFill>
+                  <a:srgbClr val="000000"/>
+                </a:solidFill>
+                <a:latin typeface="Arial" panose="020B0604020202020204" pitchFamily="34" charset="0"/>
+                <a:cs typeface="Arial" panose="020B0604020202020204" pitchFamily="34" charset="0"/>
+              </a:rPr>
+              <a:t>установить значение переменной</a:t>
+            </a:r>
+            <a:endParaRPr lang="en-US" sz="4400" b="0" i="0" u="none" strike="noStrike" baseline="0" dirty="0">
+              <a:solidFill>
+                <a:srgbClr val="000000"/>
+              </a:solidFill>
+              <a:latin typeface="Arial" panose="020B0604020202020204" pitchFamily="34" charset="0"/>
+              <a:cs typeface="Arial" panose="020B0604020202020204" pitchFamily="34" charset="0"/>
+            </a:endParaRPr>
           </a:p>
           <a:p>
             <a:r>
@@ -8073,7 +9455,7 @@
 </p:sld>
 </file>
 
-<file path=ppt/slides/slide8.xml><?xml version="1.0" encoding="utf-8"?>
+<file path=ppt/slides/slide9.xml><?xml version="1.0" encoding="utf-8"?>
 <p:sld xmlns:a="http://schemas.openxmlformats.org/drawingml/2006/main" xmlns:r="http://schemas.openxmlformats.org/officeDocument/2006/relationships" xmlns:p="http://schemas.openxmlformats.org/presentationml/2006/main">
   <p:cSld>
     <p:spTree>
@@ -8095,7 +9477,7 @@
           <p:cNvPr id="2" name="Title 1">
             <a:extLst>
               <a:ext uri="{FF2B5EF4-FFF2-40B4-BE49-F238E27FC236}">
-                <a16:creationId xmlns:a16="http://schemas.microsoft.com/office/drawing/2014/main" id="{70C1309F-C22A-410F-8027-7C78B81B564D}"/>
+                <a16:creationId xmlns:a16="http://schemas.microsoft.com/office/drawing/2014/main" id="{37553EA2-7E76-4FF9-8FE5-11B0549C059D}"/>
               </a:ext>
             </a:extLst>
           </p:cNvPr>
@@ -8106,14 +9488,19 @@
             <p:ph type="title"/>
           </p:nvPr>
         </p:nvSpPr>
-        <p:spPr/>
+        <p:spPr>
+          <a:xfrm>
+            <a:off x="7681603" y="701675"/>
+            <a:ext cx="4740892" cy="2123658"/>
+          </a:xfrm>
+        </p:spPr>
         <p:txBody>
           <a:bodyPr/>
           <a:lstStyle/>
           <a:p>
             <a:r>
-              <a:rPr lang="en-US" dirty="0"/>
-              <a:t>Sources</a:t>
+              <a:rPr lang="en-US" dirty="0" err="1"/>
+              <a:t>Coredump</a:t>
             </a:r>
             <a:endParaRPr lang="ru-RU" dirty="0"/>
           </a:p>
@@ -8124,7 +9511,7 @@
           <p:cNvPr id="3" name="Text Placeholder 2">
             <a:extLst>
               <a:ext uri="{FF2B5EF4-FFF2-40B4-BE49-F238E27FC236}">
-                <a16:creationId xmlns:a16="http://schemas.microsoft.com/office/drawing/2014/main" id="{92F45A87-1838-486E-843B-B74B47A71AC4}"/>
+                <a16:creationId xmlns:a16="http://schemas.microsoft.com/office/drawing/2014/main" id="{5F37AFC8-3952-42C0-943F-8F8FCA12D31F}"/>
               </a:ext>
             </a:extLst>
           </p:cNvPr>
@@ -8138,34 +9525,354 @@
         <p:spPr>
           <a:xfrm>
             <a:off x="1076272" y="3513916"/>
-            <a:ext cx="17951555" cy="1354217"/>
+            <a:ext cx="17951555" cy="3385542"/>
           </a:xfrm>
         </p:spPr>
         <p:txBody>
           <a:bodyPr/>
           <a:lstStyle/>
           <a:p>
-            <a:r>
-              <a:rPr lang="en-US" sz="4400" b="0" i="0" u="none" strike="noStrike" baseline="0" dirty="0">
-                <a:latin typeface="Arial" panose="020B0604020202020204" pitchFamily="34" charset="0"/>
-                <a:cs typeface="Arial" panose="020B0604020202020204" pitchFamily="34" charset="0"/>
-                <a:hlinkClick r:id="rId2"/>
-              </a:rPr>
-              <a:t>GDB cheat sheet </a:t>
-            </a:r>
-            <a:endParaRPr lang="en-US" sz="4400" b="0" i="0" u="none" strike="noStrike" baseline="0" dirty="0">
+            <a:pPr marL="285750" indent="-285750">
+              <a:buFont typeface="Arial" panose="020B0604020202020204" pitchFamily="34" charset="0"/>
+              <a:buChar char="•"/>
+            </a:pPr>
+            <a:r>
+              <a:rPr lang="en-US" sz="4400" b="1" i="0" dirty="0" err="1">
+                <a:solidFill>
+                  <a:srgbClr val="1F2328"/>
+                </a:solidFill>
+                <a:effectLst/>
+                <a:latin typeface="Arial" panose="020B0604020202020204" pitchFamily="34" charset="0"/>
+                <a:cs typeface="Arial" panose="020B0604020202020204" pitchFamily="34" charset="0"/>
+              </a:rPr>
+              <a:t>sudo</a:t>
+            </a:r>
+            <a:r>
+              <a:rPr lang="en-US" sz="4400" b="1" i="0" dirty="0">
+                <a:solidFill>
+                  <a:srgbClr val="1F2328"/>
+                </a:solidFill>
+                <a:effectLst/>
+                <a:latin typeface="Arial" panose="020B0604020202020204" pitchFamily="34" charset="0"/>
+                <a:cs typeface="Arial" panose="020B0604020202020204" pitchFamily="34" charset="0"/>
+              </a:rPr>
+              <a:t> </a:t>
+            </a:r>
+            <a:r>
+              <a:rPr lang="en-US" sz="4400" b="1" i="0" dirty="0" err="1">
+                <a:solidFill>
+                  <a:srgbClr val="1F2328"/>
+                </a:solidFill>
+                <a:effectLst/>
+                <a:latin typeface="Arial" panose="020B0604020202020204" pitchFamily="34" charset="0"/>
+                <a:cs typeface="Arial" panose="020B0604020202020204" pitchFamily="34" charset="0"/>
+              </a:rPr>
+              <a:t>sysctl</a:t>
+            </a:r>
+            <a:r>
+              <a:rPr lang="en-US" sz="4400" b="1" i="0" dirty="0">
+                <a:solidFill>
+                  <a:srgbClr val="1F2328"/>
+                </a:solidFill>
+                <a:effectLst/>
+                <a:latin typeface="Arial" panose="020B0604020202020204" pitchFamily="34" charset="0"/>
+                <a:cs typeface="Arial" panose="020B0604020202020204" pitchFamily="34" charset="0"/>
+              </a:rPr>
+              <a:t> </a:t>
+            </a:r>
+            <a:r>
+              <a:rPr lang="en-US" sz="4400" b="1" i="0" dirty="0" err="1">
+                <a:solidFill>
+                  <a:srgbClr val="1F2328"/>
+                </a:solidFill>
+                <a:effectLst/>
+                <a:latin typeface="Arial" panose="020B0604020202020204" pitchFamily="34" charset="0"/>
+                <a:cs typeface="Arial" panose="020B0604020202020204" pitchFamily="34" charset="0"/>
+              </a:rPr>
+              <a:t>kernel.core_pattern</a:t>
+            </a:r>
+            <a:r>
+              <a:rPr lang="en-US" sz="4400" b="1" i="0" dirty="0">
+                <a:solidFill>
+                  <a:srgbClr val="1F2328"/>
+                </a:solidFill>
+                <a:effectLst/>
+                <a:latin typeface="Arial" panose="020B0604020202020204" pitchFamily="34" charset="0"/>
+                <a:cs typeface="Arial" panose="020B0604020202020204" pitchFamily="34" charset="0"/>
+              </a:rPr>
+              <a:t>= "./</a:t>
+            </a:r>
+            <a:r>
+              <a:rPr lang="en-US" sz="4400" b="1" i="0" dirty="0" err="1">
+                <a:solidFill>
+                  <a:srgbClr val="1F2328"/>
+                </a:solidFill>
+                <a:effectLst/>
+                <a:latin typeface="Arial" panose="020B0604020202020204" pitchFamily="34" charset="0"/>
+                <a:cs typeface="Arial" panose="020B0604020202020204" pitchFamily="34" charset="0"/>
+              </a:rPr>
+              <a:t>coredump</a:t>
+            </a:r>
+            <a:r>
+              <a:rPr lang="en-US" sz="4400" b="1" i="0" dirty="0">
+                <a:solidFill>
+                  <a:srgbClr val="1F2328"/>
+                </a:solidFill>
+                <a:effectLst/>
+                <a:latin typeface="Arial" panose="020B0604020202020204" pitchFamily="34" charset="0"/>
+                <a:cs typeface="Arial" panose="020B0604020202020204" pitchFamily="34" charset="0"/>
+              </a:rPr>
+              <a:t>" </a:t>
+            </a:r>
+            <a:r>
+              <a:rPr lang="en-US" sz="4400" b="0" i="0" dirty="0">
+                <a:solidFill>
+                  <a:srgbClr val="1F2328"/>
+                </a:solidFill>
+                <a:effectLst/>
+                <a:latin typeface="Arial" panose="020B0604020202020204" pitchFamily="34" charset="0"/>
+                <a:cs typeface="Arial" panose="020B0604020202020204" pitchFamily="34" charset="0"/>
+              </a:rPr>
+              <a:t>– </a:t>
+            </a:r>
+            <a:r>
+              <a:rPr lang="ru-RU" sz="4400" b="0" i="0" dirty="0">
+                <a:solidFill>
+                  <a:srgbClr val="1F2328"/>
+                </a:solidFill>
+                <a:effectLst/>
+                <a:latin typeface="Arial" panose="020B0604020202020204" pitchFamily="34" charset="0"/>
+                <a:cs typeface="Arial" panose="020B0604020202020204" pitchFamily="34" charset="0"/>
+              </a:rPr>
+              <a:t>установить сохранение корок в текущей директории</a:t>
+            </a:r>
+          </a:p>
+          <a:p>
+            <a:pPr marL="285750" indent="-285750">
+              <a:buFont typeface="Arial" panose="020B0604020202020204" pitchFamily="34" charset="0"/>
+              <a:buChar char="•"/>
+            </a:pPr>
+            <a:r>
+              <a:rPr lang="en-US" sz="4400" b="1" i="0" dirty="0" err="1">
+                <a:solidFill>
+                  <a:srgbClr val="1F2328"/>
+                </a:solidFill>
+                <a:effectLst/>
+                <a:latin typeface="Arial" panose="020B0604020202020204" pitchFamily="34" charset="0"/>
+                <a:cs typeface="Arial" panose="020B0604020202020204" pitchFamily="34" charset="0"/>
+              </a:rPr>
+              <a:t>ulimit</a:t>
+            </a:r>
+            <a:r>
+              <a:rPr lang="en-US" sz="4400" b="1" i="0" dirty="0">
+                <a:solidFill>
+                  <a:srgbClr val="1F2328"/>
+                </a:solidFill>
+                <a:effectLst/>
+                <a:latin typeface="Arial" panose="020B0604020202020204" pitchFamily="34" charset="0"/>
+                <a:cs typeface="Arial" panose="020B0604020202020204" pitchFamily="34" charset="0"/>
+              </a:rPr>
+              <a:t> -c unlimited; ./</a:t>
+            </a:r>
+            <a:r>
+              <a:rPr lang="en-US" sz="4400" b="1" i="0" dirty="0" err="1">
+                <a:solidFill>
+                  <a:srgbClr val="1F2328"/>
+                </a:solidFill>
+                <a:effectLst/>
+                <a:latin typeface="Arial" panose="020B0604020202020204" pitchFamily="34" charset="0"/>
+                <a:cs typeface="Arial" panose="020B0604020202020204" pitchFamily="34" charset="0"/>
+              </a:rPr>
+              <a:t>a.out</a:t>
+            </a:r>
+            <a:r>
+              <a:rPr lang="en-US" sz="4400" b="1" i="0" dirty="0">
+                <a:solidFill>
+                  <a:srgbClr val="1F2328"/>
+                </a:solidFill>
+                <a:effectLst/>
+                <a:latin typeface="Arial" panose="020B0604020202020204" pitchFamily="34" charset="0"/>
+                <a:cs typeface="Arial" panose="020B0604020202020204" pitchFamily="34" charset="0"/>
+              </a:rPr>
+              <a:t> </a:t>
+            </a:r>
+            <a:r>
+              <a:rPr lang="en-US" sz="4400" b="0" i="0" dirty="0">
+                <a:solidFill>
+                  <a:srgbClr val="1F2328"/>
+                </a:solidFill>
+                <a:effectLst/>
+                <a:latin typeface="Arial" panose="020B0604020202020204" pitchFamily="34" charset="0"/>
+                <a:cs typeface="Arial" panose="020B0604020202020204" pitchFamily="34" charset="0"/>
+              </a:rPr>
+              <a:t>– </a:t>
+            </a:r>
+            <a:r>
+              <a:rPr lang="ru-RU" sz="4400" b="0" i="0" dirty="0">
+                <a:solidFill>
+                  <a:srgbClr val="1F2328"/>
+                </a:solidFill>
+                <a:effectLst/>
+                <a:latin typeface="Arial" panose="020B0604020202020204" pitchFamily="34" charset="0"/>
+                <a:cs typeface="Arial" panose="020B0604020202020204" pitchFamily="34" charset="0"/>
+              </a:rPr>
+              <a:t>убрать ограничения на размер корок и собрать </a:t>
+            </a:r>
+            <a:r>
+              <a:rPr lang="en-US" sz="4400" b="0" i="0" dirty="0" err="1">
+                <a:solidFill>
+                  <a:srgbClr val="1F2328"/>
+                </a:solidFill>
+                <a:effectLst/>
+                <a:latin typeface="Arial" panose="020B0604020202020204" pitchFamily="34" charset="0"/>
+                <a:cs typeface="Arial" panose="020B0604020202020204" pitchFamily="34" charset="0"/>
+              </a:rPr>
+              <a:t>coredump</a:t>
+            </a:r>
+            <a:endParaRPr lang="en-US" sz="4400" b="0" i="0" dirty="0">
+              <a:solidFill>
+                <a:srgbClr val="1F2328"/>
+              </a:solidFill>
+              <a:effectLst/>
               <a:latin typeface="Arial" panose="020B0604020202020204" pitchFamily="34" charset="0"/>
               <a:cs typeface="Arial" panose="020B0604020202020204" pitchFamily="34" charset="0"/>
             </a:endParaRPr>
           </a:p>
           <a:p>
-            <a:r>
-              <a:rPr lang="en-US" sz="4400" b="0" i="0" u="none" strike="noStrike" baseline="0" dirty="0">
-                <a:latin typeface="Arial" panose="020B0604020202020204" pitchFamily="34" charset="0"/>
-                <a:cs typeface="Arial" panose="020B0604020202020204" pitchFamily="34" charset="0"/>
-                <a:hlinkClick r:id="rId3"/>
-              </a:rPr>
-              <a:t>One more </a:t>
+            <a:pPr marL="285750" indent="-285750">
+              <a:buFont typeface="Arial" panose="020B0604020202020204" pitchFamily="34" charset="0"/>
+              <a:buChar char="•"/>
+            </a:pPr>
+            <a:r>
+              <a:rPr lang="en-US" sz="4400" b="1" i="0" dirty="0" err="1">
+                <a:solidFill>
+                  <a:srgbClr val="1F2328"/>
+                </a:solidFill>
+                <a:effectLst/>
+                <a:latin typeface="Arial" panose="020B0604020202020204" pitchFamily="34" charset="0"/>
+                <a:cs typeface="Arial" panose="020B0604020202020204" pitchFamily="34" charset="0"/>
+              </a:rPr>
+              <a:t>gdb</a:t>
+            </a:r>
+            <a:r>
+              <a:rPr lang="en-US" sz="4400" b="1" i="0" dirty="0">
+                <a:solidFill>
+                  <a:srgbClr val="1F2328"/>
+                </a:solidFill>
+                <a:effectLst/>
+                <a:latin typeface="Arial" panose="020B0604020202020204" pitchFamily="34" charset="0"/>
+                <a:cs typeface="Arial" panose="020B0604020202020204" pitchFamily="34" charset="0"/>
+              </a:rPr>
+              <a:t> ./</a:t>
+            </a:r>
+            <a:r>
+              <a:rPr lang="en-US" sz="4400" b="1" i="0" dirty="0" err="1">
+                <a:solidFill>
+                  <a:srgbClr val="1F2328"/>
+                </a:solidFill>
+                <a:effectLst/>
+                <a:latin typeface="Arial" panose="020B0604020202020204" pitchFamily="34" charset="0"/>
+                <a:cs typeface="Arial" panose="020B0604020202020204" pitchFamily="34" charset="0"/>
+              </a:rPr>
+              <a:t>a.out</a:t>
+            </a:r>
+            <a:r>
+              <a:rPr lang="en-US" sz="4400" b="1" i="0" dirty="0">
+                <a:solidFill>
+                  <a:srgbClr val="1F2328"/>
+                </a:solidFill>
+                <a:effectLst/>
+                <a:latin typeface="Arial" panose="020B0604020202020204" pitchFamily="34" charset="0"/>
+                <a:cs typeface="Arial" panose="020B0604020202020204" pitchFamily="34" charset="0"/>
+              </a:rPr>
+              <a:t> ./</a:t>
+            </a:r>
+            <a:r>
+              <a:rPr lang="en-US" sz="4400" b="1" i="0" dirty="0" err="1">
+                <a:solidFill>
+                  <a:srgbClr val="1F2328"/>
+                </a:solidFill>
+                <a:effectLst/>
+                <a:latin typeface="Arial" panose="020B0604020202020204" pitchFamily="34" charset="0"/>
+                <a:cs typeface="Arial" panose="020B0604020202020204" pitchFamily="34" charset="0"/>
+              </a:rPr>
+              <a:t>coredump</a:t>
+            </a:r>
+            <a:r>
+              <a:rPr lang="en-US" sz="4400" b="0" i="0" dirty="0">
+                <a:solidFill>
+                  <a:srgbClr val="1F2328"/>
+                </a:solidFill>
+                <a:effectLst/>
+                <a:latin typeface="Arial" panose="020B0604020202020204" pitchFamily="34" charset="0"/>
+                <a:cs typeface="Arial" panose="020B0604020202020204" pitchFamily="34" charset="0"/>
+              </a:rPr>
+              <a:t>… </a:t>
+            </a:r>
+            <a:r>
+              <a:rPr lang="ru-RU" sz="4400" dirty="0">
+                <a:solidFill>
+                  <a:srgbClr val="1F2328"/>
+                </a:solidFill>
+                <a:latin typeface="Arial" panose="020B0604020202020204" pitchFamily="34" charset="0"/>
+                <a:cs typeface="Arial" panose="020B0604020202020204" pitchFamily="34" charset="0"/>
+              </a:rPr>
+              <a:t>–</a:t>
+            </a:r>
+            <a:r>
+              <a:rPr lang="en-US" sz="4400" b="0" i="0" dirty="0">
+                <a:solidFill>
+                  <a:srgbClr val="1F2328"/>
+                </a:solidFill>
+                <a:effectLst/>
+                <a:latin typeface="Arial" panose="020B0604020202020204" pitchFamily="34" charset="0"/>
+                <a:cs typeface="Arial" panose="020B0604020202020204" pitchFamily="34" charset="0"/>
+              </a:rPr>
+              <a:t> </a:t>
+            </a:r>
+            <a:r>
+              <a:rPr lang="ru-RU" sz="4400" b="0" i="0" dirty="0">
+                <a:solidFill>
+                  <a:srgbClr val="1F2328"/>
+                </a:solidFill>
+                <a:effectLst/>
+                <a:latin typeface="Arial" panose="020B0604020202020204" pitchFamily="34" charset="0"/>
+                <a:cs typeface="Arial" panose="020B0604020202020204" pitchFamily="34" charset="0"/>
+              </a:rPr>
+              <a:t>запустить </a:t>
+            </a:r>
+            <a:r>
+              <a:rPr lang="en-US" sz="4400" b="0" i="0" dirty="0" err="1">
+                <a:solidFill>
+                  <a:srgbClr val="1F2328"/>
+                </a:solidFill>
+                <a:effectLst/>
+                <a:latin typeface="Arial" panose="020B0604020202020204" pitchFamily="34" charset="0"/>
+                <a:cs typeface="Arial" panose="020B0604020202020204" pitchFamily="34" charset="0"/>
+              </a:rPr>
+              <a:t>coredump</a:t>
+            </a:r>
+            <a:r>
+              <a:rPr lang="en-US" sz="4400" b="0" i="0" dirty="0">
+                <a:solidFill>
+                  <a:srgbClr val="1F2328"/>
+                </a:solidFill>
+                <a:effectLst/>
+                <a:latin typeface="Arial" panose="020B0604020202020204" pitchFamily="34" charset="0"/>
+                <a:cs typeface="Arial" panose="020B0604020202020204" pitchFamily="34" charset="0"/>
+              </a:rPr>
+              <a:t> </a:t>
+            </a:r>
+            <a:r>
+              <a:rPr lang="ru-RU" sz="4400" b="0" i="0" dirty="0">
+                <a:solidFill>
+                  <a:srgbClr val="1F2328"/>
+                </a:solidFill>
+                <a:effectLst/>
+                <a:latin typeface="Arial" panose="020B0604020202020204" pitchFamily="34" charset="0"/>
+                <a:cs typeface="Arial" panose="020B0604020202020204" pitchFamily="34" charset="0"/>
+              </a:rPr>
+              <a:t>в отладчике</a:t>
             </a:r>
             <a:endParaRPr lang="ru-RU" sz="4400" dirty="0">
               <a:latin typeface="Arial" panose="020B0604020202020204" pitchFamily="34" charset="0"/>
@@ -8177,251 +9884,9 @@
     </p:spTree>
     <p:extLst>
       <p:ext uri="{BB962C8B-B14F-4D97-AF65-F5344CB8AC3E}">
-        <p14:creationId xmlns:p14="http://schemas.microsoft.com/office/powerpoint/2010/main" val="2888397059"/>
+        <p14:creationId xmlns:p14="http://schemas.microsoft.com/office/powerpoint/2010/main" val="2230057018"/>
       </p:ext>
     </p:extLst>
-  </p:cSld>
-  <p:clrMapOvr>
-    <a:masterClrMapping/>
-  </p:clrMapOvr>
-</p:sld>
-</file>
-
-<file path=ppt/slides/slide9.xml><?xml version="1.0" encoding="utf-8"?>
-<p:sld xmlns:a="http://schemas.openxmlformats.org/drawingml/2006/main" xmlns:r="http://schemas.openxmlformats.org/officeDocument/2006/relationships" xmlns:p="http://schemas.openxmlformats.org/presentationml/2006/main" showMasterSp="0">
-  <p:cSld>
-    <p:spTree>
-      <p:nvGrpSpPr>
-        <p:cNvPr id="1" name=""/>
-        <p:cNvGrpSpPr/>
-        <p:nvPr/>
-      </p:nvGrpSpPr>
-      <p:grpSpPr>
-        <a:xfrm>
-          <a:off x="0" y="0"/>
-          <a:ext cx="0" cy="0"/>
-          <a:chOff x="0" y="0"/>
-          <a:chExt cx="0" cy="0"/>
-        </a:xfrm>
-      </p:grpSpPr>
-      <p:sp>
-        <p:nvSpPr>
-          <p:cNvPr id="2" name="object 2"/>
-          <p:cNvSpPr txBox="1">
-            <a:spLocks noGrp="1"/>
-          </p:cNvSpPr>
-          <p:nvPr>
-            <p:ph type="title"/>
-          </p:nvPr>
-        </p:nvSpPr>
-        <p:spPr>
-          <a:xfrm>
-            <a:off x="8130558" y="832090"/>
-            <a:ext cx="4436092" cy="1077859"/>
-          </a:xfrm>
-          <a:prstGeom prst="rect">
-            <a:avLst/>
-          </a:prstGeom>
-        </p:spPr>
-        <p:txBody>
-          <a:bodyPr vert="horz" wrap="square" lIns="0" tIns="15875" rIns="0" bIns="0" rtlCol="0">
-            <a:spAutoFit/>
-          </a:bodyPr>
-          <a:lstStyle/>
-          <a:p>
-            <a:pPr marL="12700">
-              <a:lnSpc>
-                <a:spcPct val="100000"/>
-              </a:lnSpc>
-              <a:spcBef>
-                <a:spcPts val="125"/>
-              </a:spcBef>
-            </a:pPr>
-            <a:r>
-              <a:rPr lang="en-US" spc="-185" dirty="0"/>
-              <a:t>S</a:t>
-            </a:r>
-            <a:r>
-              <a:rPr spc="-185" dirty="0"/>
-              <a:t>anitizers</a:t>
-            </a:r>
-          </a:p>
-        </p:txBody>
-      </p:sp>
-      <p:sp>
-        <p:nvSpPr>
-          <p:cNvPr id="3" name="object 3"/>
-          <p:cNvSpPr txBox="1"/>
-          <p:nvPr/>
-        </p:nvSpPr>
-        <p:spPr>
-          <a:xfrm>
-            <a:off x="1289050" y="3153349"/>
-            <a:ext cx="10210800" cy="5002652"/>
-          </a:xfrm>
-          <a:prstGeom prst="rect">
-            <a:avLst/>
-          </a:prstGeom>
-        </p:spPr>
-        <p:txBody>
-          <a:bodyPr vert="horz" wrap="square" lIns="0" tIns="331470" rIns="0" bIns="0" rtlCol="0">
-            <a:spAutoFit/>
-          </a:bodyPr>
-          <a:lstStyle/>
-          <a:p>
-            <a:pPr marL="473075" indent="-461009">
-              <a:lnSpc>
-                <a:spcPct val="100000"/>
-              </a:lnSpc>
-              <a:spcBef>
-                <a:spcPts val="2610"/>
-              </a:spcBef>
-              <a:buChar char="•"/>
-              <a:tabLst>
-                <a:tab pos="473075" algn="l"/>
-                <a:tab pos="473709" algn="l"/>
-              </a:tabLst>
-            </a:pPr>
-            <a:r>
-              <a:rPr sz="4400" spc="105" dirty="0">
-                <a:latin typeface="Arial" panose="020B0604020202020204" pitchFamily="34" charset="0"/>
-                <a:cs typeface="Arial" panose="020B0604020202020204" pitchFamily="34" charset="0"/>
-              </a:rPr>
-              <a:t>-fsanitize=…</a:t>
-            </a:r>
-            <a:endParaRPr sz="4400" dirty="0">
-              <a:latin typeface="Arial" panose="020B0604020202020204" pitchFamily="34" charset="0"/>
-              <a:cs typeface="Arial" panose="020B0604020202020204" pitchFamily="34" charset="0"/>
-            </a:endParaRPr>
-          </a:p>
-          <a:p>
-            <a:pPr marL="934085" lvl="1" indent="-461645">
-              <a:lnSpc>
-                <a:spcPct val="100000"/>
-              </a:lnSpc>
-              <a:spcBef>
-                <a:spcPts val="2520"/>
-              </a:spcBef>
-              <a:buChar char="•"/>
-              <a:tabLst>
-                <a:tab pos="933450" algn="l"/>
-                <a:tab pos="934719" algn="l"/>
-              </a:tabLst>
-            </a:pPr>
-            <a:r>
-              <a:rPr lang="en-US" sz="4400" spc="75" dirty="0">
-                <a:latin typeface="Arial" panose="020B0604020202020204" pitchFamily="34" charset="0"/>
-                <a:cs typeface="Arial" panose="020B0604020202020204" pitchFamily="34" charset="0"/>
-              </a:rPr>
-              <a:t>a</a:t>
-            </a:r>
-            <a:r>
-              <a:rPr sz="4400" spc="75" dirty="0">
-                <a:latin typeface="Arial" panose="020B0604020202020204" pitchFamily="34" charset="0"/>
-                <a:cs typeface="Arial" panose="020B0604020202020204" pitchFamily="34" charset="0"/>
-              </a:rPr>
-              <a:t>ddress</a:t>
-            </a:r>
-            <a:endParaRPr sz="4400" dirty="0">
-              <a:latin typeface="Arial" panose="020B0604020202020204" pitchFamily="34" charset="0"/>
-              <a:cs typeface="Arial" panose="020B0604020202020204" pitchFamily="34" charset="0"/>
-            </a:endParaRPr>
-          </a:p>
-          <a:p>
-            <a:pPr marL="934085" lvl="1" indent="-461645">
-              <a:lnSpc>
-                <a:spcPct val="100000"/>
-              </a:lnSpc>
-              <a:spcBef>
-                <a:spcPts val="2515"/>
-              </a:spcBef>
-              <a:buChar char="•"/>
-              <a:tabLst>
-                <a:tab pos="933450" algn="l"/>
-                <a:tab pos="934719" algn="l"/>
-              </a:tabLst>
-            </a:pPr>
-            <a:r>
-              <a:rPr sz="4400" spc="160" dirty="0">
-                <a:latin typeface="Arial" panose="020B0604020202020204" pitchFamily="34" charset="0"/>
-                <a:cs typeface="Arial" panose="020B0604020202020204" pitchFamily="34" charset="0"/>
-              </a:rPr>
-              <a:t>unde</a:t>
-            </a:r>
-            <a:r>
-              <a:rPr sz="4400" spc="-10" dirty="0">
-                <a:latin typeface="Arial" panose="020B0604020202020204" pitchFamily="34" charset="0"/>
-                <a:cs typeface="Arial" panose="020B0604020202020204" pitchFamily="34" charset="0"/>
-              </a:rPr>
-              <a:t>f</a:t>
-            </a:r>
-            <a:r>
-              <a:rPr sz="4400" spc="150" dirty="0">
-                <a:latin typeface="Arial" panose="020B0604020202020204" pitchFamily="34" charset="0"/>
-                <a:cs typeface="Arial" panose="020B0604020202020204" pitchFamily="34" charset="0"/>
-              </a:rPr>
-              <a:t>ined</a:t>
-            </a:r>
-            <a:endParaRPr sz="4400" dirty="0">
-              <a:latin typeface="Arial" panose="020B0604020202020204" pitchFamily="34" charset="0"/>
-              <a:cs typeface="Arial" panose="020B0604020202020204" pitchFamily="34" charset="0"/>
-            </a:endParaRPr>
-          </a:p>
-          <a:p>
-            <a:pPr marL="934085" lvl="1" indent="-461645">
-              <a:lnSpc>
-                <a:spcPct val="100000"/>
-              </a:lnSpc>
-              <a:spcBef>
-                <a:spcPts val="2515"/>
-              </a:spcBef>
-              <a:buChar char="•"/>
-              <a:tabLst>
-                <a:tab pos="933450" algn="l"/>
-                <a:tab pos="934719" algn="l"/>
-              </a:tabLst>
-            </a:pPr>
-            <a:r>
-              <a:rPr sz="4400" spc="45" dirty="0">
-                <a:latin typeface="Arial" panose="020B0604020202020204" pitchFamily="34" charset="0"/>
-                <a:cs typeface="Arial" panose="020B0604020202020204" pitchFamily="34" charset="0"/>
-              </a:rPr>
-              <a:t>leak</a:t>
-            </a:r>
-            <a:endParaRPr sz="4400" dirty="0">
-              <a:latin typeface="Arial" panose="020B0604020202020204" pitchFamily="34" charset="0"/>
-              <a:cs typeface="Arial" panose="020B0604020202020204" pitchFamily="34" charset="0"/>
-            </a:endParaRPr>
-          </a:p>
-          <a:p>
-            <a:pPr marL="934085" lvl="1" indent="-461645">
-              <a:lnSpc>
-                <a:spcPct val="100000"/>
-              </a:lnSpc>
-              <a:spcBef>
-                <a:spcPts val="2515"/>
-              </a:spcBef>
-              <a:buChar char="•"/>
-              <a:tabLst>
-                <a:tab pos="933450" algn="l"/>
-                <a:tab pos="934719" algn="l"/>
-              </a:tabLst>
-            </a:pPr>
-            <a:r>
-              <a:rPr sz="4400" spc="145" dirty="0">
-                <a:latin typeface="Arial" panose="020B0604020202020204" pitchFamily="34" charset="0"/>
-                <a:cs typeface="Arial" panose="020B0604020202020204" pitchFamily="34" charset="0"/>
-              </a:rPr>
-              <a:t>thread</a:t>
-            </a:r>
-            <a:endParaRPr sz="4400" dirty="0">
-              <a:latin typeface="Arial" panose="020B0604020202020204" pitchFamily="34" charset="0"/>
-              <a:cs typeface="Arial" panose="020B0604020202020204" pitchFamily="34" charset="0"/>
-            </a:endParaRPr>
-          </a:p>
-        </p:txBody>
-      </p:sp>
-    </p:spTree>
   </p:cSld>
   <p:clrMapOvr>
     <a:masterClrMapping/>

--- a/sem_1_tools/presentations/Семинар_1_tools.pptx
+++ b/sem_1_tools/presentations/Семинар_1_tools.pptx
@@ -13,14 +13,15 @@
     <p:sldId id="267" r:id="rId7"/>
     <p:sldId id="266" r:id="rId8"/>
     <p:sldId id="265" r:id="rId9"/>
-    <p:sldId id="270" r:id="rId10"/>
-    <p:sldId id="264" r:id="rId11"/>
-    <p:sldId id="260" r:id="rId12"/>
-    <p:sldId id="268" r:id="rId13"/>
-    <p:sldId id="271" r:id="rId14"/>
-    <p:sldId id="261" r:id="rId15"/>
-    <p:sldId id="262" r:id="rId16"/>
-    <p:sldId id="263" r:id="rId17"/>
+    <p:sldId id="272" r:id="rId10"/>
+    <p:sldId id="270" r:id="rId11"/>
+    <p:sldId id="264" r:id="rId12"/>
+    <p:sldId id="260" r:id="rId13"/>
+    <p:sldId id="268" r:id="rId14"/>
+    <p:sldId id="271" r:id="rId15"/>
+    <p:sldId id="261" r:id="rId16"/>
+    <p:sldId id="262" r:id="rId17"/>
+    <p:sldId id="263" r:id="rId18"/>
   </p:sldIdLst>
   <p:sldSz cx="20104100" cy="11309350"/>
   <p:notesSz cx="20104100" cy="11309350"/>
@@ -277,7 +278,7 @@
           <a:p>
             <a:fld id="{1D8BD707-D9CF-40AE-B4C6-C98DA3205C09}" type="datetimeFigureOut">
               <a:rPr lang="en-US"/>
-              <a:t>9/9/2025</a:t>
+              <a:t>9/11/2025</a:t>
             </a:fld>
             <a:endParaRPr lang="en-US"/>
           </a:p>
@@ -452,7 +453,7 @@
           <a:p>
             <a:fld id="{1D8BD707-D9CF-40AE-B4C6-C98DA3205C09}" type="datetimeFigureOut">
               <a:rPr lang="en-US"/>
-              <a:t>9/9/2025</a:t>
+              <a:t>9/11/2025</a:t>
             </a:fld>
             <a:endParaRPr lang="en-US"/>
           </a:p>
@@ -666,7 +667,7 @@
           <a:p>
             <a:fld id="{1D8BD707-D9CF-40AE-B4C6-C98DA3205C09}" type="datetimeFigureOut">
               <a:rPr lang="en-US"/>
-              <a:t>9/9/2025</a:t>
+              <a:t>9/11/2025</a:t>
             </a:fld>
             <a:endParaRPr lang="en-US"/>
           </a:p>
@@ -814,7 +815,7 @@
           <a:p>
             <a:fld id="{1D8BD707-D9CF-40AE-B4C6-C98DA3205C09}" type="datetimeFigureOut">
               <a:rPr lang="en-US"/>
-              <a:t>9/9/2025</a:t>
+              <a:t>9/11/2025</a:t>
             </a:fld>
             <a:endParaRPr lang="en-US"/>
           </a:p>
@@ -933,7 +934,7 @@
           <a:p>
             <a:fld id="{1D8BD707-D9CF-40AE-B4C6-C98DA3205C09}" type="datetimeFigureOut">
               <a:rPr lang="en-US"/>
-              <a:t>9/9/2025</a:t>
+              <a:t>9/11/2025</a:t>
             </a:fld>
             <a:endParaRPr lang="en-US"/>
           </a:p>
@@ -1156,7 +1157,7 @@
           <a:p>
             <a:fld id="{1D8BD707-D9CF-40AE-B4C6-C98DA3205C09}" type="datetimeFigureOut">
               <a:rPr lang="en-US"/>
-              <a:t>9/9/2025</a:t>
+              <a:t>9/11/2025</a:t>
             </a:fld>
             <a:endParaRPr lang="en-US"/>
           </a:p>
@@ -1529,6 +1530,445 @@
           <p:cNvPr id="2" name="Title 1">
             <a:extLst>
               <a:ext uri="{FF2B5EF4-FFF2-40B4-BE49-F238E27FC236}">
+                <a16:creationId xmlns:a16="http://schemas.microsoft.com/office/drawing/2014/main" id="{37553EA2-7E76-4FF9-8FE5-11B0549C059D}"/>
+              </a:ext>
+            </a:extLst>
+          </p:cNvPr>
+          <p:cNvSpPr>
+            <a:spLocks noGrp="1"/>
+          </p:cNvSpPr>
+          <p:nvPr>
+            <p:ph type="title"/>
+          </p:nvPr>
+        </p:nvSpPr>
+        <p:spPr>
+          <a:xfrm>
+            <a:off x="7681603" y="701675"/>
+            <a:ext cx="4740892" cy="2123658"/>
+          </a:xfrm>
+        </p:spPr>
+        <p:txBody>
+          <a:bodyPr/>
+          <a:lstStyle/>
+          <a:p>
+            <a:r>
+              <a:rPr lang="en-US" dirty="0" err="1"/>
+              <a:t>Coredump</a:t>
+            </a:r>
+            <a:endParaRPr lang="ru-RU" dirty="0"/>
+          </a:p>
+        </p:txBody>
+      </p:sp>
+      <p:sp>
+        <p:nvSpPr>
+          <p:cNvPr id="3" name="Text Placeholder 2">
+            <a:extLst>
+              <a:ext uri="{FF2B5EF4-FFF2-40B4-BE49-F238E27FC236}">
+                <a16:creationId xmlns:a16="http://schemas.microsoft.com/office/drawing/2014/main" id="{5F37AFC8-3952-42C0-943F-8F8FCA12D31F}"/>
+              </a:ext>
+            </a:extLst>
+          </p:cNvPr>
+          <p:cNvSpPr>
+            <a:spLocks noGrp="1"/>
+          </p:cNvSpPr>
+          <p:nvPr>
+            <p:ph type="body" idx="1"/>
+          </p:nvPr>
+        </p:nvSpPr>
+        <p:spPr>
+          <a:xfrm>
+            <a:off x="1076272" y="3513916"/>
+            <a:ext cx="17951555" cy="3385542"/>
+          </a:xfrm>
+        </p:spPr>
+        <p:txBody>
+          <a:bodyPr/>
+          <a:lstStyle/>
+          <a:p>
+            <a:pPr marL="285750" indent="-285750">
+              <a:buFont typeface="Arial" panose="020B0604020202020204" pitchFamily="34" charset="0"/>
+              <a:buChar char="•"/>
+            </a:pPr>
+            <a:r>
+              <a:rPr lang="en-US" sz="4400" b="1" i="0" dirty="0" err="1">
+                <a:solidFill>
+                  <a:srgbClr val="1F2328"/>
+                </a:solidFill>
+                <a:effectLst/>
+                <a:latin typeface="Arial" panose="020B0604020202020204" pitchFamily="34" charset="0"/>
+                <a:cs typeface="Arial" panose="020B0604020202020204" pitchFamily="34" charset="0"/>
+              </a:rPr>
+              <a:t>sudo</a:t>
+            </a:r>
+            <a:r>
+              <a:rPr lang="en-US" sz="4400" b="1" i="0" dirty="0">
+                <a:solidFill>
+                  <a:srgbClr val="1F2328"/>
+                </a:solidFill>
+                <a:effectLst/>
+                <a:latin typeface="Arial" panose="020B0604020202020204" pitchFamily="34" charset="0"/>
+                <a:cs typeface="Arial" panose="020B0604020202020204" pitchFamily="34" charset="0"/>
+              </a:rPr>
+              <a:t> </a:t>
+            </a:r>
+            <a:r>
+              <a:rPr lang="en-US" sz="4400" b="1" i="0" dirty="0" err="1">
+                <a:solidFill>
+                  <a:srgbClr val="1F2328"/>
+                </a:solidFill>
+                <a:effectLst/>
+                <a:latin typeface="Arial" panose="020B0604020202020204" pitchFamily="34" charset="0"/>
+                <a:cs typeface="Arial" panose="020B0604020202020204" pitchFamily="34" charset="0"/>
+              </a:rPr>
+              <a:t>sysctl</a:t>
+            </a:r>
+            <a:r>
+              <a:rPr lang="en-US" sz="4400" b="1" i="0" dirty="0">
+                <a:solidFill>
+                  <a:srgbClr val="1F2328"/>
+                </a:solidFill>
+                <a:effectLst/>
+                <a:latin typeface="Arial" panose="020B0604020202020204" pitchFamily="34" charset="0"/>
+                <a:cs typeface="Arial" panose="020B0604020202020204" pitchFamily="34" charset="0"/>
+              </a:rPr>
+              <a:t> </a:t>
+            </a:r>
+            <a:r>
+              <a:rPr lang="en-US" sz="4400" b="1" i="0" dirty="0" err="1">
+                <a:solidFill>
+                  <a:srgbClr val="1F2328"/>
+                </a:solidFill>
+                <a:effectLst/>
+                <a:latin typeface="Arial" panose="020B0604020202020204" pitchFamily="34" charset="0"/>
+                <a:cs typeface="Arial" panose="020B0604020202020204" pitchFamily="34" charset="0"/>
+              </a:rPr>
+              <a:t>kernel.core_pattern</a:t>
+            </a:r>
+            <a:r>
+              <a:rPr lang="en-US" sz="4400" b="1" i="0" dirty="0">
+                <a:solidFill>
+                  <a:srgbClr val="1F2328"/>
+                </a:solidFill>
+                <a:effectLst/>
+                <a:latin typeface="Arial" panose="020B0604020202020204" pitchFamily="34" charset="0"/>
+                <a:cs typeface="Arial" panose="020B0604020202020204" pitchFamily="34" charset="0"/>
+              </a:rPr>
+              <a:t>= "./</a:t>
+            </a:r>
+            <a:r>
+              <a:rPr lang="en-US" sz="4400" b="1" i="0" dirty="0" err="1">
+                <a:solidFill>
+                  <a:srgbClr val="1F2328"/>
+                </a:solidFill>
+                <a:effectLst/>
+                <a:latin typeface="Arial" panose="020B0604020202020204" pitchFamily="34" charset="0"/>
+                <a:cs typeface="Arial" panose="020B0604020202020204" pitchFamily="34" charset="0"/>
+              </a:rPr>
+              <a:t>coredump</a:t>
+            </a:r>
+            <a:r>
+              <a:rPr lang="en-US" sz="4400" b="1" i="0" dirty="0">
+                <a:solidFill>
+                  <a:srgbClr val="1F2328"/>
+                </a:solidFill>
+                <a:effectLst/>
+                <a:latin typeface="Arial" panose="020B0604020202020204" pitchFamily="34" charset="0"/>
+                <a:cs typeface="Arial" panose="020B0604020202020204" pitchFamily="34" charset="0"/>
+              </a:rPr>
+              <a:t>" </a:t>
+            </a:r>
+            <a:r>
+              <a:rPr lang="en-US" sz="4400" b="0" i="0" dirty="0">
+                <a:solidFill>
+                  <a:srgbClr val="1F2328"/>
+                </a:solidFill>
+                <a:effectLst/>
+                <a:latin typeface="Arial" panose="020B0604020202020204" pitchFamily="34" charset="0"/>
+                <a:cs typeface="Arial" panose="020B0604020202020204" pitchFamily="34" charset="0"/>
+              </a:rPr>
+              <a:t>– </a:t>
+            </a:r>
+            <a:r>
+              <a:rPr lang="ru-RU" sz="4400" b="0" i="0" dirty="0">
+                <a:solidFill>
+                  <a:srgbClr val="1F2328"/>
+                </a:solidFill>
+                <a:effectLst/>
+                <a:latin typeface="Arial" panose="020B0604020202020204" pitchFamily="34" charset="0"/>
+                <a:cs typeface="Arial" panose="020B0604020202020204" pitchFamily="34" charset="0"/>
+              </a:rPr>
+              <a:t>установить сохранение корок в текущей директории</a:t>
+            </a:r>
+          </a:p>
+          <a:p>
+            <a:pPr marL="285750" indent="-285750">
+              <a:buFont typeface="Arial" panose="020B0604020202020204" pitchFamily="34" charset="0"/>
+              <a:buChar char="•"/>
+            </a:pPr>
+            <a:r>
+              <a:rPr lang="en-US" sz="4400" b="1" i="0" dirty="0" err="1">
+                <a:solidFill>
+                  <a:srgbClr val="1F2328"/>
+                </a:solidFill>
+                <a:effectLst/>
+                <a:latin typeface="Arial" panose="020B0604020202020204" pitchFamily="34" charset="0"/>
+                <a:cs typeface="Arial" panose="020B0604020202020204" pitchFamily="34" charset="0"/>
+              </a:rPr>
+              <a:t>ulimit</a:t>
+            </a:r>
+            <a:r>
+              <a:rPr lang="en-US" sz="4400" b="1" i="0" dirty="0">
+                <a:solidFill>
+                  <a:srgbClr val="1F2328"/>
+                </a:solidFill>
+                <a:effectLst/>
+                <a:latin typeface="Arial" panose="020B0604020202020204" pitchFamily="34" charset="0"/>
+                <a:cs typeface="Arial" panose="020B0604020202020204" pitchFamily="34" charset="0"/>
+              </a:rPr>
+              <a:t> -c unlimited; ./</a:t>
+            </a:r>
+            <a:r>
+              <a:rPr lang="en-US" sz="4400" b="1" i="0" dirty="0" err="1">
+                <a:solidFill>
+                  <a:srgbClr val="1F2328"/>
+                </a:solidFill>
+                <a:effectLst/>
+                <a:latin typeface="Arial" panose="020B0604020202020204" pitchFamily="34" charset="0"/>
+                <a:cs typeface="Arial" panose="020B0604020202020204" pitchFamily="34" charset="0"/>
+              </a:rPr>
+              <a:t>a.out</a:t>
+            </a:r>
+            <a:r>
+              <a:rPr lang="en-US" sz="4400" b="1" i="0" dirty="0">
+                <a:solidFill>
+                  <a:srgbClr val="1F2328"/>
+                </a:solidFill>
+                <a:effectLst/>
+                <a:latin typeface="Arial" panose="020B0604020202020204" pitchFamily="34" charset="0"/>
+                <a:cs typeface="Arial" panose="020B0604020202020204" pitchFamily="34" charset="0"/>
+              </a:rPr>
+              <a:t> </a:t>
+            </a:r>
+            <a:r>
+              <a:rPr lang="en-US" sz="4400" b="0" i="0" dirty="0">
+                <a:solidFill>
+                  <a:srgbClr val="1F2328"/>
+                </a:solidFill>
+                <a:effectLst/>
+                <a:latin typeface="Arial" panose="020B0604020202020204" pitchFamily="34" charset="0"/>
+                <a:cs typeface="Arial" panose="020B0604020202020204" pitchFamily="34" charset="0"/>
+              </a:rPr>
+              <a:t>– </a:t>
+            </a:r>
+            <a:r>
+              <a:rPr lang="ru-RU" sz="4400" b="0" i="0" dirty="0">
+                <a:solidFill>
+                  <a:srgbClr val="1F2328"/>
+                </a:solidFill>
+                <a:effectLst/>
+                <a:latin typeface="Arial" panose="020B0604020202020204" pitchFamily="34" charset="0"/>
+                <a:cs typeface="Arial" panose="020B0604020202020204" pitchFamily="34" charset="0"/>
+              </a:rPr>
+              <a:t>убрать ограничения на размер корок и собрать </a:t>
+            </a:r>
+            <a:r>
+              <a:rPr lang="en-US" sz="4400" b="0" i="0" dirty="0" err="1">
+                <a:solidFill>
+                  <a:srgbClr val="1F2328"/>
+                </a:solidFill>
+                <a:effectLst/>
+                <a:latin typeface="Arial" panose="020B0604020202020204" pitchFamily="34" charset="0"/>
+                <a:cs typeface="Arial" panose="020B0604020202020204" pitchFamily="34" charset="0"/>
+              </a:rPr>
+              <a:t>coredump</a:t>
+            </a:r>
+            <a:endParaRPr lang="en-US" sz="4400" b="0" i="0" dirty="0">
+              <a:solidFill>
+                <a:srgbClr val="1F2328"/>
+              </a:solidFill>
+              <a:effectLst/>
+              <a:latin typeface="Arial" panose="020B0604020202020204" pitchFamily="34" charset="0"/>
+              <a:cs typeface="Arial" panose="020B0604020202020204" pitchFamily="34" charset="0"/>
+            </a:endParaRPr>
+          </a:p>
+          <a:p>
+            <a:pPr marL="285750" indent="-285750">
+              <a:buFont typeface="Arial" panose="020B0604020202020204" pitchFamily="34" charset="0"/>
+              <a:buChar char="•"/>
+            </a:pPr>
+            <a:r>
+              <a:rPr lang="en-US" sz="4400" b="1" i="0" dirty="0" err="1">
+                <a:solidFill>
+                  <a:srgbClr val="1F2328"/>
+                </a:solidFill>
+                <a:effectLst/>
+                <a:latin typeface="Arial" panose="020B0604020202020204" pitchFamily="34" charset="0"/>
+                <a:cs typeface="Arial" panose="020B0604020202020204" pitchFamily="34" charset="0"/>
+              </a:rPr>
+              <a:t>gdb</a:t>
+            </a:r>
+            <a:r>
+              <a:rPr lang="en-US" sz="4400" b="1" i="0" dirty="0">
+                <a:solidFill>
+                  <a:srgbClr val="1F2328"/>
+                </a:solidFill>
+                <a:effectLst/>
+                <a:latin typeface="Arial" panose="020B0604020202020204" pitchFamily="34" charset="0"/>
+                <a:cs typeface="Arial" panose="020B0604020202020204" pitchFamily="34" charset="0"/>
+              </a:rPr>
+              <a:t> ./</a:t>
+            </a:r>
+            <a:r>
+              <a:rPr lang="en-US" sz="4400" b="1" i="0" dirty="0" err="1">
+                <a:solidFill>
+                  <a:srgbClr val="1F2328"/>
+                </a:solidFill>
+                <a:effectLst/>
+                <a:latin typeface="Arial" panose="020B0604020202020204" pitchFamily="34" charset="0"/>
+                <a:cs typeface="Arial" panose="020B0604020202020204" pitchFamily="34" charset="0"/>
+              </a:rPr>
+              <a:t>a.out</a:t>
+            </a:r>
+            <a:r>
+              <a:rPr lang="en-US" sz="4400" b="1" i="0" dirty="0">
+                <a:solidFill>
+                  <a:srgbClr val="1F2328"/>
+                </a:solidFill>
+                <a:effectLst/>
+                <a:latin typeface="Arial" panose="020B0604020202020204" pitchFamily="34" charset="0"/>
+                <a:cs typeface="Arial" panose="020B0604020202020204" pitchFamily="34" charset="0"/>
+              </a:rPr>
+              <a:t> ./</a:t>
+            </a:r>
+            <a:r>
+              <a:rPr lang="en-US" sz="4400" b="1" i="0" dirty="0" err="1">
+                <a:solidFill>
+                  <a:srgbClr val="1F2328"/>
+                </a:solidFill>
+                <a:effectLst/>
+                <a:latin typeface="Arial" panose="020B0604020202020204" pitchFamily="34" charset="0"/>
+                <a:cs typeface="Arial" panose="020B0604020202020204" pitchFamily="34" charset="0"/>
+              </a:rPr>
+              <a:t>coredump</a:t>
+            </a:r>
+            <a:r>
+              <a:rPr lang="en-US" sz="4400" b="0" i="0" dirty="0">
+                <a:solidFill>
+                  <a:srgbClr val="1F2328"/>
+                </a:solidFill>
+                <a:effectLst/>
+                <a:latin typeface="Arial" panose="020B0604020202020204" pitchFamily="34" charset="0"/>
+                <a:cs typeface="Arial" panose="020B0604020202020204" pitchFamily="34" charset="0"/>
+              </a:rPr>
+              <a:t>… </a:t>
+            </a:r>
+            <a:r>
+              <a:rPr lang="ru-RU" sz="4400" dirty="0">
+                <a:solidFill>
+                  <a:srgbClr val="1F2328"/>
+                </a:solidFill>
+                <a:latin typeface="Arial" panose="020B0604020202020204" pitchFamily="34" charset="0"/>
+                <a:cs typeface="Arial" panose="020B0604020202020204" pitchFamily="34" charset="0"/>
+              </a:rPr>
+              <a:t>–</a:t>
+            </a:r>
+            <a:r>
+              <a:rPr lang="en-US" sz="4400" b="0" i="0" dirty="0">
+                <a:solidFill>
+                  <a:srgbClr val="1F2328"/>
+                </a:solidFill>
+                <a:effectLst/>
+                <a:latin typeface="Arial" panose="020B0604020202020204" pitchFamily="34" charset="0"/>
+                <a:cs typeface="Arial" panose="020B0604020202020204" pitchFamily="34" charset="0"/>
+              </a:rPr>
+              <a:t> </a:t>
+            </a:r>
+            <a:r>
+              <a:rPr lang="ru-RU" sz="4400" b="0" i="0" dirty="0">
+                <a:solidFill>
+                  <a:srgbClr val="1F2328"/>
+                </a:solidFill>
+                <a:effectLst/>
+                <a:latin typeface="Arial" panose="020B0604020202020204" pitchFamily="34" charset="0"/>
+                <a:cs typeface="Arial" panose="020B0604020202020204" pitchFamily="34" charset="0"/>
+              </a:rPr>
+              <a:t>запустить </a:t>
+            </a:r>
+            <a:r>
+              <a:rPr lang="en-US" sz="4400" b="0" i="0" dirty="0" err="1">
+                <a:solidFill>
+                  <a:srgbClr val="1F2328"/>
+                </a:solidFill>
+                <a:effectLst/>
+                <a:latin typeface="Arial" panose="020B0604020202020204" pitchFamily="34" charset="0"/>
+                <a:cs typeface="Arial" panose="020B0604020202020204" pitchFamily="34" charset="0"/>
+              </a:rPr>
+              <a:t>coredump</a:t>
+            </a:r>
+            <a:r>
+              <a:rPr lang="en-US" sz="4400" b="0" i="0" dirty="0">
+                <a:solidFill>
+                  <a:srgbClr val="1F2328"/>
+                </a:solidFill>
+                <a:effectLst/>
+                <a:latin typeface="Arial" panose="020B0604020202020204" pitchFamily="34" charset="0"/>
+                <a:cs typeface="Arial" panose="020B0604020202020204" pitchFamily="34" charset="0"/>
+              </a:rPr>
+              <a:t> </a:t>
+            </a:r>
+            <a:r>
+              <a:rPr lang="ru-RU" sz="4400" b="0" i="0" dirty="0">
+                <a:solidFill>
+                  <a:srgbClr val="1F2328"/>
+                </a:solidFill>
+                <a:effectLst/>
+                <a:latin typeface="Arial" panose="020B0604020202020204" pitchFamily="34" charset="0"/>
+                <a:cs typeface="Arial" panose="020B0604020202020204" pitchFamily="34" charset="0"/>
+              </a:rPr>
+              <a:t>в отладчике</a:t>
+            </a:r>
+            <a:endParaRPr lang="ru-RU" sz="4400" dirty="0">
+              <a:latin typeface="Arial" panose="020B0604020202020204" pitchFamily="34" charset="0"/>
+              <a:cs typeface="Arial" panose="020B0604020202020204" pitchFamily="34" charset="0"/>
+            </a:endParaRPr>
+          </a:p>
+        </p:txBody>
+      </p:sp>
+    </p:spTree>
+    <p:extLst>
+      <p:ext uri="{BB962C8B-B14F-4D97-AF65-F5344CB8AC3E}">
+        <p14:creationId xmlns:p14="http://schemas.microsoft.com/office/powerpoint/2010/main" val="2230057018"/>
+      </p:ext>
+    </p:extLst>
+  </p:cSld>
+  <p:clrMapOvr>
+    <a:masterClrMapping/>
+  </p:clrMapOvr>
+</p:sld>
+</file>
+
+<file path=ppt/slides/slide11.xml><?xml version="1.0" encoding="utf-8"?>
+<p:sld xmlns:a="http://schemas.openxmlformats.org/drawingml/2006/main" xmlns:r="http://schemas.openxmlformats.org/officeDocument/2006/relationships" xmlns:p="http://schemas.openxmlformats.org/presentationml/2006/main">
+  <p:cSld>
+    <p:spTree>
+      <p:nvGrpSpPr>
+        <p:cNvPr id="1" name=""/>
+        <p:cNvGrpSpPr/>
+        <p:nvPr/>
+      </p:nvGrpSpPr>
+      <p:grpSpPr>
+        <a:xfrm>
+          <a:off x="0" y="0"/>
+          <a:ext cx="0" cy="0"/>
+          <a:chOff x="0" y="0"/>
+          <a:chExt cx="0" cy="0"/>
+        </a:xfrm>
+      </p:grpSpPr>
+      <p:sp>
+        <p:nvSpPr>
+          <p:cNvPr id="2" name="Title 1">
+            <a:extLst>
+              <a:ext uri="{FF2B5EF4-FFF2-40B4-BE49-F238E27FC236}">
                 <a16:creationId xmlns:a16="http://schemas.microsoft.com/office/drawing/2014/main" id="{70C1309F-C22A-410F-8027-7C78B81B564D}"/>
               </a:ext>
             </a:extLst>
@@ -1572,7 +2012,7 @@
         <p:spPr>
           <a:xfrm>
             <a:off x="1076272" y="3513916"/>
-            <a:ext cx="17951555" cy="2708434"/>
+            <a:ext cx="17951555" cy="3385542"/>
           </a:xfrm>
         </p:spPr>
         <p:txBody>
@@ -1636,6 +2076,20 @@
                 <a:hlinkClick r:id="rId5"/>
               </a:rPr>
               <a:t>TUI documentation</a:t>
+            </a:r>
+            <a:endParaRPr lang="ru-RU" sz="4400" dirty="0">
+              <a:latin typeface="Arial" panose="020B0604020202020204" pitchFamily="34" charset="0"/>
+              <a:cs typeface="Arial" panose="020B0604020202020204" pitchFamily="34" charset="0"/>
+            </a:endParaRPr>
+          </a:p>
+          <a:p>
+            <a:r>
+              <a:rPr lang="en-US" sz="4400" dirty="0">
+                <a:latin typeface="Arial" panose="020B0604020202020204" pitchFamily="34" charset="0"/>
+                <a:cs typeface="Arial" panose="020B0604020202020204" pitchFamily="34" charset="0"/>
+                <a:hlinkClick r:id="rId6"/>
+              </a:rPr>
+              <a:t>GDB Essentials Overview</a:t>
             </a:r>
             <a:endParaRPr lang="ru-RU" sz="4400" dirty="0">
               <a:latin typeface="Arial" panose="020B0604020202020204" pitchFamily="34" charset="0"/>
@@ -1657,7 +2111,7 @@
 </p:sld>
 </file>
 
-<file path=ppt/slides/slide11.xml><?xml version="1.0" encoding="utf-8"?>
+<file path=ppt/slides/slide12.xml><?xml version="1.0" encoding="utf-8"?>
 <p:sld xmlns:a="http://schemas.openxmlformats.org/drawingml/2006/main" xmlns:r="http://schemas.openxmlformats.org/officeDocument/2006/relationships" xmlns:p="http://schemas.openxmlformats.org/presentationml/2006/main" showMasterSp="0">
   <p:cSld>
     <p:spTree>
@@ -1899,7 +2353,7 @@
 </p:sld>
 </file>
 
-<file path=ppt/slides/slide12.xml><?xml version="1.0" encoding="utf-8"?>
+<file path=ppt/slides/slide13.xml><?xml version="1.0" encoding="utf-8"?>
 <p:sld xmlns:a="http://schemas.openxmlformats.org/drawingml/2006/main" xmlns:r="http://schemas.openxmlformats.org/officeDocument/2006/relationships" xmlns:p="http://schemas.openxmlformats.org/presentationml/2006/main">
   <p:cSld>
     <p:spTree>
@@ -2086,7 +2540,7 @@
 </p:sld>
 </file>
 
-<file path=ppt/slides/slide13.xml><?xml version="1.0" encoding="utf-8"?>
+<file path=ppt/slides/slide14.xml><?xml version="1.0" encoding="utf-8"?>
 <p:sld xmlns:a="http://schemas.openxmlformats.org/drawingml/2006/main" xmlns:r="http://schemas.openxmlformats.org/officeDocument/2006/relationships" xmlns:p="http://schemas.openxmlformats.org/presentationml/2006/main">
   <p:cSld>
     <p:spTree>
@@ -2208,7 +2662,7 @@
 </p:sld>
 </file>
 
-<file path=ppt/slides/slide14.xml><?xml version="1.0" encoding="utf-8"?>
+<file path=ppt/slides/slide15.xml><?xml version="1.0" encoding="utf-8"?>
 <p:sld xmlns:a="http://schemas.openxmlformats.org/drawingml/2006/main" xmlns:r="http://schemas.openxmlformats.org/officeDocument/2006/relationships" xmlns:p="http://schemas.openxmlformats.org/presentationml/2006/main" showMasterSp="0">
   <p:cSld>
     <p:spTree>
@@ -3524,7 +3978,7 @@
 </p:sld>
 </file>
 
-<file path=ppt/slides/slide15.xml><?xml version="1.0" encoding="utf-8"?>
+<file path=ppt/slides/slide16.xml><?xml version="1.0" encoding="utf-8"?>
 <p:sld xmlns:a="http://schemas.openxmlformats.org/drawingml/2006/main" xmlns:r="http://schemas.openxmlformats.org/officeDocument/2006/relationships" xmlns:p="http://schemas.openxmlformats.org/presentationml/2006/main" showMasterSp="0">
   <p:cSld>
     <p:spTree>
@@ -4541,7 +4995,7 @@
 </p:sld>
 </file>
 
-<file path=ppt/slides/slide16.xml><?xml version="1.0" encoding="utf-8"?>
+<file path=ppt/slides/slide17.xml><?xml version="1.0" encoding="utf-8"?>
 <p:sld xmlns:a="http://schemas.openxmlformats.org/drawingml/2006/main" xmlns:r="http://schemas.openxmlformats.org/officeDocument/2006/relationships" xmlns:p="http://schemas.openxmlformats.org/presentationml/2006/main" showMasterSp="0">
   <p:cSld>
     <p:spTree>
@@ -9073,7 +9527,12 @@
             <p:ph type="title"/>
           </p:nvPr>
         </p:nvSpPr>
-        <p:spPr/>
+        <p:spPr>
+          <a:xfrm>
+            <a:off x="4938403" y="854075"/>
+            <a:ext cx="10227292" cy="3185487"/>
+          </a:xfrm>
+        </p:spPr>
         <p:txBody>
           <a:bodyPr/>
           <a:lstStyle/>
@@ -9081,7 +9540,7 @@
             <a:pPr algn="ctr"/>
             <a:r>
               <a:rPr lang="en-US" dirty="0"/>
-              <a:t>GDB</a:t>
+              <a:t>GDB (printing memory)</a:t>
             </a:r>
             <a:endParaRPr lang="ru-RU" dirty="0"/>
           </a:p>
@@ -9477,7 +9936,7 @@
           <p:cNvPr id="2" name="Title 1">
             <a:extLst>
               <a:ext uri="{FF2B5EF4-FFF2-40B4-BE49-F238E27FC236}">
-                <a16:creationId xmlns:a16="http://schemas.microsoft.com/office/drawing/2014/main" id="{37553EA2-7E76-4FF9-8FE5-11B0549C059D}"/>
+                <a16:creationId xmlns:a16="http://schemas.microsoft.com/office/drawing/2014/main" id="{EA2765C6-9B41-4C62-8D0F-034EB1550395}"/>
               </a:ext>
             </a:extLst>
           </p:cNvPr>
@@ -9490,17 +9949,18 @@
         </p:nvSpPr>
         <p:spPr>
           <a:xfrm>
-            <a:off x="7681603" y="701675"/>
-            <a:ext cx="4740892" cy="2123658"/>
+            <a:off x="4938403" y="854075"/>
+            <a:ext cx="10227292" cy="1061829"/>
           </a:xfrm>
         </p:spPr>
         <p:txBody>
           <a:bodyPr/>
           <a:lstStyle/>
           <a:p>
-            <a:r>
-              <a:rPr lang="en-US" dirty="0" err="1"/>
-              <a:t>Coredump</a:t>
+            <a:pPr algn="ctr"/>
+            <a:r>
+              <a:rPr lang="en-US" dirty="0"/>
+              <a:t>GDB (reverse execution)</a:t>
             </a:r>
             <a:endParaRPr lang="ru-RU" dirty="0"/>
           </a:p>
@@ -9511,7 +9971,7 @@
           <p:cNvPr id="3" name="Text Placeholder 2">
             <a:extLst>
               <a:ext uri="{FF2B5EF4-FFF2-40B4-BE49-F238E27FC236}">
-                <a16:creationId xmlns:a16="http://schemas.microsoft.com/office/drawing/2014/main" id="{5F37AFC8-3952-42C0-943F-8F8FCA12D31F}"/>
+                <a16:creationId xmlns:a16="http://schemas.microsoft.com/office/drawing/2014/main" id="{6437B215-BC65-4D52-AD05-028BEBF0A8AA}"/>
               </a:ext>
             </a:extLst>
           </p:cNvPr>
@@ -9524,367 +9984,287 @@
         </p:nvSpPr>
         <p:spPr>
           <a:xfrm>
-            <a:off x="1076272" y="3513916"/>
-            <a:ext cx="17951555" cy="3385542"/>
+            <a:off x="831850" y="3749675"/>
+            <a:ext cx="20193000" cy="3077766"/>
           </a:xfrm>
         </p:spPr>
         <p:txBody>
           <a:bodyPr/>
           <a:lstStyle/>
           <a:p>
-            <a:pPr marL="285750" indent="-285750">
+            <a:pPr marL="571500" indent="-571500">
               <a:buFont typeface="Arial" panose="020B0604020202020204" pitchFamily="34" charset="0"/>
               <a:buChar char="•"/>
             </a:pPr>
             <a:r>
-              <a:rPr lang="en-US" sz="4400" b="1" i="0" dirty="0" err="1">
-                <a:solidFill>
-                  <a:srgbClr val="1F2328"/>
-                </a:solidFill>
-                <a:effectLst/>
-                <a:latin typeface="Arial" panose="020B0604020202020204" pitchFamily="34" charset="0"/>
-                <a:cs typeface="Arial" panose="020B0604020202020204" pitchFamily="34" charset="0"/>
-              </a:rPr>
-              <a:t>sudo</a:t>
-            </a:r>
-            <a:r>
-              <a:rPr lang="en-US" sz="4400" b="1" i="0" dirty="0">
-                <a:solidFill>
-                  <a:srgbClr val="1F2328"/>
-                </a:solidFill>
-                <a:effectLst/>
-                <a:latin typeface="Arial" panose="020B0604020202020204" pitchFamily="34" charset="0"/>
-                <a:cs typeface="Arial" panose="020B0604020202020204" pitchFamily="34" charset="0"/>
-              </a:rPr>
-              <a:t> </a:t>
-            </a:r>
-            <a:r>
-              <a:rPr lang="en-US" sz="4400" b="1" i="0" dirty="0" err="1">
-                <a:solidFill>
-                  <a:srgbClr val="1F2328"/>
-                </a:solidFill>
-                <a:effectLst/>
-                <a:latin typeface="Arial" panose="020B0604020202020204" pitchFamily="34" charset="0"/>
-                <a:cs typeface="Arial" panose="020B0604020202020204" pitchFamily="34" charset="0"/>
-              </a:rPr>
-              <a:t>sysctl</a:t>
-            </a:r>
-            <a:r>
-              <a:rPr lang="en-US" sz="4400" b="1" i="0" dirty="0">
-                <a:solidFill>
-                  <a:srgbClr val="1F2328"/>
-                </a:solidFill>
-                <a:effectLst/>
-                <a:latin typeface="Arial" panose="020B0604020202020204" pitchFamily="34" charset="0"/>
-                <a:cs typeface="Arial" panose="020B0604020202020204" pitchFamily="34" charset="0"/>
-              </a:rPr>
-              <a:t> </a:t>
-            </a:r>
-            <a:r>
-              <a:rPr lang="en-US" sz="4400" b="1" i="0" dirty="0" err="1">
-                <a:solidFill>
-                  <a:srgbClr val="1F2328"/>
-                </a:solidFill>
-                <a:effectLst/>
-                <a:latin typeface="Arial" panose="020B0604020202020204" pitchFamily="34" charset="0"/>
-                <a:cs typeface="Arial" panose="020B0604020202020204" pitchFamily="34" charset="0"/>
-              </a:rPr>
-              <a:t>kernel.core_pattern</a:t>
-            </a:r>
-            <a:r>
-              <a:rPr lang="en-US" sz="4400" b="1" i="0" dirty="0">
-                <a:solidFill>
-                  <a:srgbClr val="1F2328"/>
-                </a:solidFill>
-                <a:effectLst/>
-                <a:latin typeface="Arial" panose="020B0604020202020204" pitchFamily="34" charset="0"/>
-                <a:cs typeface="Arial" panose="020B0604020202020204" pitchFamily="34" charset="0"/>
-              </a:rPr>
-              <a:t>= "./</a:t>
-            </a:r>
-            <a:r>
-              <a:rPr lang="en-US" sz="4400" b="1" i="0" dirty="0" err="1">
-                <a:solidFill>
-                  <a:srgbClr val="1F2328"/>
-                </a:solidFill>
-                <a:effectLst/>
-                <a:latin typeface="Arial" panose="020B0604020202020204" pitchFamily="34" charset="0"/>
-                <a:cs typeface="Arial" panose="020B0604020202020204" pitchFamily="34" charset="0"/>
-              </a:rPr>
-              <a:t>coredump</a:t>
-            </a:r>
-            <a:r>
-              <a:rPr lang="en-US" sz="4400" b="1" i="0" dirty="0">
-                <a:solidFill>
-                  <a:srgbClr val="1F2328"/>
-                </a:solidFill>
-                <a:effectLst/>
-                <a:latin typeface="Arial" panose="020B0604020202020204" pitchFamily="34" charset="0"/>
-                <a:cs typeface="Arial" panose="020B0604020202020204" pitchFamily="34" charset="0"/>
-              </a:rPr>
-              <a:t>" </a:t>
-            </a:r>
-            <a:r>
-              <a:rPr lang="en-US" sz="4400" b="0" i="0" dirty="0">
-                <a:solidFill>
-                  <a:srgbClr val="1F2328"/>
-                </a:solidFill>
-                <a:effectLst/>
-                <a:latin typeface="Arial" panose="020B0604020202020204" pitchFamily="34" charset="0"/>
-                <a:cs typeface="Arial" panose="020B0604020202020204" pitchFamily="34" charset="0"/>
-              </a:rPr>
-              <a:t>– </a:t>
-            </a:r>
-            <a:r>
-              <a:rPr lang="ru-RU" sz="4400" b="0" i="0" dirty="0">
-                <a:solidFill>
-                  <a:srgbClr val="1F2328"/>
-                </a:solidFill>
-                <a:effectLst/>
-                <a:latin typeface="Arial" panose="020B0604020202020204" pitchFamily="34" charset="0"/>
-                <a:cs typeface="Arial" panose="020B0604020202020204" pitchFamily="34" charset="0"/>
-              </a:rPr>
-              <a:t>установить сохранение корок в текущей директории</a:t>
-            </a:r>
-          </a:p>
-          <a:p>
-            <a:pPr marL="285750" indent="-285750">
+              <a:rPr lang="en-US" sz="4000" b="1" dirty="0">
+                <a:solidFill>
+                  <a:srgbClr val="000000"/>
+                </a:solidFill>
+                <a:latin typeface="Arial" panose="020B0604020202020204" pitchFamily="34" charset="0"/>
+                <a:cs typeface="Arial" panose="020B0604020202020204" pitchFamily="34" charset="0"/>
+              </a:rPr>
+              <a:t>record – </a:t>
+            </a:r>
+            <a:r>
+              <a:rPr lang="ru-RU" sz="4000" dirty="0">
+                <a:solidFill>
+                  <a:srgbClr val="000000"/>
+                </a:solidFill>
+                <a:latin typeface="Arial" panose="020B0604020202020204" pitchFamily="34" charset="0"/>
+                <a:cs typeface="Arial" panose="020B0604020202020204" pitchFamily="34" charset="0"/>
+              </a:rPr>
+              <a:t>начать запись исполнения</a:t>
+            </a:r>
+            <a:endParaRPr lang="en-US" sz="4000" dirty="0">
+              <a:solidFill>
+                <a:srgbClr val="000000"/>
+              </a:solidFill>
+              <a:latin typeface="Arial" panose="020B0604020202020204" pitchFamily="34" charset="0"/>
+              <a:cs typeface="Arial" panose="020B0604020202020204" pitchFamily="34" charset="0"/>
+            </a:endParaRPr>
+          </a:p>
+          <a:p>
+            <a:pPr marL="571500" indent="-571500">
               <a:buFont typeface="Arial" panose="020B0604020202020204" pitchFamily="34" charset="0"/>
               <a:buChar char="•"/>
             </a:pPr>
             <a:r>
-              <a:rPr lang="en-US" sz="4400" b="1" i="0" dirty="0" err="1">
-                <a:solidFill>
-                  <a:srgbClr val="1F2328"/>
-                </a:solidFill>
-                <a:effectLst/>
-                <a:latin typeface="Arial" panose="020B0604020202020204" pitchFamily="34" charset="0"/>
-                <a:cs typeface="Arial" panose="020B0604020202020204" pitchFamily="34" charset="0"/>
-              </a:rPr>
-              <a:t>ulimit</a:t>
-            </a:r>
-            <a:r>
-              <a:rPr lang="en-US" sz="4400" b="1" i="0" dirty="0">
-                <a:solidFill>
-                  <a:srgbClr val="1F2328"/>
-                </a:solidFill>
-                <a:effectLst/>
-                <a:latin typeface="Arial" panose="020B0604020202020204" pitchFamily="34" charset="0"/>
-                <a:cs typeface="Arial" panose="020B0604020202020204" pitchFamily="34" charset="0"/>
-              </a:rPr>
-              <a:t> -c unlimited; ./</a:t>
-            </a:r>
-            <a:r>
-              <a:rPr lang="en-US" sz="4400" b="1" i="0" dirty="0" err="1">
-                <a:solidFill>
-                  <a:srgbClr val="1F2328"/>
-                </a:solidFill>
-                <a:effectLst/>
-                <a:latin typeface="Arial" panose="020B0604020202020204" pitchFamily="34" charset="0"/>
-                <a:cs typeface="Arial" panose="020B0604020202020204" pitchFamily="34" charset="0"/>
-              </a:rPr>
-              <a:t>a.out</a:t>
-            </a:r>
-            <a:r>
-              <a:rPr lang="en-US" sz="4400" b="1" i="0" dirty="0">
-                <a:solidFill>
-                  <a:srgbClr val="1F2328"/>
-                </a:solidFill>
-                <a:effectLst/>
-                <a:latin typeface="Arial" panose="020B0604020202020204" pitchFamily="34" charset="0"/>
-                <a:cs typeface="Arial" panose="020B0604020202020204" pitchFamily="34" charset="0"/>
-              </a:rPr>
-              <a:t> </a:t>
-            </a:r>
-            <a:r>
-              <a:rPr lang="en-US" sz="4400" b="0" i="0" dirty="0">
-                <a:solidFill>
-                  <a:srgbClr val="1F2328"/>
-                </a:solidFill>
-                <a:effectLst/>
+              <a:rPr lang="en-US" sz="4000" b="1" i="0" u="none" strike="noStrike" baseline="0" dirty="0">
+                <a:solidFill>
+                  <a:srgbClr val="000000"/>
+                </a:solidFill>
+                <a:latin typeface="Arial" panose="020B0604020202020204" pitchFamily="34" charset="0"/>
+                <a:cs typeface="Arial" panose="020B0604020202020204" pitchFamily="34" charset="0"/>
+              </a:rPr>
+              <a:t>reverse-step / </a:t>
+            </a:r>
+            <a:r>
+              <a:rPr lang="en-US" sz="4000" b="1" i="0" u="none" strike="noStrike" baseline="0" dirty="0" err="1">
+                <a:solidFill>
+                  <a:srgbClr val="000000"/>
+                </a:solidFill>
+                <a:latin typeface="Arial" panose="020B0604020202020204" pitchFamily="34" charset="0"/>
+                <a:cs typeface="Arial" panose="020B0604020202020204" pitchFamily="34" charset="0"/>
+              </a:rPr>
+              <a:t>rs</a:t>
+            </a:r>
+            <a:r>
+              <a:rPr lang="en-US" sz="4000" b="1" i="0" u="none" strike="noStrike" baseline="0" dirty="0">
+                <a:solidFill>
+                  <a:srgbClr val="000000"/>
+                </a:solidFill>
+                <a:latin typeface="Arial" panose="020B0604020202020204" pitchFamily="34" charset="0"/>
+                <a:cs typeface="Arial" panose="020B0604020202020204" pitchFamily="34" charset="0"/>
+              </a:rPr>
+              <a:t> </a:t>
+            </a:r>
+            <a:r>
+              <a:rPr lang="en-US" sz="4000" b="0" i="0" u="none" strike="noStrike" baseline="0" dirty="0">
+                <a:solidFill>
+                  <a:srgbClr val="000000"/>
+                </a:solidFill>
                 <a:latin typeface="Arial" panose="020B0604020202020204" pitchFamily="34" charset="0"/>
                 <a:cs typeface="Arial" panose="020B0604020202020204" pitchFamily="34" charset="0"/>
               </a:rPr>
               <a:t>– </a:t>
             </a:r>
             <a:r>
-              <a:rPr lang="ru-RU" sz="4400" b="0" i="0" dirty="0">
-                <a:solidFill>
-                  <a:srgbClr val="1F2328"/>
-                </a:solidFill>
-                <a:effectLst/>
-                <a:latin typeface="Arial" panose="020B0604020202020204" pitchFamily="34" charset="0"/>
-                <a:cs typeface="Arial" panose="020B0604020202020204" pitchFamily="34" charset="0"/>
-              </a:rPr>
-              <a:t>убрать ограничения на размер корок и собрать </a:t>
-            </a:r>
-            <a:r>
-              <a:rPr lang="en-US" sz="4400" b="0" i="0" dirty="0" err="1">
-                <a:solidFill>
-                  <a:srgbClr val="1F2328"/>
-                </a:solidFill>
-                <a:effectLst/>
-                <a:latin typeface="Arial" panose="020B0604020202020204" pitchFamily="34" charset="0"/>
-                <a:cs typeface="Arial" panose="020B0604020202020204" pitchFamily="34" charset="0"/>
-              </a:rPr>
-              <a:t>coredump</a:t>
-            </a:r>
-            <a:endParaRPr lang="en-US" sz="4400" b="0" i="0" dirty="0">
+              <a:rPr lang="ru-RU" sz="4000" b="0" i="0" u="none" strike="noStrike" baseline="0" dirty="0">
+                <a:solidFill>
+                  <a:srgbClr val="000000"/>
+                </a:solidFill>
+                <a:latin typeface="Arial" panose="020B0604020202020204" pitchFamily="34" charset="0"/>
+                <a:cs typeface="Arial" panose="020B0604020202020204" pitchFamily="34" charset="0"/>
+              </a:rPr>
+              <a:t>шаг в обратном направлении (с заходом в функцию)</a:t>
+            </a:r>
+            <a:endParaRPr lang="en-US" sz="4000" b="0" i="0" u="none" strike="noStrike" baseline="0" dirty="0">
               <a:solidFill>
-                <a:srgbClr val="1F2328"/>
+                <a:srgbClr val="000000"/>
               </a:solidFill>
-              <a:effectLst/>
               <a:latin typeface="Arial" panose="020B0604020202020204" pitchFamily="34" charset="0"/>
               <a:cs typeface="Arial" panose="020B0604020202020204" pitchFamily="34" charset="0"/>
             </a:endParaRPr>
           </a:p>
           <a:p>
-            <a:pPr marL="285750" indent="-285750">
+            <a:pPr marL="571500" indent="-571500">
               <a:buFont typeface="Arial" panose="020B0604020202020204" pitchFamily="34" charset="0"/>
               <a:buChar char="•"/>
             </a:pPr>
             <a:r>
-              <a:rPr lang="en-US" sz="4400" b="1" i="0" dirty="0" err="1">
-                <a:solidFill>
-                  <a:srgbClr val="1F2328"/>
-                </a:solidFill>
-                <a:effectLst/>
-                <a:latin typeface="Arial" panose="020B0604020202020204" pitchFamily="34" charset="0"/>
-                <a:cs typeface="Arial" panose="020B0604020202020204" pitchFamily="34" charset="0"/>
-              </a:rPr>
-              <a:t>gdb</a:t>
-            </a:r>
-            <a:r>
-              <a:rPr lang="en-US" sz="4400" b="1" i="0" dirty="0">
-                <a:solidFill>
-                  <a:srgbClr val="1F2328"/>
-                </a:solidFill>
-                <a:effectLst/>
-                <a:latin typeface="Arial" panose="020B0604020202020204" pitchFamily="34" charset="0"/>
-                <a:cs typeface="Arial" panose="020B0604020202020204" pitchFamily="34" charset="0"/>
-              </a:rPr>
-              <a:t> ./</a:t>
-            </a:r>
-            <a:r>
-              <a:rPr lang="en-US" sz="4400" b="1" i="0" dirty="0" err="1">
-                <a:solidFill>
-                  <a:srgbClr val="1F2328"/>
-                </a:solidFill>
-                <a:effectLst/>
-                <a:latin typeface="Arial" panose="020B0604020202020204" pitchFamily="34" charset="0"/>
-                <a:cs typeface="Arial" panose="020B0604020202020204" pitchFamily="34" charset="0"/>
-              </a:rPr>
-              <a:t>a.out</a:t>
-            </a:r>
-            <a:r>
-              <a:rPr lang="en-US" sz="4400" b="1" i="0" dirty="0">
-                <a:solidFill>
-                  <a:srgbClr val="1F2328"/>
-                </a:solidFill>
-                <a:effectLst/>
-                <a:latin typeface="Arial" panose="020B0604020202020204" pitchFamily="34" charset="0"/>
-                <a:cs typeface="Arial" panose="020B0604020202020204" pitchFamily="34" charset="0"/>
-              </a:rPr>
-              <a:t> ./</a:t>
-            </a:r>
-            <a:r>
-              <a:rPr lang="en-US" sz="4400" b="1" i="0" dirty="0" err="1">
-                <a:solidFill>
-                  <a:srgbClr val="1F2328"/>
-                </a:solidFill>
-                <a:effectLst/>
-                <a:latin typeface="Arial" panose="020B0604020202020204" pitchFamily="34" charset="0"/>
-                <a:cs typeface="Arial" panose="020B0604020202020204" pitchFamily="34" charset="0"/>
-              </a:rPr>
-              <a:t>coredump</a:t>
-            </a:r>
-            <a:r>
-              <a:rPr lang="en-US" sz="4400" b="0" i="0" dirty="0">
-                <a:solidFill>
-                  <a:srgbClr val="1F2328"/>
-                </a:solidFill>
-                <a:effectLst/>
-                <a:latin typeface="Arial" panose="020B0604020202020204" pitchFamily="34" charset="0"/>
-                <a:cs typeface="Arial" panose="020B0604020202020204" pitchFamily="34" charset="0"/>
-              </a:rPr>
-              <a:t>… </a:t>
-            </a:r>
-            <a:r>
-              <a:rPr lang="ru-RU" sz="4400" dirty="0">
-                <a:solidFill>
-                  <a:srgbClr val="1F2328"/>
-                </a:solidFill>
-                <a:latin typeface="Arial" panose="020B0604020202020204" pitchFamily="34" charset="0"/>
-                <a:cs typeface="Arial" panose="020B0604020202020204" pitchFamily="34" charset="0"/>
-              </a:rPr>
-              <a:t>–</a:t>
-            </a:r>
-            <a:r>
-              <a:rPr lang="en-US" sz="4400" b="0" i="0" dirty="0">
-                <a:solidFill>
-                  <a:srgbClr val="1F2328"/>
-                </a:solidFill>
-                <a:effectLst/>
-                <a:latin typeface="Arial" panose="020B0604020202020204" pitchFamily="34" charset="0"/>
-                <a:cs typeface="Arial" panose="020B0604020202020204" pitchFamily="34" charset="0"/>
-              </a:rPr>
-              <a:t> </a:t>
-            </a:r>
-            <a:r>
-              <a:rPr lang="ru-RU" sz="4400" b="0" i="0" dirty="0">
-                <a:solidFill>
-                  <a:srgbClr val="1F2328"/>
-                </a:solidFill>
-                <a:effectLst/>
-                <a:latin typeface="Arial" panose="020B0604020202020204" pitchFamily="34" charset="0"/>
-                <a:cs typeface="Arial" panose="020B0604020202020204" pitchFamily="34" charset="0"/>
-              </a:rPr>
-              <a:t>запустить </a:t>
-            </a:r>
-            <a:r>
-              <a:rPr lang="en-US" sz="4400" b="0" i="0" dirty="0" err="1">
-                <a:solidFill>
-                  <a:srgbClr val="1F2328"/>
-                </a:solidFill>
-                <a:effectLst/>
-                <a:latin typeface="Arial" panose="020B0604020202020204" pitchFamily="34" charset="0"/>
-                <a:cs typeface="Arial" panose="020B0604020202020204" pitchFamily="34" charset="0"/>
-              </a:rPr>
-              <a:t>coredump</a:t>
-            </a:r>
-            <a:r>
-              <a:rPr lang="en-US" sz="4400" b="0" i="0" dirty="0">
-                <a:solidFill>
-                  <a:srgbClr val="1F2328"/>
-                </a:solidFill>
-                <a:effectLst/>
-                <a:latin typeface="Arial" panose="020B0604020202020204" pitchFamily="34" charset="0"/>
-                <a:cs typeface="Arial" panose="020B0604020202020204" pitchFamily="34" charset="0"/>
-              </a:rPr>
-              <a:t> </a:t>
-            </a:r>
-            <a:r>
-              <a:rPr lang="ru-RU" sz="4400" b="0" i="0" dirty="0">
-                <a:solidFill>
-                  <a:srgbClr val="1F2328"/>
-                </a:solidFill>
-                <a:effectLst/>
-                <a:latin typeface="Arial" panose="020B0604020202020204" pitchFamily="34" charset="0"/>
-                <a:cs typeface="Arial" panose="020B0604020202020204" pitchFamily="34" charset="0"/>
-              </a:rPr>
-              <a:t>в отладчике</a:t>
-            </a:r>
-            <a:endParaRPr lang="ru-RU" sz="4400" dirty="0">
+              <a:rPr lang="en-US" sz="4000" b="1" i="0" u="none" strike="noStrike" baseline="0" dirty="0">
+                <a:solidFill>
+                  <a:srgbClr val="000000"/>
+                </a:solidFill>
+                <a:latin typeface="Arial" panose="020B0604020202020204" pitchFamily="34" charset="0"/>
+                <a:cs typeface="Arial" panose="020B0604020202020204" pitchFamily="34" charset="0"/>
+              </a:rPr>
+              <a:t>reverse-next / </a:t>
+            </a:r>
+            <a:r>
+              <a:rPr lang="en-US" sz="4000" b="1" i="0" u="none" strike="noStrike" baseline="0" dirty="0" err="1">
+                <a:solidFill>
+                  <a:srgbClr val="000000"/>
+                </a:solidFill>
+                <a:latin typeface="Arial" panose="020B0604020202020204" pitchFamily="34" charset="0"/>
+                <a:cs typeface="Arial" panose="020B0604020202020204" pitchFamily="34" charset="0"/>
+              </a:rPr>
+              <a:t>rn</a:t>
+            </a:r>
+            <a:r>
+              <a:rPr lang="en-US" sz="4000" b="1" i="0" u="none" strike="noStrike" baseline="0" dirty="0">
+                <a:solidFill>
+                  <a:srgbClr val="000000"/>
+                </a:solidFill>
+                <a:latin typeface="Arial" panose="020B0604020202020204" pitchFamily="34" charset="0"/>
+                <a:cs typeface="Arial" panose="020B0604020202020204" pitchFamily="34" charset="0"/>
+              </a:rPr>
+              <a:t> </a:t>
+            </a:r>
+            <a:r>
+              <a:rPr lang="en-US" sz="4000" b="0" i="0" u="none" strike="noStrike" baseline="0" dirty="0">
+                <a:solidFill>
+                  <a:srgbClr val="000000"/>
+                </a:solidFill>
+                <a:latin typeface="Arial" panose="020B0604020202020204" pitchFamily="34" charset="0"/>
+                <a:cs typeface="Arial" panose="020B0604020202020204" pitchFamily="34" charset="0"/>
+              </a:rPr>
+              <a:t>– </a:t>
+            </a:r>
+            <a:r>
+              <a:rPr lang="ru-RU" sz="4000" b="0" i="0" u="none" strike="noStrike" baseline="0" dirty="0">
+                <a:solidFill>
+                  <a:srgbClr val="000000"/>
+                </a:solidFill>
+                <a:latin typeface="Arial" panose="020B0604020202020204" pitchFamily="34" charset="0"/>
+                <a:cs typeface="Arial" panose="020B0604020202020204" pitchFamily="34" charset="0"/>
+              </a:rPr>
+              <a:t>шаг в обратном направлении (без захода в функцию)</a:t>
+            </a:r>
+            <a:endParaRPr lang="en-US" sz="4000" b="0" i="0" u="none" strike="noStrike" baseline="0" dirty="0">
+              <a:solidFill>
+                <a:srgbClr val="000000"/>
+              </a:solidFill>
               <a:latin typeface="Arial" panose="020B0604020202020204" pitchFamily="34" charset="0"/>
               <a:cs typeface="Arial" panose="020B0604020202020204" pitchFamily="34" charset="0"/>
             </a:endParaRPr>
+          </a:p>
+          <a:p>
+            <a:pPr marL="571500" indent="-571500">
+              <a:buFont typeface="Arial" panose="020B0604020202020204" pitchFamily="34" charset="0"/>
+              <a:buChar char="•"/>
+            </a:pPr>
+            <a:r>
+              <a:rPr lang="en-US" sz="4000" b="1" i="0" u="none" strike="noStrike" baseline="0" dirty="0">
+                <a:solidFill>
+                  <a:srgbClr val="000000"/>
+                </a:solidFill>
+                <a:latin typeface="Arial" panose="020B0604020202020204" pitchFamily="34" charset="0"/>
+                <a:cs typeface="Arial" panose="020B0604020202020204" pitchFamily="34" charset="0"/>
+              </a:rPr>
+              <a:t>reverse-finish </a:t>
+            </a:r>
+            <a:r>
+              <a:rPr lang="en-US" sz="4000" b="0" i="0" u="none" strike="noStrike" baseline="0" dirty="0">
+                <a:solidFill>
+                  <a:srgbClr val="000000"/>
+                </a:solidFill>
+                <a:latin typeface="Arial" panose="020B0604020202020204" pitchFamily="34" charset="0"/>
+                <a:cs typeface="Arial" panose="020B0604020202020204" pitchFamily="34" charset="0"/>
+              </a:rPr>
+              <a:t>– </a:t>
+            </a:r>
+            <a:r>
+              <a:rPr lang="ru-RU" sz="4000" b="0" i="0" u="none" strike="noStrike" baseline="0" dirty="0">
+                <a:solidFill>
+                  <a:srgbClr val="000000"/>
+                </a:solidFill>
+                <a:latin typeface="Arial" panose="020B0604020202020204" pitchFamily="34" charset="0"/>
+                <a:cs typeface="Arial" panose="020B0604020202020204" pitchFamily="34" charset="0"/>
+              </a:rPr>
+              <a:t>шагать в обратном направлении до точки вызова функции</a:t>
+            </a:r>
+            <a:endParaRPr lang="en-US" sz="4000" b="0" i="0" u="none" strike="noStrike" baseline="0" dirty="0">
+              <a:solidFill>
+                <a:srgbClr val="000000"/>
+              </a:solidFill>
+              <a:latin typeface="Arial" panose="020B0604020202020204" pitchFamily="34" charset="0"/>
+              <a:cs typeface="Arial" panose="020B0604020202020204" pitchFamily="34" charset="0"/>
+            </a:endParaRPr>
+          </a:p>
+          <a:p>
+            <a:pPr marL="571500" indent="-571500">
+              <a:buFont typeface="Arial" panose="020B0604020202020204" pitchFamily="34" charset="0"/>
+              <a:buChar char="•"/>
+            </a:pPr>
+            <a:r>
+              <a:rPr lang="en-US" sz="4000" b="1" i="0" u="none" strike="noStrike" baseline="0" dirty="0">
+                <a:solidFill>
+                  <a:srgbClr val="000000"/>
+                </a:solidFill>
+                <a:latin typeface="Arial" panose="020B0604020202020204" pitchFamily="34" charset="0"/>
+                <a:cs typeface="Arial" panose="020B0604020202020204" pitchFamily="34" charset="0"/>
+              </a:rPr>
+              <a:t>reverse-continue / </a:t>
+            </a:r>
+            <a:r>
+              <a:rPr lang="en-US" sz="4000" b="1" i="0" u="none" strike="noStrike" baseline="0" dirty="0" err="1">
+                <a:solidFill>
+                  <a:srgbClr val="000000"/>
+                </a:solidFill>
+                <a:latin typeface="Arial" panose="020B0604020202020204" pitchFamily="34" charset="0"/>
+                <a:cs typeface="Arial" panose="020B0604020202020204" pitchFamily="34" charset="0"/>
+              </a:rPr>
+              <a:t>rc</a:t>
+            </a:r>
+            <a:r>
+              <a:rPr lang="en-US" sz="4000" b="1" i="0" u="none" strike="noStrike" baseline="0" dirty="0">
+                <a:solidFill>
+                  <a:srgbClr val="000000"/>
+                </a:solidFill>
+                <a:latin typeface="Arial" panose="020B0604020202020204" pitchFamily="34" charset="0"/>
+                <a:cs typeface="Arial" panose="020B0604020202020204" pitchFamily="34" charset="0"/>
+              </a:rPr>
+              <a:t> </a:t>
+            </a:r>
+            <a:r>
+              <a:rPr lang="en-US" sz="4000" b="0" i="0" u="none" strike="noStrike" baseline="0" dirty="0">
+                <a:solidFill>
+                  <a:srgbClr val="000000"/>
+                </a:solidFill>
+                <a:latin typeface="Arial" panose="020B0604020202020204" pitchFamily="34" charset="0"/>
+                <a:cs typeface="Arial" panose="020B0604020202020204" pitchFamily="34" charset="0"/>
+              </a:rPr>
+              <a:t>– </a:t>
+            </a:r>
+            <a:r>
+              <a:rPr lang="ru-RU" sz="4000" b="0" i="0" u="none" strike="noStrike" baseline="0" dirty="0">
+                <a:solidFill>
+                  <a:srgbClr val="000000"/>
+                </a:solidFill>
+                <a:latin typeface="Arial" panose="020B0604020202020204" pitchFamily="34" charset="0"/>
+                <a:cs typeface="Arial" panose="020B0604020202020204" pitchFamily="34" charset="0"/>
+              </a:rPr>
+              <a:t>продолжить исполнение до следующего </a:t>
+            </a:r>
+            <a:r>
+              <a:rPr lang="en-US" sz="4000" b="0" i="0" u="none" strike="noStrike" baseline="0" dirty="0">
+                <a:solidFill>
+                  <a:srgbClr val="000000"/>
+                </a:solidFill>
+                <a:latin typeface="Arial" panose="020B0604020202020204" pitchFamily="34" charset="0"/>
+                <a:cs typeface="Arial" panose="020B0604020202020204" pitchFamily="34" charset="0"/>
+              </a:rPr>
+              <a:t>breakpoint</a:t>
+            </a:r>
           </a:p>
         </p:txBody>
       </p:sp>
     </p:spTree>
     <p:extLst>
       <p:ext uri="{BB962C8B-B14F-4D97-AF65-F5344CB8AC3E}">
-        <p14:creationId xmlns:p14="http://schemas.microsoft.com/office/powerpoint/2010/main" val="2230057018"/>
+        <p14:creationId xmlns:p14="http://schemas.microsoft.com/office/powerpoint/2010/main" val="2939867100"/>
       </p:ext>
     </p:extLst>
   </p:cSld>

--- a/sem_1_tools/presentations/Семинар_1_tools.pptx
+++ b/sem_1_tools/presentations/Семинар_1_tools.pptx
@@ -278,7 +278,7 @@
           <a:p>
             <a:fld id="{1D8BD707-D9CF-40AE-B4C6-C98DA3205C09}" type="datetimeFigureOut">
               <a:rPr lang="en-US"/>
-              <a:t>9/11/2025</a:t>
+              <a:t>9/2/2026</a:t>
             </a:fld>
             <a:endParaRPr lang="en-US"/>
           </a:p>
@@ -453,7 +453,7 @@
           <a:p>
             <a:fld id="{1D8BD707-D9CF-40AE-B4C6-C98DA3205C09}" type="datetimeFigureOut">
               <a:rPr lang="en-US"/>
-              <a:t>9/11/2025</a:t>
+              <a:t>9/2/2026</a:t>
             </a:fld>
             <a:endParaRPr lang="en-US"/>
           </a:p>
@@ -667,7 +667,7 @@
           <a:p>
             <a:fld id="{1D8BD707-D9CF-40AE-B4C6-C98DA3205C09}" type="datetimeFigureOut">
               <a:rPr lang="en-US"/>
-              <a:t>9/11/2025</a:t>
+              <a:t>9/2/2026</a:t>
             </a:fld>
             <a:endParaRPr lang="en-US"/>
           </a:p>
@@ -815,7 +815,7 @@
           <a:p>
             <a:fld id="{1D8BD707-D9CF-40AE-B4C6-C98DA3205C09}" type="datetimeFigureOut">
               <a:rPr lang="en-US"/>
-              <a:t>9/11/2025</a:t>
+              <a:t>9/2/2026</a:t>
             </a:fld>
             <a:endParaRPr lang="en-US"/>
           </a:p>
@@ -934,7 +934,7 @@
           <a:p>
             <a:fld id="{1D8BD707-D9CF-40AE-B4C6-C98DA3205C09}" type="datetimeFigureOut">
               <a:rPr lang="en-US"/>
-              <a:t>9/11/2025</a:t>
+              <a:t>9/2/2026</a:t>
             </a:fld>
             <a:endParaRPr lang="en-US"/>
           </a:p>
@@ -1157,7 +1157,7 @@
           <a:p>
             <a:fld id="{1D8BD707-D9CF-40AE-B4C6-C98DA3205C09}" type="datetimeFigureOut">
               <a:rPr lang="en-US"/>
-              <a:t>9/11/2025</a:t>
+              <a:t>9/2/2026</a:t>
             </a:fld>
             <a:endParaRPr lang="en-US"/>
           </a:p>
@@ -1590,81 +1590,84 @@
               <a:buChar char="•"/>
             </a:pPr>
             <a:r>
-              <a:rPr lang="en-US" sz="4400" b="1" i="0" dirty="0" err="1">
+              <a:rPr lang="en-US" sz="4400" b="1" dirty="0" err="1">
                 <a:solidFill>
                   <a:srgbClr val="1F2328"/>
                 </a:solidFill>
-                <a:effectLst/>
                 <a:latin typeface="Arial" panose="020B0604020202020204" pitchFamily="34" charset="0"/>
                 <a:cs typeface="Arial" panose="020B0604020202020204" pitchFamily="34" charset="0"/>
               </a:rPr>
               <a:t>sudo</a:t>
             </a:r>
             <a:r>
-              <a:rPr lang="en-US" sz="4400" b="1" i="0" dirty="0">
+              <a:rPr lang="en-US" sz="4400" b="1" dirty="0">
                 <a:solidFill>
                   <a:srgbClr val="1F2328"/>
                 </a:solidFill>
-                <a:effectLst/>
-                <a:latin typeface="Arial" panose="020B0604020202020204" pitchFamily="34" charset="0"/>
-                <a:cs typeface="Arial" panose="020B0604020202020204" pitchFamily="34" charset="0"/>
-              </a:rPr>
-              <a:t> </a:t>
-            </a:r>
-            <a:r>
-              <a:rPr lang="en-US" sz="4400" b="1" i="0" dirty="0" err="1">
+                <a:latin typeface="Arial" panose="020B0604020202020204" pitchFamily="34" charset="0"/>
+                <a:cs typeface="Arial" panose="020B0604020202020204" pitchFamily="34" charset="0"/>
+              </a:rPr>
+              <a:t> </a:t>
+            </a:r>
+            <a:r>
+              <a:rPr lang="en-US" sz="4400" b="1" dirty="0" err="1">
                 <a:solidFill>
                   <a:srgbClr val="1F2328"/>
                 </a:solidFill>
-                <a:effectLst/>
                 <a:latin typeface="Arial" panose="020B0604020202020204" pitchFamily="34" charset="0"/>
                 <a:cs typeface="Arial" panose="020B0604020202020204" pitchFamily="34" charset="0"/>
               </a:rPr>
               <a:t>sysctl</a:t>
             </a:r>
             <a:r>
-              <a:rPr lang="en-US" sz="4400" b="1" i="0" dirty="0">
+              <a:rPr lang="en-US" sz="4400" b="1" dirty="0">
                 <a:solidFill>
                   <a:srgbClr val="1F2328"/>
                 </a:solidFill>
-                <a:effectLst/>
-                <a:latin typeface="Arial" panose="020B0604020202020204" pitchFamily="34" charset="0"/>
-                <a:cs typeface="Arial" panose="020B0604020202020204" pitchFamily="34" charset="0"/>
-              </a:rPr>
-              <a:t> </a:t>
-            </a:r>
-            <a:r>
-              <a:rPr lang="en-US" sz="4400" b="1" i="0" dirty="0" err="1">
+                <a:latin typeface="Arial" panose="020B0604020202020204" pitchFamily="34" charset="0"/>
+                <a:cs typeface="Arial" panose="020B0604020202020204" pitchFamily="34" charset="0"/>
+              </a:rPr>
+              <a:t> -w </a:t>
+            </a:r>
+            <a:r>
+              <a:rPr lang="en-US" sz="4400" b="1" dirty="0" err="1">
                 <a:solidFill>
                   <a:srgbClr val="1F2328"/>
                 </a:solidFill>
-                <a:effectLst/>
                 <a:latin typeface="Arial" panose="020B0604020202020204" pitchFamily="34" charset="0"/>
                 <a:cs typeface="Arial" panose="020B0604020202020204" pitchFamily="34" charset="0"/>
               </a:rPr>
               <a:t>kernel.core_pattern</a:t>
             </a:r>
             <a:r>
-              <a:rPr lang="en-US" sz="4400" b="1" i="0" dirty="0">
+              <a:rPr lang="en-US" sz="4400" b="1" dirty="0">
                 <a:solidFill>
                   <a:srgbClr val="1F2328"/>
                 </a:solidFill>
-                <a:effectLst/>
-                <a:latin typeface="Arial" panose="020B0604020202020204" pitchFamily="34" charset="0"/>
-                <a:cs typeface="Arial" panose="020B0604020202020204" pitchFamily="34" charset="0"/>
-              </a:rPr>
-              <a:t>= "./</a:t>
-            </a:r>
-            <a:r>
-              <a:rPr lang="en-US" sz="4400" b="1" i="0" dirty="0" err="1">
+                <a:latin typeface="Arial" panose="020B0604020202020204" pitchFamily="34" charset="0"/>
+                <a:cs typeface="Arial" panose="020B0604020202020204" pitchFamily="34" charset="0"/>
+              </a:rPr>
+              <a:t>="./</a:t>
+            </a:r>
+            <a:r>
+              <a:rPr lang="en-US" sz="4400" b="1" dirty="0" err="1">
                 <a:solidFill>
                   <a:srgbClr val="1F2328"/>
                 </a:solidFill>
-                <a:effectLst/>
                 <a:latin typeface="Arial" panose="020B0604020202020204" pitchFamily="34" charset="0"/>
                 <a:cs typeface="Arial" panose="020B0604020202020204" pitchFamily="34" charset="0"/>
               </a:rPr>
               <a:t>coredump</a:t>
+            </a:r>
+            <a:r>
+              <a:rPr lang="en-US" sz="4400" b="1" dirty="0">
+                <a:solidFill>
+                  <a:srgbClr val="1F2328"/>
+                </a:solidFill>
+                <a:latin typeface="Arial" panose="020B0604020202020204" pitchFamily="34" charset="0"/>
+                <a:cs typeface="Arial" panose="020B0604020202020204" pitchFamily="34" charset="0"/>
+              </a:rPr>
+              <a:t>.%p</a:t>
             </a:r>
             <a:r>
               <a:rPr lang="en-US" sz="4400" b="1" i="0" dirty="0">
@@ -1830,7 +1833,7 @@
               <a:t>a.out</a:t>
             </a:r>
             <a:r>
-              <a:rPr lang="en-US" sz="4400" b="1" i="0" dirty="0">
+              <a:rPr lang="en-US" sz="4400" b="1" i="0">
                 <a:solidFill>
                   <a:srgbClr val="1F2328"/>
                 </a:solidFill>
@@ -1838,18 +1841,7 @@
                 <a:latin typeface="Arial" panose="020B0604020202020204" pitchFamily="34" charset="0"/>
                 <a:cs typeface="Arial" panose="020B0604020202020204" pitchFamily="34" charset="0"/>
               </a:rPr>
-              <a:t> ./</a:t>
-            </a:r>
-            <a:r>
-              <a:rPr lang="en-US" sz="4400" b="1" i="0" dirty="0" err="1">
-                <a:solidFill>
-                  <a:srgbClr val="1F2328"/>
-                </a:solidFill>
-                <a:effectLst/>
-                <a:latin typeface="Arial" panose="020B0604020202020204" pitchFamily="34" charset="0"/>
-                <a:cs typeface="Arial" panose="020B0604020202020204" pitchFamily="34" charset="0"/>
-              </a:rPr>
-              <a:t>coredump</a:t>
+              <a:t> -c ./coredump</a:t>
             </a:r>
             <a:r>
               <a:rPr lang="en-US" sz="4400" b="0" i="0" dirty="0">
@@ -5746,7 +5738,7 @@
         </p:nvSpPr>
         <p:spPr>
           <a:xfrm>
-            <a:off x="9119870" y="70129"/>
+            <a:off x="9119870" y="835046"/>
             <a:ext cx="1864360" cy="1081405"/>
           </a:xfrm>
           <a:prstGeom prst="rect">
@@ -5782,8 +5774,8 @@
         </p:nvSpPr>
         <p:spPr>
           <a:xfrm>
-            <a:off x="908050" y="1151534"/>
-            <a:ext cx="17581245" cy="10148291"/>
+            <a:off x="1136650" y="2378075"/>
+            <a:ext cx="17581245" cy="6957674"/>
           </a:xfrm>
           <a:prstGeom prst="rect">
             <a:avLst/>
@@ -6766,252 +6758,11 @@
               <a:t> </a:t>
             </a:r>
             <a:r>
-              <a:rPr sz="3600" spc="-35" dirty="0">
+              <a:rPr sz="3600" spc="-35" dirty="0" err="1">
                 <a:latin typeface="Arial" panose="020B0604020202020204" pitchFamily="34" charset="0"/>
                 <a:cs typeface="Arial" panose="020B0604020202020204" pitchFamily="34" charset="0"/>
               </a:rPr>
               <a:t>выйти</a:t>
-            </a:r>
-            <a:endParaRPr sz="3600" dirty="0">
-              <a:latin typeface="Arial" panose="020B0604020202020204" pitchFamily="34" charset="0"/>
-              <a:cs typeface="Arial" panose="020B0604020202020204" pitchFamily="34" charset="0"/>
-            </a:endParaRPr>
-          </a:p>
-          <a:p>
-            <a:pPr marL="362585" indent="-350520">
-              <a:lnSpc>
-                <a:spcPct val="100000"/>
-              </a:lnSpc>
-              <a:spcBef>
-                <a:spcPts val="1880"/>
-              </a:spcBef>
-              <a:buChar char="•"/>
-              <a:tabLst>
-                <a:tab pos="362585" algn="l"/>
-                <a:tab pos="363220" algn="l"/>
-              </a:tabLst>
-            </a:pPr>
-            <a:r>
-              <a:rPr sz="3600" spc="60" dirty="0">
-                <a:latin typeface="Arial" panose="020B0604020202020204" pitchFamily="34" charset="0"/>
-                <a:cs typeface="Arial" panose="020B0604020202020204" pitchFamily="34" charset="0"/>
-              </a:rPr>
-              <a:t>Layout:</a:t>
-            </a:r>
-            <a:endParaRPr lang="en-US" sz="3600" spc="60" dirty="0">
-              <a:latin typeface="Arial" panose="020B0604020202020204" pitchFamily="34" charset="0"/>
-              <a:cs typeface="Arial" panose="020B0604020202020204" pitchFamily="34" charset="0"/>
-            </a:endParaRPr>
-          </a:p>
-          <a:p>
-            <a:pPr marL="819785" lvl="1" indent="-350520">
-              <a:spcBef>
-                <a:spcPts val="1880"/>
-              </a:spcBef>
-              <a:buChar char="•"/>
-              <a:tabLst>
-                <a:tab pos="362585" algn="l"/>
-                <a:tab pos="363220" algn="l"/>
-              </a:tabLst>
-            </a:pPr>
-            <a:r>
-              <a:rPr lang="en-US" sz="3600" b="1" spc="60" dirty="0">
-                <a:latin typeface="Arial" panose="020B0604020202020204" pitchFamily="34" charset="0"/>
-                <a:cs typeface="Arial" panose="020B0604020202020204" pitchFamily="34" charset="0"/>
-              </a:rPr>
-              <a:t>tui enable/disable (Ctrl + X A) / </a:t>
-            </a:r>
-            <a:r>
-              <a:rPr lang="en-US" sz="3600" b="1" spc="60" dirty="0" err="1">
-                <a:latin typeface="Arial" panose="020B0604020202020204" pitchFamily="34" charset="0"/>
-                <a:cs typeface="Arial" panose="020B0604020202020204" pitchFamily="34" charset="0"/>
-              </a:rPr>
-              <a:t>gdb</a:t>
-            </a:r>
-            <a:r>
-              <a:rPr lang="en-US" sz="3600" b="1" spc="60" dirty="0">
-                <a:latin typeface="Arial" panose="020B0604020202020204" pitchFamily="34" charset="0"/>
-                <a:cs typeface="Arial" panose="020B0604020202020204" pitchFamily="34" charset="0"/>
-              </a:rPr>
-              <a:t> –tui </a:t>
-            </a:r>
-            <a:r>
-              <a:rPr lang="en-US" sz="3600" spc="60" dirty="0">
-                <a:latin typeface="Arial" panose="020B0604020202020204" pitchFamily="34" charset="0"/>
-                <a:cs typeface="Arial" panose="020B0604020202020204" pitchFamily="34" charset="0"/>
-              </a:rPr>
-              <a:t>– </a:t>
-            </a:r>
-            <a:r>
-              <a:rPr lang="ru-RU" sz="3600" spc="60" dirty="0">
-                <a:latin typeface="Arial" panose="020B0604020202020204" pitchFamily="34" charset="0"/>
-                <a:cs typeface="Arial" panose="020B0604020202020204" pitchFamily="34" charset="0"/>
-              </a:rPr>
-              <a:t>запустить </a:t>
-            </a:r>
-            <a:r>
-              <a:rPr lang="en-US" sz="3600" spc="60" dirty="0">
-                <a:latin typeface="Arial" panose="020B0604020202020204" pitchFamily="34" charset="0"/>
-                <a:cs typeface="Arial" panose="020B0604020202020204" pitchFamily="34" charset="0"/>
-              </a:rPr>
-              <a:t>tui (Text User Interface)</a:t>
-            </a:r>
-            <a:endParaRPr sz="3600" dirty="0">
-              <a:latin typeface="Arial" panose="020B0604020202020204" pitchFamily="34" charset="0"/>
-              <a:cs typeface="Arial" panose="020B0604020202020204" pitchFamily="34" charset="0"/>
-            </a:endParaRPr>
-          </a:p>
-          <a:p>
-            <a:pPr marL="822960" lvl="1" indent="-350520">
-              <a:lnSpc>
-                <a:spcPct val="100000"/>
-              </a:lnSpc>
-              <a:spcBef>
-                <a:spcPts val="1875"/>
-              </a:spcBef>
-              <a:buChar char="•"/>
-              <a:tabLst>
-                <a:tab pos="822960" algn="l"/>
-                <a:tab pos="823594" algn="l"/>
-              </a:tabLst>
-            </a:pPr>
-            <a:r>
-              <a:rPr sz="3600" b="1" spc="85" dirty="0">
-                <a:latin typeface="Arial" panose="020B0604020202020204" pitchFamily="34" charset="0"/>
-                <a:cs typeface="Arial" panose="020B0604020202020204" pitchFamily="34" charset="0"/>
-              </a:rPr>
-              <a:t>layout</a:t>
-            </a:r>
-            <a:r>
-              <a:rPr sz="3600" b="1" spc="10" dirty="0">
-                <a:latin typeface="Arial" panose="020B0604020202020204" pitchFamily="34" charset="0"/>
-                <a:cs typeface="Arial" panose="020B0604020202020204" pitchFamily="34" charset="0"/>
-              </a:rPr>
-              <a:t> </a:t>
-            </a:r>
-            <a:r>
-              <a:rPr sz="3600" b="1" spc="95" dirty="0">
-                <a:latin typeface="Arial" panose="020B0604020202020204" pitchFamily="34" charset="0"/>
-                <a:cs typeface="Arial" panose="020B0604020202020204" pitchFamily="34" charset="0"/>
-              </a:rPr>
-              <a:t>next(n)/prev(p)/src/asm/split/regs</a:t>
-            </a:r>
-            <a:r>
-              <a:rPr sz="3600" b="1" spc="15" dirty="0">
-                <a:latin typeface="Arial" panose="020B0604020202020204" pitchFamily="34" charset="0"/>
-                <a:cs typeface="Arial" panose="020B0604020202020204" pitchFamily="34" charset="0"/>
-              </a:rPr>
-              <a:t> </a:t>
-            </a:r>
-            <a:r>
-              <a:rPr sz="3600" spc="5" dirty="0">
-                <a:latin typeface="Arial" panose="020B0604020202020204" pitchFamily="34" charset="0"/>
-                <a:cs typeface="Arial" panose="020B0604020202020204" pitchFamily="34" charset="0"/>
-              </a:rPr>
-              <a:t>-</a:t>
-            </a:r>
-            <a:r>
-              <a:rPr sz="3600" spc="15" dirty="0">
-                <a:latin typeface="Arial" panose="020B0604020202020204" pitchFamily="34" charset="0"/>
-                <a:cs typeface="Arial" panose="020B0604020202020204" pitchFamily="34" charset="0"/>
-              </a:rPr>
-              <a:t> </a:t>
-            </a:r>
-            <a:r>
-              <a:rPr sz="3600" spc="-75" dirty="0">
-                <a:latin typeface="Arial" panose="020B0604020202020204" pitchFamily="34" charset="0"/>
-                <a:cs typeface="Arial" panose="020B0604020202020204" pitchFamily="34" charset="0"/>
-              </a:rPr>
-              <a:t>изменить</a:t>
-            </a:r>
-            <a:r>
-              <a:rPr sz="3600" spc="-140" dirty="0">
-                <a:latin typeface="Arial" panose="020B0604020202020204" pitchFamily="34" charset="0"/>
-                <a:cs typeface="Arial" panose="020B0604020202020204" pitchFamily="34" charset="0"/>
-              </a:rPr>
-              <a:t> </a:t>
-            </a:r>
-            <a:r>
-              <a:rPr sz="3600" spc="85" dirty="0">
-                <a:latin typeface="Arial" panose="020B0604020202020204" pitchFamily="34" charset="0"/>
-                <a:cs typeface="Arial" panose="020B0604020202020204" pitchFamily="34" charset="0"/>
-              </a:rPr>
-              <a:t>layout</a:t>
-            </a:r>
-            <a:endParaRPr sz="3600" dirty="0">
-              <a:latin typeface="Arial" panose="020B0604020202020204" pitchFamily="34" charset="0"/>
-              <a:cs typeface="Arial" panose="020B0604020202020204" pitchFamily="34" charset="0"/>
-            </a:endParaRPr>
-          </a:p>
-          <a:p>
-            <a:pPr marL="822960" lvl="1" indent="-350520">
-              <a:lnSpc>
-                <a:spcPct val="100000"/>
-              </a:lnSpc>
-              <a:spcBef>
-                <a:spcPts val="1889"/>
-              </a:spcBef>
-              <a:buChar char="•"/>
-              <a:tabLst>
-                <a:tab pos="822960" algn="l"/>
-                <a:tab pos="823594" algn="l"/>
-              </a:tabLst>
-            </a:pPr>
-            <a:r>
-              <a:rPr sz="3600" b="1" spc="110" dirty="0">
-                <a:latin typeface="Arial" panose="020B0604020202020204" pitchFamily="34" charset="0"/>
-                <a:cs typeface="Arial" panose="020B0604020202020204" pitchFamily="34" charset="0"/>
-              </a:rPr>
-              <a:t>focus</a:t>
-            </a:r>
-            <a:r>
-              <a:rPr sz="3600" b="1" spc="5" dirty="0">
-                <a:latin typeface="Arial" panose="020B0604020202020204" pitchFamily="34" charset="0"/>
-                <a:cs typeface="Arial" panose="020B0604020202020204" pitchFamily="34" charset="0"/>
-              </a:rPr>
-              <a:t> </a:t>
-            </a:r>
-            <a:r>
-              <a:rPr sz="3600" b="1" spc="95" dirty="0">
-                <a:latin typeface="Arial" panose="020B0604020202020204" pitchFamily="34" charset="0"/>
-                <a:cs typeface="Arial" panose="020B0604020202020204" pitchFamily="34" charset="0"/>
-              </a:rPr>
-              <a:t>next(n)/prev(p)/src/asm/split/regs</a:t>
-            </a:r>
-            <a:r>
-              <a:rPr sz="3600" b="1" spc="10" dirty="0">
-                <a:latin typeface="Arial" panose="020B0604020202020204" pitchFamily="34" charset="0"/>
-                <a:cs typeface="Arial" panose="020B0604020202020204" pitchFamily="34" charset="0"/>
-              </a:rPr>
-              <a:t> </a:t>
-            </a:r>
-            <a:r>
-              <a:rPr sz="3600" spc="5" dirty="0">
-                <a:latin typeface="Arial" panose="020B0604020202020204" pitchFamily="34" charset="0"/>
-                <a:cs typeface="Arial" panose="020B0604020202020204" pitchFamily="34" charset="0"/>
-              </a:rPr>
-              <a:t>- </a:t>
-            </a:r>
-            <a:r>
-              <a:rPr sz="3600" spc="-75" dirty="0">
-                <a:latin typeface="Arial" panose="020B0604020202020204" pitchFamily="34" charset="0"/>
-                <a:cs typeface="Arial" panose="020B0604020202020204" pitchFamily="34" charset="0"/>
-              </a:rPr>
-              <a:t>изменить</a:t>
-            </a:r>
-            <a:r>
-              <a:rPr sz="3600" spc="-145" dirty="0">
-                <a:latin typeface="Arial" panose="020B0604020202020204" pitchFamily="34" charset="0"/>
-                <a:cs typeface="Arial" panose="020B0604020202020204" pitchFamily="34" charset="0"/>
-              </a:rPr>
-              <a:t> </a:t>
-            </a:r>
-            <a:r>
-              <a:rPr sz="3600" spc="-35" dirty="0">
-                <a:latin typeface="Arial" panose="020B0604020202020204" pitchFamily="34" charset="0"/>
-                <a:cs typeface="Arial" panose="020B0604020202020204" pitchFamily="34" charset="0"/>
-              </a:rPr>
-              <a:t>фокус</a:t>
             </a:r>
             <a:endParaRPr sz="3600" dirty="0">
               <a:latin typeface="Arial" panose="020B0604020202020204" pitchFamily="34" charset="0"/>
